--- a/LMS_Data_Architecture_and_Flow.pptx
+++ b/LMS_Data_Architecture_and_Flow.pptx
@@ -16,6 +16,8 @@
     <p:sldId id="264" r:id="rId15"/>
     <p:sldId id="265" r:id="rId16"/>
     <p:sldId id="266" r:id="rId17"/>
+    <p:sldId id="267" r:id="rId18"/>
+    <p:sldId id="268" r:id="rId19"/>
   </p:sldIdLst>
   <p:sldSz cx="12191695" cy="6858000" type="screen4x3"/>
   <p:notesSz cx="6858000" cy="9144000"/>
@@ -3227,7 +3229,7 @@
               <a:spcBef>
                 <a:spcPts val="1200"/>
               </a:spcBef>
-              <a:defRPr sz="2000">
+              <a:defRPr sz="1900">
                 <a:solidFill>
                   <a:srgbClr val="F59E0B"/>
                 </a:solidFill>
@@ -3235,7 +3237,7 @@
               </a:defRPr>
             </a:pPr>
             <a:r>
-              <a:t>End-to-End Business Pipeline &amp; 22-Table Relational Schema for Data Analytics</a:t>
+              <a:t>End-to-End Business Pipeline, ER Table Connections &amp; 22-Table Schema for Data Analytics</a:t>
             </a:r>
           </a:p>
           <a:p>
@@ -3350,7 +3352,7 @@
               </a:defRPr>
             </a:pPr>
             <a:r>
-              <a:t>9. Analytics Projects 4 &amp; 5: Quality &amp; Career Funnel</a:t>
+              <a:t>9. Data Analytics Project 2: Student Churn Prediction</a:t>
             </a:r>
           </a:p>
           <a:p>
@@ -3363,7 +3365,7 @@
               </a:defRPr>
             </a:pPr>
             <a:r>
-              <a:t>Faculty Evaluation &amp; Job Placement Readiness Analytics</a:t>
+              <a:t>Predictive Analytics for Academic Retention &amp; Early Intervention</a:t>
             </a:r>
           </a:p>
         </p:txBody>
@@ -3437,81 +3439,81 @@
           <a:p>
             <a:pPr>
               <a:spcAft>
-                <a:spcPts val="1000"/>
-              </a:spcAft>
-              <a:defRPr sz="1800" b="1">
-                <a:solidFill>
-                  <a:srgbClr val="10B981"/>
-                </a:solidFill>
-                <a:latin typeface="Calibri"/>
-              </a:defRPr>
-            </a:pPr>
-            <a:r>
-              <a:t>⭐ Project 4: Trainer Satisfaction Index</a:t>
-            </a:r>
-          </a:p>
-          <a:p>
-            <a:pPr>
-              <a:spcAft>
-                <a:spcPts val="600"/>
-              </a:spcAft>
-              <a:defRPr sz="1300">
-                <a:solidFill>
-                  <a:srgbClr val="1E293B"/>
-                </a:solidFill>
-                <a:latin typeface="Calibri"/>
-              </a:defRPr>
-            </a:pPr>
-            <a:r>
-              <a:t>• Primary Tables: feedback, batches, users</a:t>
-            </a:r>
-          </a:p>
-          <a:p>
-            <a:pPr>
-              <a:spcAft>
-                <a:spcPts val="600"/>
-              </a:spcAft>
-              <a:defRPr sz="1300">
-                <a:solidFill>
-                  <a:srgbClr val="1E293B"/>
-                </a:solidFill>
-                <a:latin typeface="Calibri"/>
-              </a:defRPr>
-            </a:pPr>
-            <a:r>
-              <a:t>• Metric: Weekly 1 to 5 star rating average per trainer.</a:t>
-            </a:r>
-          </a:p>
-          <a:p>
-            <a:pPr>
-              <a:spcAft>
-                <a:spcPts val="600"/>
-              </a:spcAft>
-              <a:defRPr sz="1300">
-                <a:solidFill>
-                  <a:srgbClr val="1E293B"/>
-                </a:solidFill>
-                <a:latin typeface="Calibri"/>
-              </a:defRPr>
-            </a:pPr>
-            <a:r>
-              <a:t>• NLP Sentiment Analysis: Text mining qualitative comments in feedback.comments.</a:t>
-            </a:r>
-          </a:p>
-          <a:p>
-            <a:pPr>
-              <a:spcAft>
-                <a:spcPts val="600"/>
-              </a:spcAft>
-              <a:defRPr sz="1300">
-                <a:solidFill>
-                  <a:srgbClr val="1E293B"/>
-                </a:solidFill>
-                <a:latin typeface="Calibri"/>
-              </a:defRPr>
-            </a:pPr>
-            <a:r>
-              <a:t>• Goal: Ensuring consistent teaching quality across cohorts.</a:t>
+                <a:spcPts val="800"/>
+              </a:spcAft>
+              <a:defRPr sz="1700" b="1">
+                <a:solidFill>
+                  <a:srgbClr val="0066FF"/>
+                </a:solidFill>
+                <a:latin typeface="Calibri"/>
+              </a:defRPr>
+            </a:pPr>
+            <a:r>
+              <a:t>📊 Metric Formulas</a:t>
+            </a:r>
+          </a:p>
+          <a:p>
+            <a:pPr>
+              <a:spcAft>
+                <a:spcPts val="400"/>
+              </a:spcAft>
+              <a:defRPr sz="1200">
+                <a:solidFill>
+                  <a:srgbClr val="1E293B"/>
+                </a:solidFill>
+                <a:latin typeface="Calibri"/>
+              </a:defRPr>
+            </a:pPr>
+            <a:r>
+              <a:t>• Attendance Percentage = (Count of PRESENT / Total Batch Days) * 100</a:t>
+            </a:r>
+          </a:p>
+          <a:p>
+            <a:pPr>
+              <a:spcAft>
+                <a:spcPts val="400"/>
+              </a:spcAft>
+              <a:defRPr sz="1200">
+                <a:solidFill>
+                  <a:srgbClr val="1E293B"/>
+                </a:solidFill>
+                <a:latin typeface="Calibri"/>
+              </a:defRPr>
+            </a:pPr>
+            <a:r>
+              <a:t>• Task Overdue Rate = (Count of OVERDUE Tasks / Total Assigned Tasks) * 100</a:t>
+            </a:r>
+          </a:p>
+          <a:p>
+            <a:pPr>
+              <a:spcAft>
+                <a:spcPts val="400"/>
+              </a:spcAft>
+              <a:defRPr sz="1200">
+                <a:solidFill>
+                  <a:srgbClr val="1E293B"/>
+                </a:solidFill>
+                <a:latin typeface="Calibri"/>
+              </a:defRPr>
+            </a:pPr>
+            <a:r>
+              <a:t>• Primary Tables: attendance, tasks, leave_requests, feedback</a:t>
+            </a:r>
+          </a:p>
+          <a:p>
+            <a:pPr>
+              <a:spcAft>
+                <a:spcPts val="400"/>
+              </a:spcAft>
+              <a:defRPr sz="1200">
+                <a:solidFill>
+                  <a:srgbClr val="1E293B"/>
+                </a:solidFill>
+                <a:latin typeface="Calibri"/>
+              </a:defRPr>
+            </a:pPr>
+            <a:r>
+              <a:t>• Goal: Identify at-risk students before course abandonment.</a:t>
             </a:r>
           </a:p>
         </p:txBody>
@@ -3585,81 +3587,81 @@
           <a:p>
             <a:pPr>
               <a:spcAft>
-                <a:spcPts val="1000"/>
-              </a:spcAft>
-              <a:defRPr sz="1800" b="1">
-                <a:solidFill>
-                  <a:srgbClr val="F59E0B"/>
-                </a:solidFill>
-                <a:latin typeface="Calibri"/>
-              </a:defRPr>
-            </a:pPr>
-            <a:r>
-              <a:t>💼 Project 5: Placement Funnel Performance</a:t>
-            </a:r>
-          </a:p>
-          <a:p>
-            <a:pPr>
-              <a:spcAft>
-                <a:spcPts val="600"/>
-              </a:spcAft>
-              <a:defRPr sz="1300">
-                <a:solidFill>
-                  <a:srgbClr val="1E293B"/>
-                </a:solidFill>
-                <a:latin typeface="Calibri"/>
-              </a:defRPr>
-            </a:pPr>
-            <a:r>
-              <a:t>• Primary Tables: job_applications, jobs, mock_interviews</a:t>
-            </a:r>
-          </a:p>
-          <a:p>
-            <a:pPr>
-              <a:spcAft>
-                <a:spcPts val="600"/>
-              </a:spcAft>
-              <a:defRPr sz="1300">
-                <a:solidFill>
-                  <a:srgbClr val="1E293B"/>
-                </a:solidFill>
-                <a:latin typeface="Calibri"/>
-              </a:defRPr>
-            </a:pPr>
-            <a:r>
-              <a:t>• Metric: Correlation between Mock Score (&gt;80) and Job Selection.</a:t>
-            </a:r>
-          </a:p>
-          <a:p>
-            <a:pPr>
-              <a:spcAft>
-                <a:spcPts val="600"/>
-              </a:spcAft>
-              <a:defRPr sz="1300">
-                <a:solidFill>
-                  <a:srgbClr val="1E293B"/>
-                </a:solidFill>
-                <a:latin typeface="Calibri"/>
-              </a:defRPr>
-            </a:pPr>
-            <a:r>
-              <a:t>• Recruitment Funnel Conversion %: APPLIED -&gt; SHORTLISTED -&gt; INTERVIEW -&gt; SELECTED.</a:t>
-            </a:r>
-          </a:p>
-          <a:p>
-            <a:pPr>
-              <a:spcAft>
-                <a:spcPts val="600"/>
-              </a:spcAft>
-              <a:defRPr sz="1300">
-                <a:solidFill>
-                  <a:srgbClr val="1E293B"/>
-                </a:solidFill>
-                <a:latin typeface="Calibri"/>
-              </a:defRPr>
-            </a:pPr>
-            <a:r>
-              <a:t>• Goal: Maximizing corporate hiring rates for students.</a:t>
+                <a:spcPts val="800"/>
+              </a:spcAft>
+              <a:defRPr sz="1700" b="1">
+                <a:solidFill>
+                  <a:srgbClr val="10B981"/>
+                </a:solidFill>
+                <a:latin typeface="Calibri"/>
+              </a:defRPr>
+            </a:pPr>
+            <a:r>
+              <a:t>🎯 Churn Risk Rules &amp; Actions</a:t>
+            </a:r>
+          </a:p>
+          <a:p>
+            <a:pPr>
+              <a:spcAft>
+                <a:spcPts val="400"/>
+              </a:spcAft>
+              <a:defRPr sz="1200">
+                <a:solidFill>
+                  <a:srgbClr val="1E293B"/>
+                </a:solidFill>
+                <a:latin typeface="Calibri"/>
+              </a:defRPr>
+            </a:pPr>
+            <a:r>
+              <a:t>• High Risk Threshold: Attendance &lt; 75% AND Overdue Tasks &gt; 30%.</a:t>
+            </a:r>
+          </a:p>
+          <a:p>
+            <a:pPr>
+              <a:spcAft>
+                <a:spcPts val="400"/>
+              </a:spcAft>
+              <a:defRPr sz="1200">
+                <a:solidFill>
+                  <a:srgbClr val="1E293B"/>
+                </a:solidFill>
+                <a:latin typeface="Calibri"/>
+              </a:defRPr>
+            </a:pPr>
+            <a:r>
+              <a:t>• Early Warning Indicator: Consistently low weekly feedback rating (&lt; 3 stars).</a:t>
+            </a:r>
+          </a:p>
+          <a:p>
+            <a:pPr>
+              <a:spcAft>
+                <a:spcPts val="400"/>
+              </a:spcAft>
+              <a:defRPr sz="1200">
+                <a:solidFill>
+                  <a:srgbClr val="1E293B"/>
+                </a:solidFill>
+                <a:latin typeface="Calibri"/>
+              </a:defRPr>
+            </a:pPr>
+            <a:r>
+              <a:t>• Intervention Trigger: Automated alert to batch trainers and academic advisors.</a:t>
+            </a:r>
+          </a:p>
+          <a:p>
+            <a:pPr>
+              <a:spcAft>
+                <a:spcPts val="400"/>
+              </a:spcAft>
+              <a:defRPr sz="1200">
+                <a:solidFill>
+                  <a:srgbClr val="1E293B"/>
+                </a:solidFill>
+                <a:latin typeface="Calibri"/>
+              </a:defRPr>
+            </a:pPr>
+            <a:r>
+              <a:t>• Outcome: Increased course completion rate and student success.</a:t>
             </a:r>
           </a:p>
         </p:txBody>
@@ -3758,7 +3760,7 @@
               </a:defRPr>
             </a:pPr>
             <a:r>
-              <a:t>10. Summary &amp; Key Takeaways for Students</a:t>
+              <a:t>10. Data Analytics Project 3: Revenue &amp; Fee Realization</a:t>
             </a:r>
           </a:p>
           <a:p>
@@ -3771,7 +3773,7 @@
               </a:defRPr>
             </a:pPr>
             <a:r>
-              <a:t>Connecting Database Architecture with Real-World BI &amp; Analytics</a:t>
+              <a:t>Financial Analytics &amp; Tuition Collection Efficiency</a:t>
             </a:r>
           </a:p>
         </p:txBody>
@@ -3785,7 +3787,7 @@
         <p:spPr>
           <a:xfrm>
             <a:off x="731520" y="1463040"/>
-            <a:ext cx="10728655" cy="4754880"/>
+            <a:ext cx="5120640" cy="4754880"/>
           </a:xfrm>
           <a:prstGeom prst="roundRect">
             <a:avLst/>
@@ -3830,7 +3832,7 @@
         <p:spPr>
           <a:xfrm>
             <a:off x="914400" y="1600200"/>
-            <a:ext cx="10362895" cy="4480560"/>
+            <a:ext cx="4754879" cy="4480560"/>
           </a:xfrm>
           <a:prstGeom prst="rect">
             <a:avLst/>
@@ -3845,9 +3847,173 @@
           <a:p>
             <a:pPr>
               <a:spcAft>
-                <a:spcPts val="1000"/>
-              </a:spcAft>
-              <a:defRPr sz="1800" b="1">
+                <a:spcPts val="800"/>
+              </a:spcAft>
+              <a:defRPr sz="1700" b="1">
+                <a:solidFill>
+                  <a:srgbClr val="F59E0B"/>
+                </a:solidFill>
+                <a:latin typeface="Calibri"/>
+              </a:defRPr>
+            </a:pPr>
+            <a:r>
+              <a:t>💰 Revenue Metrics</a:t>
+            </a:r>
+          </a:p>
+          <a:p>
+            <a:pPr>
+              <a:spcAft>
+                <a:spcPts val="400"/>
+              </a:spcAft>
+              <a:defRPr sz="1200">
+                <a:solidFill>
+                  <a:srgbClr val="1E293B"/>
+                </a:solidFill>
+                <a:latin typeface="Calibri"/>
+              </a:defRPr>
+            </a:pPr>
+            <a:r>
+              <a:t>• Total Agreed Tuition Revenue = SUM(feeAmount)</a:t>
+            </a:r>
+          </a:p>
+          <a:p>
+            <a:pPr>
+              <a:spcAft>
+                <a:spcPts val="400"/>
+              </a:spcAft>
+              <a:defRPr sz="1200">
+                <a:solidFill>
+                  <a:srgbClr val="1E293B"/>
+                </a:solidFill>
+                <a:latin typeface="Calibri"/>
+              </a:defRPr>
+            </a:pPr>
+            <a:r>
+              <a:t>• Collected Cash Realization = SUM(feePaid)</a:t>
+            </a:r>
+          </a:p>
+          <a:p>
+            <a:pPr>
+              <a:spcAft>
+                <a:spcPts val="400"/>
+              </a:spcAft>
+              <a:defRPr sz="1200">
+                <a:solidFill>
+                  <a:srgbClr val="1E293B"/>
+                </a:solidFill>
+                <a:latin typeface="Calibri"/>
+              </a:defRPr>
+            </a:pPr>
+            <a:r>
+              <a:t>• Outstanding Fee Balance = SUM(feeAmount - feePaid)</a:t>
+            </a:r>
+          </a:p>
+          <a:p>
+            <a:pPr>
+              <a:spcAft>
+                <a:spcPts val="400"/>
+              </a:spcAft>
+              <a:defRPr sz="1200">
+                <a:solidFill>
+                  <a:srgbClr val="1E293B"/>
+                </a:solidFill>
+                <a:latin typeface="Calibri"/>
+              </a:defRPr>
+            </a:pPr>
+            <a:r>
+              <a:t>• Collection Efficiency % = (Total Fee Paid / Total Fee Amount) * 100</a:t>
+            </a:r>
+          </a:p>
+          <a:p>
+            <a:pPr>
+              <a:spcAft>
+                <a:spcPts val="400"/>
+              </a:spcAft>
+              <a:defRPr sz="1200">
+                <a:solidFill>
+                  <a:srgbClr val="1E293B"/>
+                </a:solidFill>
+                <a:latin typeface="Calibri"/>
+              </a:defRPr>
+            </a:pPr>
+            <a:r>
+              <a:t>• Primary Tables: registrations, courses, batches</a:t>
+            </a:r>
+          </a:p>
+        </p:txBody>
+      </p:sp>
+      <p:sp>
+        <p:nvSpPr>
+          <p:cNvPr id="6" name="Rounded Rectangle 5"/>
+          <p:cNvSpPr/>
+          <p:nvPr/>
+        </p:nvSpPr>
+        <p:spPr>
+          <a:xfrm>
+            <a:off x="6217920" y="1463040"/>
+            <a:ext cx="5120640" cy="4754880"/>
+          </a:xfrm>
+          <a:prstGeom prst="roundRect">
+            <a:avLst/>
+          </a:prstGeom>
+          <a:solidFill>
+            <a:srgbClr val="FFFFFF"/>
+          </a:solidFill>
+          <a:ln w="19050">
+            <a:solidFill>
+              <a:srgbClr val="E2E8F0"/>
+            </a:solidFill>
+          </a:ln>
+        </p:spPr>
+        <p:style>
+          <a:lnRef idx="1">
+            <a:schemeClr val="accent1"/>
+          </a:lnRef>
+          <a:fillRef idx="3">
+            <a:schemeClr val="accent1"/>
+          </a:fillRef>
+          <a:effectRef idx="2">
+            <a:schemeClr val="accent1"/>
+          </a:effectRef>
+          <a:fontRef idx="minor">
+            <a:schemeClr val="lt1"/>
+          </a:fontRef>
+        </p:style>
+        <p:txBody>
+          <a:bodyPr rtlCol="0" anchor="ctr"/>
+          <a:lstStyle/>
+          <a:p>
+            <a:pPr algn="ctr"/>
+          </a:p>
+        </p:txBody>
+      </p:sp>
+      <p:sp>
+        <p:nvSpPr>
+          <p:cNvPr id="7" name="TextBox 6"/>
+          <p:cNvSpPr txBox="1"/>
+          <p:nvPr/>
+        </p:nvSpPr>
+        <p:spPr>
+          <a:xfrm>
+            <a:off x="6400800" y="1600200"/>
+            <a:ext cx="4754879" cy="4480560"/>
+          </a:xfrm>
+          <a:prstGeom prst="rect">
+            <a:avLst/>
+          </a:prstGeom>
+          <a:noFill/>
+        </p:spPr>
+        <p:txBody>
+          <a:bodyPr wrap="square">
+            <a:spAutoFit/>
+          </a:bodyPr>
+          <a:lstStyle/>
+          <a:p>
+            <a:pPr>
+              <a:spcAft>
+                <a:spcPts val="800"/>
+              </a:spcAft>
+              <a:defRPr sz="1700" b="1">
                 <a:solidFill>
                   <a:srgbClr val="0066FF"/>
                 </a:solidFill>
@@ -3855,15 +4021,683 @@
               </a:defRPr>
             </a:pPr>
             <a:r>
+              <a:t>📈 BI Dashboard Questions</a:t>
+            </a:r>
+          </a:p>
+          <a:p>
+            <a:pPr>
+              <a:spcAft>
+                <a:spcPts val="400"/>
+              </a:spcAft>
+              <a:defRPr sz="1200">
+                <a:solidFill>
+                  <a:srgbClr val="1E293B"/>
+                </a:solidFill>
+                <a:latin typeface="Calibri"/>
+              </a:defRPr>
+            </a:pPr>
+            <a:r>
+              <a:t>• 1. Which course generates the highest gross revenue per batch?</a:t>
+            </a:r>
+          </a:p>
+          <a:p>
+            <a:pPr>
+              <a:spcAft>
+                <a:spcPts val="400"/>
+              </a:spcAft>
+              <a:defRPr sz="1200">
+                <a:solidFill>
+                  <a:srgbClr val="1E293B"/>
+                </a:solidFill>
+                <a:latin typeface="Calibri"/>
+              </a:defRPr>
+            </a:pPr>
+            <a:r>
+              <a:t>• 2. What is the total uncollected fee balance across active batches?</a:t>
+            </a:r>
+          </a:p>
+          <a:p>
+            <a:pPr>
+              <a:spcAft>
+                <a:spcPts val="400"/>
+              </a:spcAft>
+              <a:defRPr sz="1200">
+                <a:solidFill>
+                  <a:srgbClr val="1E293B"/>
+                </a:solidFill>
+                <a:latin typeface="Calibri"/>
+              </a:defRPr>
+            </a:pPr>
+            <a:r>
+              <a:t>• 3. Fee payment delinquency trends by student enrollment month.</a:t>
+            </a:r>
+          </a:p>
+          <a:p>
+            <a:pPr>
+              <a:spcAft>
+                <a:spcPts val="400"/>
+              </a:spcAft>
+              <a:defRPr sz="1200">
+                <a:solidFill>
+                  <a:srgbClr val="1E293B"/>
+                </a:solidFill>
+                <a:latin typeface="Calibri"/>
+              </a:defRPr>
+            </a:pPr>
+            <a:r>
+              <a:t>• 4. Revenue realization forecasting for upcoming batch end-dates.</a:t>
+            </a:r>
+          </a:p>
+        </p:txBody>
+      </p:sp>
+    </p:spTree>
+  </p:cSld>
+  <p:clrMapOvr>
+    <a:masterClrMapping/>
+  </p:clrMapOvr>
+</p:sld>
+</file>
+
+<file path=ppt/slides/slide12.xml><?xml version="1.0" encoding="utf-8"?>
+<p:sld xmlns:a="http://schemas.openxmlformats.org/drawingml/2006/main" xmlns:p="http://schemas.openxmlformats.org/presentationml/2006/main" xmlns:r="http://schemas.openxmlformats.org/officeDocument/2006/relationships">
+  <p:cSld>
+    <p:spTree>
+      <p:nvGrpSpPr>
+        <p:cNvPr id="1" name=""/>
+        <p:cNvGrpSpPr/>
+        <p:nvPr/>
+      </p:nvGrpSpPr>
+      <p:grpSpPr/>
+      <p:sp>
+        <p:nvSpPr>
+          <p:cNvPr id="2" name="Rectangle 1"/>
+          <p:cNvSpPr/>
+          <p:nvPr/>
+        </p:nvSpPr>
+        <p:spPr>
+          <a:xfrm>
+            <a:off x="0" y="0"/>
+            <a:ext cx="12191695" cy="1097280"/>
+          </a:xfrm>
+          <a:prstGeom prst="rect">
+            <a:avLst/>
+          </a:prstGeom>
+          <a:solidFill>
+            <a:srgbClr val="0F172A"/>
+          </a:solidFill>
+          <a:ln>
+            <a:solidFill>
+              <a:srgbClr val="0F172A"/>
+            </a:solidFill>
+          </a:ln>
+        </p:spPr>
+        <p:style>
+          <a:lnRef idx="1">
+            <a:schemeClr val="accent1"/>
+          </a:lnRef>
+          <a:fillRef idx="3">
+            <a:schemeClr val="accent1"/>
+          </a:fillRef>
+          <a:effectRef idx="2">
+            <a:schemeClr val="accent1"/>
+          </a:effectRef>
+          <a:fontRef idx="minor">
+            <a:schemeClr val="lt1"/>
+          </a:fontRef>
+        </p:style>
+        <p:txBody>
+          <a:bodyPr rtlCol="0" anchor="ctr"/>
+          <a:lstStyle/>
+          <a:p>
+            <a:pPr algn="ctr"/>
+          </a:p>
+        </p:txBody>
+      </p:sp>
+      <p:sp>
+        <p:nvSpPr>
+          <p:cNvPr id="3" name="TextBox 2"/>
+          <p:cNvSpPr txBox="1"/>
+          <p:nvPr/>
+        </p:nvSpPr>
+        <p:spPr>
+          <a:xfrm>
+            <a:off x="731520" y="137160"/>
+            <a:ext cx="10728655" cy="502920"/>
+          </a:xfrm>
+          <a:prstGeom prst="rect">
+            <a:avLst/>
+          </a:prstGeom>
+          <a:noFill/>
+        </p:spPr>
+        <p:txBody>
+          <a:bodyPr wrap="square">
+            <a:spAutoFit/>
+          </a:bodyPr>
+          <a:lstStyle/>
+          <a:p>
+            <a:pPr>
+              <a:defRPr sz="2600" b="1">
+                <a:solidFill>
+                  <a:srgbClr val="FFFFFF"/>
+                </a:solidFill>
+                <a:latin typeface="Calibri"/>
+              </a:defRPr>
+            </a:pPr>
+            <a:r>
+              <a:t>11. Analytics Projects 4 &amp; 5: Quality &amp; Career Funnel</a:t>
+            </a:r>
+          </a:p>
+          <a:p>
+            <a:pPr>
+              <a:defRPr sz="1300">
+                <a:solidFill>
+                  <a:srgbClr val="F59E0B"/>
+                </a:solidFill>
+                <a:latin typeface="Calibri"/>
+              </a:defRPr>
+            </a:pPr>
+            <a:r>
+              <a:t>Faculty Evaluation &amp; Job Placement Readiness Analytics</a:t>
+            </a:r>
+          </a:p>
+        </p:txBody>
+      </p:sp>
+      <p:sp>
+        <p:nvSpPr>
+          <p:cNvPr id="4" name="Rounded Rectangle 3"/>
+          <p:cNvSpPr/>
+          <p:nvPr/>
+        </p:nvSpPr>
+        <p:spPr>
+          <a:xfrm>
+            <a:off x="731520" y="1463040"/>
+            <a:ext cx="5120640" cy="4754880"/>
+          </a:xfrm>
+          <a:prstGeom prst="roundRect">
+            <a:avLst/>
+          </a:prstGeom>
+          <a:solidFill>
+            <a:srgbClr val="FFFFFF"/>
+          </a:solidFill>
+          <a:ln w="19050">
+            <a:solidFill>
+              <a:srgbClr val="E2E8F0"/>
+            </a:solidFill>
+          </a:ln>
+        </p:spPr>
+        <p:style>
+          <a:lnRef idx="1">
+            <a:schemeClr val="accent1"/>
+          </a:lnRef>
+          <a:fillRef idx="3">
+            <a:schemeClr val="accent1"/>
+          </a:fillRef>
+          <a:effectRef idx="2">
+            <a:schemeClr val="accent1"/>
+          </a:effectRef>
+          <a:fontRef idx="minor">
+            <a:schemeClr val="lt1"/>
+          </a:fontRef>
+        </p:style>
+        <p:txBody>
+          <a:bodyPr rtlCol="0" anchor="ctr"/>
+          <a:lstStyle/>
+          <a:p>
+            <a:pPr algn="ctr"/>
+          </a:p>
+        </p:txBody>
+      </p:sp>
+      <p:sp>
+        <p:nvSpPr>
+          <p:cNvPr id="5" name="TextBox 4"/>
+          <p:cNvSpPr txBox="1"/>
+          <p:nvPr/>
+        </p:nvSpPr>
+        <p:spPr>
+          <a:xfrm>
+            <a:off x="914400" y="1600200"/>
+            <a:ext cx="4754879" cy="4480560"/>
+          </a:xfrm>
+          <a:prstGeom prst="rect">
+            <a:avLst/>
+          </a:prstGeom>
+          <a:noFill/>
+        </p:spPr>
+        <p:txBody>
+          <a:bodyPr wrap="square">
+            <a:spAutoFit/>
+          </a:bodyPr>
+          <a:lstStyle/>
+          <a:p>
+            <a:pPr>
+              <a:spcAft>
+                <a:spcPts val="800"/>
+              </a:spcAft>
+              <a:defRPr sz="1700" b="1">
+                <a:solidFill>
+                  <a:srgbClr val="10B981"/>
+                </a:solidFill>
+                <a:latin typeface="Calibri"/>
+              </a:defRPr>
+            </a:pPr>
+            <a:r>
+              <a:t>⭐ Project 4: Trainer Satisfaction Index</a:t>
+            </a:r>
+          </a:p>
+          <a:p>
+            <a:pPr>
+              <a:spcAft>
+                <a:spcPts val="400"/>
+              </a:spcAft>
+              <a:defRPr sz="1200">
+                <a:solidFill>
+                  <a:srgbClr val="1E293B"/>
+                </a:solidFill>
+                <a:latin typeface="Calibri"/>
+              </a:defRPr>
+            </a:pPr>
+            <a:r>
+              <a:t>• Primary Tables: feedback, batches, users</a:t>
+            </a:r>
+          </a:p>
+          <a:p>
+            <a:pPr>
+              <a:spcAft>
+                <a:spcPts val="400"/>
+              </a:spcAft>
+              <a:defRPr sz="1200">
+                <a:solidFill>
+                  <a:srgbClr val="1E293B"/>
+                </a:solidFill>
+                <a:latin typeface="Calibri"/>
+              </a:defRPr>
+            </a:pPr>
+            <a:r>
+              <a:t>• Metric: Weekly 1 to 5 star rating average per trainer.</a:t>
+            </a:r>
+          </a:p>
+          <a:p>
+            <a:pPr>
+              <a:spcAft>
+                <a:spcPts val="400"/>
+              </a:spcAft>
+              <a:defRPr sz="1200">
+                <a:solidFill>
+                  <a:srgbClr val="1E293B"/>
+                </a:solidFill>
+                <a:latin typeface="Calibri"/>
+              </a:defRPr>
+            </a:pPr>
+            <a:r>
+              <a:t>• NLP Sentiment Analysis: Text mining qualitative comments in feedback.comments.</a:t>
+            </a:r>
+          </a:p>
+          <a:p>
+            <a:pPr>
+              <a:spcAft>
+                <a:spcPts val="400"/>
+              </a:spcAft>
+              <a:defRPr sz="1200">
+                <a:solidFill>
+                  <a:srgbClr val="1E293B"/>
+                </a:solidFill>
+                <a:latin typeface="Calibri"/>
+              </a:defRPr>
+            </a:pPr>
+            <a:r>
+              <a:t>• Goal: Ensuring consistent teaching quality across cohorts.</a:t>
+            </a:r>
+          </a:p>
+        </p:txBody>
+      </p:sp>
+      <p:sp>
+        <p:nvSpPr>
+          <p:cNvPr id="6" name="Rounded Rectangle 5"/>
+          <p:cNvSpPr/>
+          <p:nvPr/>
+        </p:nvSpPr>
+        <p:spPr>
+          <a:xfrm>
+            <a:off x="6217920" y="1463040"/>
+            <a:ext cx="5120640" cy="4754880"/>
+          </a:xfrm>
+          <a:prstGeom prst="roundRect">
+            <a:avLst/>
+          </a:prstGeom>
+          <a:solidFill>
+            <a:srgbClr val="FFFFFF"/>
+          </a:solidFill>
+          <a:ln w="19050">
+            <a:solidFill>
+              <a:srgbClr val="E2E8F0"/>
+            </a:solidFill>
+          </a:ln>
+        </p:spPr>
+        <p:style>
+          <a:lnRef idx="1">
+            <a:schemeClr val="accent1"/>
+          </a:lnRef>
+          <a:fillRef idx="3">
+            <a:schemeClr val="accent1"/>
+          </a:fillRef>
+          <a:effectRef idx="2">
+            <a:schemeClr val="accent1"/>
+          </a:effectRef>
+          <a:fontRef idx="minor">
+            <a:schemeClr val="lt1"/>
+          </a:fontRef>
+        </p:style>
+        <p:txBody>
+          <a:bodyPr rtlCol="0" anchor="ctr"/>
+          <a:lstStyle/>
+          <a:p>
+            <a:pPr algn="ctr"/>
+          </a:p>
+        </p:txBody>
+      </p:sp>
+      <p:sp>
+        <p:nvSpPr>
+          <p:cNvPr id="7" name="TextBox 6"/>
+          <p:cNvSpPr txBox="1"/>
+          <p:nvPr/>
+        </p:nvSpPr>
+        <p:spPr>
+          <a:xfrm>
+            <a:off x="6400800" y="1600200"/>
+            <a:ext cx="4754879" cy="4480560"/>
+          </a:xfrm>
+          <a:prstGeom prst="rect">
+            <a:avLst/>
+          </a:prstGeom>
+          <a:noFill/>
+        </p:spPr>
+        <p:txBody>
+          <a:bodyPr wrap="square">
+            <a:spAutoFit/>
+          </a:bodyPr>
+          <a:lstStyle/>
+          <a:p>
+            <a:pPr>
+              <a:spcAft>
+                <a:spcPts val="800"/>
+              </a:spcAft>
+              <a:defRPr sz="1700" b="1">
+                <a:solidFill>
+                  <a:srgbClr val="F59E0B"/>
+                </a:solidFill>
+                <a:latin typeface="Calibri"/>
+              </a:defRPr>
+            </a:pPr>
+            <a:r>
+              <a:t>💼 Project 5: Placement Funnel Performance</a:t>
+            </a:r>
+          </a:p>
+          <a:p>
+            <a:pPr>
+              <a:spcAft>
+                <a:spcPts val="400"/>
+              </a:spcAft>
+              <a:defRPr sz="1200">
+                <a:solidFill>
+                  <a:srgbClr val="1E293B"/>
+                </a:solidFill>
+                <a:latin typeface="Calibri"/>
+              </a:defRPr>
+            </a:pPr>
+            <a:r>
+              <a:t>• Primary Tables: job_applications, jobs, mock_interviews</a:t>
+            </a:r>
+          </a:p>
+          <a:p>
+            <a:pPr>
+              <a:spcAft>
+                <a:spcPts val="400"/>
+              </a:spcAft>
+              <a:defRPr sz="1200">
+                <a:solidFill>
+                  <a:srgbClr val="1E293B"/>
+                </a:solidFill>
+                <a:latin typeface="Calibri"/>
+              </a:defRPr>
+            </a:pPr>
+            <a:r>
+              <a:t>• Metric: Correlation between Mock Score (&gt;80) and Job Selection.</a:t>
+            </a:r>
+          </a:p>
+          <a:p>
+            <a:pPr>
+              <a:spcAft>
+                <a:spcPts val="400"/>
+              </a:spcAft>
+              <a:defRPr sz="1200">
+                <a:solidFill>
+                  <a:srgbClr val="1E293B"/>
+                </a:solidFill>
+                <a:latin typeface="Calibri"/>
+              </a:defRPr>
+            </a:pPr>
+            <a:r>
+              <a:t>• Recruitment Funnel Conversion %: APPLIED -&gt; SHORTLISTED -&gt; INTERVIEW -&gt; SELECTED.</a:t>
+            </a:r>
+          </a:p>
+          <a:p>
+            <a:pPr>
+              <a:spcAft>
+                <a:spcPts val="400"/>
+              </a:spcAft>
+              <a:defRPr sz="1200">
+                <a:solidFill>
+                  <a:srgbClr val="1E293B"/>
+                </a:solidFill>
+                <a:latin typeface="Calibri"/>
+              </a:defRPr>
+            </a:pPr>
+            <a:r>
+              <a:t>• Goal: Maximizing corporate hiring rates for students.</a:t>
+            </a:r>
+          </a:p>
+        </p:txBody>
+      </p:sp>
+    </p:spTree>
+  </p:cSld>
+  <p:clrMapOvr>
+    <a:masterClrMapping/>
+  </p:clrMapOvr>
+</p:sld>
+</file>
+
+<file path=ppt/slides/slide13.xml><?xml version="1.0" encoding="utf-8"?>
+<p:sld xmlns:a="http://schemas.openxmlformats.org/drawingml/2006/main" xmlns:p="http://schemas.openxmlformats.org/presentationml/2006/main" xmlns:r="http://schemas.openxmlformats.org/officeDocument/2006/relationships">
+  <p:cSld>
+    <p:spTree>
+      <p:nvGrpSpPr>
+        <p:cNvPr id="1" name=""/>
+        <p:cNvGrpSpPr/>
+        <p:nvPr/>
+      </p:nvGrpSpPr>
+      <p:grpSpPr/>
+      <p:sp>
+        <p:nvSpPr>
+          <p:cNvPr id="2" name="Rectangle 1"/>
+          <p:cNvSpPr/>
+          <p:nvPr/>
+        </p:nvSpPr>
+        <p:spPr>
+          <a:xfrm>
+            <a:off x="0" y="0"/>
+            <a:ext cx="12191695" cy="1097280"/>
+          </a:xfrm>
+          <a:prstGeom prst="rect">
+            <a:avLst/>
+          </a:prstGeom>
+          <a:solidFill>
+            <a:srgbClr val="0F172A"/>
+          </a:solidFill>
+          <a:ln>
+            <a:solidFill>
+              <a:srgbClr val="0F172A"/>
+            </a:solidFill>
+          </a:ln>
+        </p:spPr>
+        <p:style>
+          <a:lnRef idx="1">
+            <a:schemeClr val="accent1"/>
+          </a:lnRef>
+          <a:fillRef idx="3">
+            <a:schemeClr val="accent1"/>
+          </a:fillRef>
+          <a:effectRef idx="2">
+            <a:schemeClr val="accent1"/>
+          </a:effectRef>
+          <a:fontRef idx="minor">
+            <a:schemeClr val="lt1"/>
+          </a:fontRef>
+        </p:style>
+        <p:txBody>
+          <a:bodyPr rtlCol="0" anchor="ctr"/>
+          <a:lstStyle/>
+          <a:p>
+            <a:pPr algn="ctr"/>
+          </a:p>
+        </p:txBody>
+      </p:sp>
+      <p:sp>
+        <p:nvSpPr>
+          <p:cNvPr id="3" name="TextBox 2"/>
+          <p:cNvSpPr txBox="1"/>
+          <p:nvPr/>
+        </p:nvSpPr>
+        <p:spPr>
+          <a:xfrm>
+            <a:off x="731520" y="137160"/>
+            <a:ext cx="10728655" cy="502920"/>
+          </a:xfrm>
+          <a:prstGeom prst="rect">
+            <a:avLst/>
+          </a:prstGeom>
+          <a:noFill/>
+        </p:spPr>
+        <p:txBody>
+          <a:bodyPr wrap="square">
+            <a:spAutoFit/>
+          </a:bodyPr>
+          <a:lstStyle/>
+          <a:p>
+            <a:pPr>
+              <a:defRPr sz="2600" b="1">
+                <a:solidFill>
+                  <a:srgbClr val="FFFFFF"/>
+                </a:solidFill>
+                <a:latin typeface="Calibri"/>
+              </a:defRPr>
+            </a:pPr>
+            <a:r>
+              <a:t>12. Summary &amp; Key Takeaways for Students</a:t>
+            </a:r>
+          </a:p>
+          <a:p>
+            <a:pPr>
+              <a:defRPr sz="1300">
+                <a:solidFill>
+                  <a:srgbClr val="F59E0B"/>
+                </a:solidFill>
+                <a:latin typeface="Calibri"/>
+              </a:defRPr>
+            </a:pPr>
+            <a:r>
+              <a:t>Connecting Database Architecture with Real-World BI &amp; Analytics</a:t>
+            </a:r>
+          </a:p>
+        </p:txBody>
+      </p:sp>
+      <p:sp>
+        <p:nvSpPr>
+          <p:cNvPr id="4" name="Rounded Rectangle 3"/>
+          <p:cNvSpPr/>
+          <p:nvPr/>
+        </p:nvSpPr>
+        <p:spPr>
+          <a:xfrm>
+            <a:off x="731520" y="1463040"/>
+            <a:ext cx="10728655" cy="4754880"/>
+          </a:xfrm>
+          <a:prstGeom prst="roundRect">
+            <a:avLst/>
+          </a:prstGeom>
+          <a:solidFill>
+            <a:srgbClr val="FFFFFF"/>
+          </a:solidFill>
+          <a:ln w="19050">
+            <a:solidFill>
+              <a:srgbClr val="E2E8F0"/>
+            </a:solidFill>
+          </a:ln>
+        </p:spPr>
+        <p:style>
+          <a:lnRef idx="1">
+            <a:schemeClr val="accent1"/>
+          </a:lnRef>
+          <a:fillRef idx="3">
+            <a:schemeClr val="accent1"/>
+          </a:fillRef>
+          <a:effectRef idx="2">
+            <a:schemeClr val="accent1"/>
+          </a:effectRef>
+          <a:fontRef idx="minor">
+            <a:schemeClr val="lt1"/>
+          </a:fontRef>
+        </p:style>
+        <p:txBody>
+          <a:bodyPr rtlCol="0" anchor="ctr"/>
+          <a:lstStyle/>
+          <a:p>
+            <a:pPr algn="ctr"/>
+          </a:p>
+        </p:txBody>
+      </p:sp>
+      <p:sp>
+        <p:nvSpPr>
+          <p:cNvPr id="5" name="TextBox 4"/>
+          <p:cNvSpPr txBox="1"/>
+          <p:nvPr/>
+        </p:nvSpPr>
+        <p:spPr>
+          <a:xfrm>
+            <a:off x="914400" y="1600200"/>
+            <a:ext cx="10362895" cy="4480560"/>
+          </a:xfrm>
+          <a:prstGeom prst="rect">
+            <a:avLst/>
+          </a:prstGeom>
+          <a:noFill/>
+        </p:spPr>
+        <p:txBody>
+          <a:bodyPr wrap="square">
+            <a:spAutoFit/>
+          </a:bodyPr>
+          <a:lstStyle/>
+          <a:p>
+            <a:pPr>
+              <a:spcAft>
+                <a:spcPts val="800"/>
+              </a:spcAft>
+              <a:defRPr sz="1700" b="1">
+                <a:solidFill>
+                  <a:srgbClr val="0066FF"/>
+                </a:solidFill>
+                <a:latin typeface="Calibri"/>
+              </a:defRPr>
+            </a:pPr>
+            <a:r>
               <a:t>🎓 Essential Lessons for Data Analytics Students</a:t>
             </a:r>
           </a:p>
           <a:p>
             <a:pPr>
               <a:spcAft>
-                <a:spcPts val="600"/>
-              </a:spcAft>
-              <a:defRPr sz="1300">
+                <a:spcPts val="400"/>
+              </a:spcAft>
+              <a:defRPr sz="1200">
                 <a:solidFill>
                   <a:srgbClr val="1E293B"/>
                 </a:solidFill>
@@ -3877,57 +4711,57 @@
           <a:p>
             <a:pPr>
               <a:spcAft>
-                <a:spcPts val="600"/>
-              </a:spcAft>
-              <a:defRPr sz="1300">
-                <a:solidFill>
-                  <a:srgbClr val="1E293B"/>
-                </a:solidFill>
-                <a:latin typeface="Calibri"/>
-              </a:defRPr>
-            </a:pPr>
-            <a:r>
-              <a:t>• 2. Domain-Driven Analytics: Organizing database tables into functional domains simplifies dashboard design.</a:t>
-            </a:r>
-          </a:p>
-          <a:p>
-            <a:pPr>
-              <a:spcAft>
-                <a:spcPts val="600"/>
-              </a:spcAft>
-              <a:defRPr sz="1300">
-                <a:solidFill>
-                  <a:srgbClr val="1E293B"/>
-                </a:solidFill>
-                <a:latin typeface="Calibri"/>
-              </a:defRPr>
-            </a:pPr>
-            <a:r>
-              <a:t>• 3. Actionable Insights: Raw transactional tables (logs, marks, fees) drive strategic business decisions.</a:t>
-            </a:r>
-          </a:p>
-          <a:p>
-            <a:pPr>
-              <a:spcAft>
-                <a:spcPts val="600"/>
-              </a:spcAft>
-              <a:defRPr sz="1300">
-                <a:solidFill>
-                  <a:srgbClr val="1E293B"/>
-                </a:solidFill>
-                <a:latin typeface="Calibri"/>
-              </a:defRPr>
-            </a:pPr>
-            <a:r>
-              <a:t>• 4. Industry Relevance: Understanding LMS schema prepares students for EdTech, SaaS, and Corporate Analytics roles.</a:t>
-            </a:r>
-          </a:p>
-          <a:p>
-            <a:pPr>
-              <a:spcAft>
-                <a:spcPts val="600"/>
-              </a:spcAft>
-              <a:defRPr sz="1300">
+                <a:spcPts val="400"/>
+              </a:spcAft>
+              <a:defRPr sz="1200">
+                <a:solidFill>
+                  <a:srgbClr val="1E293B"/>
+                </a:solidFill>
+                <a:latin typeface="Calibri"/>
+              </a:defRPr>
+            </a:pPr>
+            <a:r>
+              <a:t>• 2. Central Hub Pattern: 'users', 'batches', and 'courses' form the core backbone of all sub-modules.</a:t>
+            </a:r>
+          </a:p>
+          <a:p>
+            <a:pPr>
+              <a:spcAft>
+                <a:spcPts val="400"/>
+              </a:spcAft>
+              <a:defRPr sz="1200">
+                <a:solidFill>
+                  <a:srgbClr val="1E293B"/>
+                </a:solidFill>
+                <a:latin typeface="Calibri"/>
+              </a:defRPr>
+            </a:pPr>
+            <a:r>
+              <a:t>• 3. Domain-Driven Analytics: Organizing database tables into functional domains simplifies dashboard design.</a:t>
+            </a:r>
+          </a:p>
+          <a:p>
+            <a:pPr>
+              <a:spcAft>
+                <a:spcPts val="400"/>
+              </a:spcAft>
+              <a:defRPr sz="1200">
+                <a:solidFill>
+                  <a:srgbClr val="1E293B"/>
+                </a:solidFill>
+                <a:latin typeface="Calibri"/>
+              </a:defRPr>
+            </a:pPr>
+            <a:r>
+              <a:t>• 4. Actionable Insights: Raw transactional tables (logs, marks, fees) drive strategic business decisions.</a:t>
+            </a:r>
+          </a:p>
+          <a:p>
+            <a:pPr>
+              <a:spcAft>
+                <a:spcPts val="400"/>
+              </a:spcAft>
+              <a:defRPr sz="1200">
                 <a:solidFill>
                   <a:srgbClr val="1E293B"/>
                 </a:solidFill>
@@ -4121,9 +4955,9 @@
           <a:p>
             <a:pPr>
               <a:spcAft>
-                <a:spcPts val="1000"/>
-              </a:spcAft>
-              <a:defRPr sz="1800" b="1">
+                <a:spcPts val="800"/>
+              </a:spcAft>
+              <a:defRPr sz="1700" b="1">
                 <a:solidFill>
                   <a:srgbClr val="0066FF"/>
                 </a:solidFill>
@@ -4137,9 +4971,9 @@
           <a:p>
             <a:pPr>
               <a:spcAft>
-                <a:spcPts val="600"/>
-              </a:spcAft>
-              <a:defRPr sz="1300">
+                <a:spcPts val="400"/>
+              </a:spcAft>
+              <a:defRPr sz="1200">
                 <a:solidFill>
                   <a:srgbClr val="1E293B"/>
                 </a:solidFill>
@@ -4153,9 +4987,9 @@
           <a:p>
             <a:pPr>
               <a:spcAft>
-                <a:spcPts val="600"/>
-              </a:spcAft>
-              <a:defRPr sz="1300">
+                <a:spcPts val="400"/>
+              </a:spcAft>
+              <a:defRPr sz="1200">
                 <a:solidFill>
                   <a:srgbClr val="1E293B"/>
                 </a:solidFill>
@@ -4169,9 +5003,9 @@
           <a:p>
             <a:pPr>
               <a:spcAft>
-                <a:spcPts val="600"/>
-              </a:spcAft>
-              <a:defRPr sz="1300">
+                <a:spcPts val="400"/>
+              </a:spcAft>
+              <a:defRPr sz="1200">
                 <a:solidFill>
                   <a:srgbClr val="1E293B"/>
                 </a:solidFill>
@@ -4185,9 +5019,9 @@
           <a:p>
             <a:pPr>
               <a:spcAft>
-                <a:spcPts val="600"/>
-              </a:spcAft>
-              <a:defRPr sz="1300">
+                <a:spcPts val="400"/>
+              </a:spcAft>
+              <a:defRPr sz="1200">
                 <a:solidFill>
                   <a:srgbClr val="1E293B"/>
                 </a:solidFill>
@@ -4269,9 +5103,9 @@
           <a:p>
             <a:pPr>
               <a:spcAft>
-                <a:spcPts val="1000"/>
-              </a:spcAft>
-              <a:defRPr sz="1800" b="1">
+                <a:spcPts val="800"/>
+              </a:spcAft>
+              <a:defRPr sz="1700" b="1">
                 <a:solidFill>
                   <a:srgbClr val="F59E0B"/>
                 </a:solidFill>
@@ -4285,9 +5119,9 @@
           <a:p>
             <a:pPr>
               <a:spcAft>
-                <a:spcPts val="600"/>
-              </a:spcAft>
-              <a:defRPr sz="1300">
+                <a:spcPts val="400"/>
+              </a:spcAft>
+              <a:defRPr sz="1200">
                 <a:solidFill>
                   <a:srgbClr val="1E293B"/>
                 </a:solidFill>
@@ -4301,9 +5135,9 @@
           <a:p>
             <a:pPr>
               <a:spcAft>
-                <a:spcPts val="600"/>
-              </a:spcAft>
-              <a:defRPr sz="1300">
+                <a:spcPts val="400"/>
+              </a:spcAft>
+              <a:defRPr sz="1200">
                 <a:solidFill>
                   <a:srgbClr val="1E293B"/>
                 </a:solidFill>
@@ -4317,9 +5151,9 @@
           <a:p>
             <a:pPr>
               <a:spcAft>
-                <a:spcPts val="600"/>
-              </a:spcAft>
-              <a:defRPr sz="1300">
+                <a:spcPts val="400"/>
+              </a:spcAft>
+              <a:defRPr sz="1200">
                 <a:solidFill>
                   <a:srgbClr val="1E293B"/>
                 </a:solidFill>
@@ -4333,9 +5167,9 @@
           <a:p>
             <a:pPr>
               <a:spcAft>
-                <a:spcPts val="600"/>
-              </a:spcAft>
-              <a:defRPr sz="1300">
+                <a:spcPts val="400"/>
+              </a:spcAft>
+              <a:defRPr sz="1200">
                 <a:solidFill>
                   <a:srgbClr val="1E293B"/>
                 </a:solidFill>
@@ -4349,9 +5183,9 @@
           <a:p>
             <a:pPr>
               <a:spcAft>
-                <a:spcPts val="600"/>
-              </a:spcAft>
-              <a:defRPr sz="1300">
+                <a:spcPts val="400"/>
+              </a:spcAft>
+              <a:defRPr sz="1200">
                 <a:solidFill>
                   <a:srgbClr val="1E293B"/>
                 </a:solidFill>
@@ -4545,9 +5379,9 @@
           <a:p>
             <a:pPr>
               <a:spcAft>
-                <a:spcPts val="1000"/>
-              </a:spcAft>
-              <a:defRPr sz="1800" b="1">
+                <a:spcPts val="800"/>
+              </a:spcAft>
+              <a:defRPr sz="1700" b="1">
                 <a:solidFill>
                   <a:srgbClr val="0066FF"/>
                 </a:solidFill>
@@ -4561,49 +5395,49 @@
           <a:p>
             <a:pPr>
               <a:spcAft>
-                <a:spcPts val="600"/>
-              </a:spcAft>
-              <a:defRPr sz="1300">
-                <a:solidFill>
-                  <a:srgbClr val="1E293B"/>
-                </a:solidFill>
-                <a:latin typeface="Calibri"/>
-              </a:defRPr>
-            </a:pPr>
-            <a:r>
-              <a:t>• Lead capture from Ads/Referrals</a:t>
-            </a:r>
-          </a:p>
-          <a:p>
-            <a:pPr>
-              <a:spcAft>
-                <a:spcPts val="600"/>
-              </a:spcAft>
-              <a:defRPr sz="1300">
-                <a:solidFill>
-                  <a:srgbClr val="1E293B"/>
-                </a:solidFill>
-                <a:latin typeface="Calibri"/>
-              </a:defRPr>
-            </a:pPr>
-            <a:r>
-              <a:t>• Touchpoint logs (Calls/Emails)</a:t>
-            </a:r>
-          </a:p>
-          <a:p>
-            <a:pPr>
-              <a:spcAft>
-                <a:spcPts val="600"/>
-              </a:spcAft>
-              <a:defRPr sz="1300">
-                <a:solidFill>
-                  <a:srgbClr val="1E293B"/>
-                </a:solidFill>
-                <a:latin typeface="Calibri"/>
-              </a:defRPr>
-            </a:pPr>
-            <a:r>
-              <a:t>• Lead conversion to Student</a:t>
+                <a:spcPts val="400"/>
+              </a:spcAft>
+              <a:defRPr sz="1200">
+                <a:solidFill>
+                  <a:srgbClr val="1E293B"/>
+                </a:solidFill>
+                <a:latin typeface="Calibri"/>
+              </a:defRPr>
+            </a:pPr>
+            <a:r>
+              <a:t>• Lead capture from Ads</a:t>
+            </a:r>
+          </a:p>
+          <a:p>
+            <a:pPr>
+              <a:spcAft>
+                <a:spcPts val="400"/>
+              </a:spcAft>
+              <a:defRPr sz="1200">
+                <a:solidFill>
+                  <a:srgbClr val="1E293B"/>
+                </a:solidFill>
+                <a:latin typeface="Calibri"/>
+              </a:defRPr>
+            </a:pPr>
+            <a:r>
+              <a:t>• Call/Email logs</a:t>
+            </a:r>
+          </a:p>
+          <a:p>
+            <a:pPr>
+              <a:spcAft>
+                <a:spcPts val="400"/>
+              </a:spcAft>
+              <a:defRPr sz="1200">
+                <a:solidFill>
+                  <a:srgbClr val="1E293B"/>
+                </a:solidFill>
+                <a:latin typeface="Calibri"/>
+              </a:defRPr>
+            </a:pPr>
+            <a:r>
+              <a:t>• Lead to Student</a:t>
             </a:r>
           </a:p>
         </p:txBody>
@@ -4677,9 +5511,9 @@
           <a:p>
             <a:pPr>
               <a:spcAft>
-                <a:spcPts val="1000"/>
-              </a:spcAft>
-              <a:defRPr sz="1800" b="1">
+                <a:spcPts val="800"/>
+              </a:spcAft>
+              <a:defRPr sz="1700" b="1">
                 <a:solidFill>
                   <a:srgbClr val="F59E0B"/>
                 </a:solidFill>
@@ -4693,25 +5527,25 @@
           <a:p>
             <a:pPr>
               <a:spcAft>
-                <a:spcPts val="600"/>
-              </a:spcAft>
-              <a:defRPr sz="1300">
-                <a:solidFill>
-                  <a:srgbClr val="1E293B"/>
-                </a:solidFill>
-                <a:latin typeface="Calibri"/>
-              </a:defRPr>
-            </a:pPr>
-            <a:r>
-              <a:t>• Course &amp; batch selection</a:t>
-            </a:r>
-          </a:p>
-          <a:p>
-            <a:pPr>
-              <a:spcAft>
-                <a:spcPts val="600"/>
-              </a:spcAft>
-              <a:defRPr sz="1300">
+                <a:spcPts val="400"/>
+              </a:spcAft>
+              <a:defRPr sz="1200">
+                <a:solidFill>
+                  <a:srgbClr val="1E293B"/>
+                </a:solidFill>
+                <a:latin typeface="Calibri"/>
+              </a:defRPr>
+            </a:pPr>
+            <a:r>
+              <a:t>• Course/Batch selection</a:t>
+            </a:r>
+          </a:p>
+          <a:p>
+            <a:pPr>
+              <a:spcAft>
+                <a:spcPts val="400"/>
+              </a:spcAft>
+              <a:defRPr sz="1200">
                 <a:solidFill>
                   <a:srgbClr val="1E293B"/>
                 </a:solidFill>
@@ -4725,17 +5559,17 @@
           <a:p>
             <a:pPr>
               <a:spcAft>
-                <a:spcPts val="600"/>
-              </a:spcAft>
-              <a:defRPr sz="1300">
-                <a:solidFill>
-                  <a:srgbClr val="1E293B"/>
-                </a:solidFill>
-                <a:latin typeface="Calibri"/>
-              </a:defRPr>
-            </a:pPr>
-            <a:r>
-              <a:t>• Receipt &amp; document verification</a:t>
+                <a:spcPts val="400"/>
+              </a:spcAft>
+              <a:defRPr sz="1200">
+                <a:solidFill>
+                  <a:srgbClr val="1E293B"/>
+                </a:solidFill>
+                <a:latin typeface="Calibri"/>
+              </a:defRPr>
+            </a:pPr>
+            <a:r>
+              <a:t>• Receipt &amp; verification</a:t>
             </a:r>
           </a:p>
         </p:txBody>
@@ -4809,9 +5643,9 @@
           <a:p>
             <a:pPr>
               <a:spcAft>
-                <a:spcPts val="1000"/>
-              </a:spcAft>
-              <a:defRPr sz="1800" b="1">
+                <a:spcPts val="800"/>
+              </a:spcAft>
+              <a:defRPr sz="1700" b="1">
                 <a:solidFill>
                   <a:srgbClr val="10B981"/>
                 </a:solidFill>
@@ -4825,49 +5659,49 @@
           <a:p>
             <a:pPr>
               <a:spcAft>
-                <a:spcPts val="600"/>
-              </a:spcAft>
-              <a:defRPr sz="1300">
-                <a:solidFill>
-                  <a:srgbClr val="1E293B"/>
-                </a:solidFill>
-                <a:latin typeface="Calibri"/>
-              </a:defRPr>
-            </a:pPr>
-            <a:r>
-              <a:t>• Daily QR/Geo attendance</a:t>
-            </a:r>
-          </a:p>
-          <a:p>
-            <a:pPr>
-              <a:spcAft>
-                <a:spcPts val="600"/>
-              </a:spcAft>
-              <a:defRPr sz="1300">
-                <a:solidFill>
-                  <a:srgbClr val="1E293B"/>
-                </a:solidFill>
-                <a:latin typeface="Calibri"/>
-              </a:defRPr>
-            </a:pPr>
-            <a:r>
-              <a:t>• Time tracking portal logs</a:t>
-            </a:r>
-          </a:p>
-          <a:p>
-            <a:pPr>
-              <a:spcAft>
-                <a:spcPts val="600"/>
-              </a:spcAft>
-              <a:defRPr sz="1300">
-                <a:solidFill>
-                  <a:srgbClr val="1E293B"/>
-                </a:solidFill>
-                <a:latin typeface="Calibri"/>
-              </a:defRPr>
-            </a:pPr>
-            <a:r>
-              <a:t>• Leave request &amp; quota audit</a:t>
+                <a:spcPts val="400"/>
+              </a:spcAft>
+              <a:defRPr sz="1200">
+                <a:solidFill>
+                  <a:srgbClr val="1E293B"/>
+                </a:solidFill>
+                <a:latin typeface="Calibri"/>
+              </a:defRPr>
+            </a:pPr>
+            <a:r>
+              <a:t>• Daily QR attendance</a:t>
+            </a:r>
+          </a:p>
+          <a:p>
+            <a:pPr>
+              <a:spcAft>
+                <a:spcPts val="400"/>
+              </a:spcAft>
+              <a:defRPr sz="1200">
+                <a:solidFill>
+                  <a:srgbClr val="1E293B"/>
+                </a:solidFill>
+                <a:latin typeface="Calibri"/>
+              </a:defRPr>
+            </a:pPr>
+            <a:r>
+              <a:t>• Portal time logs</a:t>
+            </a:r>
+          </a:p>
+          <a:p>
+            <a:pPr>
+              <a:spcAft>
+                <a:spcPts val="400"/>
+              </a:spcAft>
+              <a:defRPr sz="1200">
+                <a:solidFill>
+                  <a:srgbClr val="1E293B"/>
+                </a:solidFill>
+                <a:latin typeface="Calibri"/>
+              </a:defRPr>
+            </a:pPr>
+            <a:r>
+              <a:t>• Leave quota audit</a:t>
             </a:r>
           </a:p>
         </p:txBody>
@@ -4941,9 +5775,9 @@
           <a:p>
             <a:pPr>
               <a:spcAft>
-                <a:spcPts val="1000"/>
-              </a:spcAft>
-              <a:defRPr sz="1800" b="1">
+                <a:spcPts val="800"/>
+              </a:spcAft>
+              <a:defRPr sz="1700" b="1">
                 <a:solidFill>
                   <a:srgbClr val="0066FF"/>
                 </a:solidFill>
@@ -4957,25 +5791,25 @@
           <a:p>
             <a:pPr>
               <a:spcAft>
-                <a:spcPts val="600"/>
-              </a:spcAft>
-              <a:defRPr sz="1300">
-                <a:solidFill>
-                  <a:srgbClr val="1E293B"/>
-                </a:solidFill>
-                <a:latin typeface="Calibri"/>
-              </a:defRPr>
-            </a:pPr>
-            <a:r>
-              <a:t>• Project &amp; task ticketing</a:t>
-            </a:r>
-          </a:p>
-          <a:p>
-            <a:pPr>
-              <a:spcAft>
-                <a:spcPts val="600"/>
-              </a:spcAft>
-              <a:defRPr sz="1300">
+                <a:spcPts val="400"/>
+              </a:spcAft>
+              <a:defRPr sz="1200">
+                <a:solidFill>
+                  <a:srgbClr val="1E293B"/>
+                </a:solidFill>
+                <a:latin typeface="Calibri"/>
+              </a:defRPr>
+            </a:pPr>
+            <a:r>
+              <a:t>• Project/Task ticketing</a:t>
+            </a:r>
+          </a:p>
+          <a:p>
+            <a:pPr>
+              <a:spcAft>
+                <a:spcPts val="400"/>
+              </a:spcAft>
+              <a:defRPr sz="1200">
                 <a:solidFill>
                   <a:srgbClr val="1E293B"/>
                 </a:solidFill>
@@ -4989,17 +5823,17 @@
           <a:p>
             <a:pPr>
               <a:spcAft>
-                <a:spcPts val="600"/>
-              </a:spcAft>
-              <a:defRPr sz="1300">
-                <a:solidFill>
-                  <a:srgbClr val="1E293B"/>
-                </a:solidFill>
-                <a:latin typeface="Calibri"/>
-              </a:defRPr>
-            </a:pPr>
-            <a:r>
-              <a:t>• Assessments &amp; weekly feedback</a:t>
+                <a:spcPts val="400"/>
+              </a:spcAft>
+              <a:defRPr sz="1200">
+                <a:solidFill>
+                  <a:srgbClr val="1E293B"/>
+                </a:solidFill>
+                <a:latin typeface="Calibri"/>
+              </a:defRPr>
+            </a:pPr>
+            <a:r>
+              <a:t>• Tests &amp; feedback</a:t>
             </a:r>
           </a:p>
         </p:txBody>
@@ -5073,9 +5907,9 @@
           <a:p>
             <a:pPr>
               <a:spcAft>
-                <a:spcPts val="1000"/>
-              </a:spcAft>
-              <a:defRPr sz="1800" b="1">
+                <a:spcPts val="800"/>
+              </a:spcAft>
+              <a:defRPr sz="1700" b="1">
                 <a:solidFill>
                   <a:srgbClr val="F59E0B"/>
                 </a:solidFill>
@@ -5089,9 +5923,9 @@
           <a:p>
             <a:pPr>
               <a:spcAft>
-                <a:spcPts val="600"/>
-              </a:spcAft>
-              <a:defRPr sz="1300">
+                <a:spcPts val="400"/>
+              </a:spcAft>
+              <a:defRPr sz="1200">
                 <a:solidFill>
                   <a:srgbClr val="1E293B"/>
                 </a:solidFill>
@@ -5105,25 +5939,25 @@
           <a:p>
             <a:pPr>
               <a:spcAft>
-                <a:spcPts val="600"/>
-              </a:spcAft>
-              <a:defRPr sz="1300">
-                <a:solidFill>
-                  <a:srgbClr val="1E293B"/>
-                </a:solidFill>
-                <a:latin typeface="Calibri"/>
-              </a:defRPr>
-            </a:pPr>
-            <a:r>
-              <a:t>• Verbal communication drills</a:t>
-            </a:r>
-          </a:p>
-          <a:p>
-            <a:pPr>
-              <a:spcAft>
-                <a:spcPts val="600"/>
-              </a:spcAft>
-              <a:defRPr sz="1300">
+                <a:spcPts val="400"/>
+              </a:spcAft>
+              <a:defRPr sz="1200">
+                <a:solidFill>
+                  <a:srgbClr val="1E293B"/>
+                </a:solidFill>
+                <a:latin typeface="Calibri"/>
+              </a:defRPr>
+            </a:pPr>
+            <a:r>
+              <a:t>• Verbal drills</a:t>
+            </a:r>
+          </a:p>
+          <a:p>
+            <a:pPr>
+              <a:spcAft>
+                <a:spcPts val="400"/>
+              </a:spcAft>
+              <a:defRPr sz="1200">
                 <a:solidFill>
                   <a:srgbClr val="1E293B"/>
                 </a:solidFill>
@@ -5718,7 +6552,7 @@
               </a:defRPr>
             </a:pPr>
             <a:r>
-              <a:t>4. Relational Database Schema (Part 1: Core, Marketing, Finance)</a:t>
+              <a:t>4. Central Table Connection Architecture</a:t>
             </a:r>
           </a:p>
           <a:p>
@@ -5731,7 +6565,7 @@
               </a:defRPr>
             </a:pPr>
             <a:r>
-              <a:t>22 Tables Grouped into Functional Modules</a:t>
+              <a:t>The 3 Primary Hub Entities Connecting All 22 System Tables</a:t>
             </a:r>
           </a:p>
         </p:txBody>
@@ -5745,7 +6579,7 @@
         <p:spPr>
           <a:xfrm>
             <a:off x="731520" y="1463040"/>
-            <a:ext cx="5120640" cy="2286000"/>
+            <a:ext cx="3291840" cy="4754880"/>
           </a:xfrm>
           <a:prstGeom prst="roundRect">
             <a:avLst/>
@@ -5790,7 +6624,7 @@
         <p:spPr>
           <a:xfrm>
             <a:off x="914400" y="1600200"/>
-            <a:ext cx="4754879" cy="2011680"/>
+            <a:ext cx="2926080" cy="4480560"/>
           </a:xfrm>
           <a:prstGeom prst="rect">
             <a:avLst/>
@@ -5805,9 +6639,9 @@
           <a:p>
             <a:pPr>
               <a:spcAft>
-                <a:spcPts val="1000"/>
-              </a:spcAft>
-              <a:defRPr sz="1800" b="1">
+                <a:spcPts val="800"/>
+              </a:spcAft>
+              <a:defRPr sz="1700" b="1">
                 <a:solidFill>
                   <a:srgbClr val="0066FF"/>
                 </a:solidFill>
@@ -5815,39 +6649,251 @@
               </a:defRPr>
             </a:pPr>
             <a:r>
-              <a:t>Module A: Users &amp; RBAC</a:t>
-            </a:r>
-          </a:p>
-          <a:p>
-            <a:pPr>
-              <a:spcAft>
-                <a:spcPts val="600"/>
-              </a:spcAft>
-              <a:defRPr sz="1300">
-                <a:solidFill>
-                  <a:srgbClr val="1E293B"/>
-                </a:solidFill>
-                <a:latin typeface="Calibri"/>
-              </a:defRPr>
-            </a:pPr>
-            <a:r>
-              <a:t>• users: Account master (email, role, phone, studentId)</a:t>
-            </a:r>
-          </a:p>
-          <a:p>
-            <a:pPr>
-              <a:spcAft>
-                <a:spcPts val="600"/>
-              </a:spcAft>
-              <a:defRPr sz="1300">
-                <a:solidFill>
-                  <a:srgbClr val="1E293B"/>
-                </a:solidFill>
-                <a:latin typeface="Calibri"/>
-              </a:defRPr>
-            </a:pPr>
-            <a:r>
-              <a:t>• admin_permissions: Granular administrative flags</a:t>
+              <a:t>👤 HUB 1: 'users' Table</a:t>
+            </a:r>
+            <a:br/>
+            <a:r>
+              <a:t>(Central Entity)</a:t>
+            </a:r>
+          </a:p>
+          <a:p>
+            <a:pPr>
+              <a:spcAft>
+                <a:spcPts val="400"/>
+              </a:spcAft>
+              <a:defRPr sz="1200">
+                <a:solidFill>
+                  <a:srgbClr val="1E293B"/>
+                </a:solidFill>
+                <a:latin typeface="Calibri"/>
+              </a:defRPr>
+            </a:pPr>
+            <a:r>
+              <a:t>• admin_permissions (1:1)</a:t>
+            </a:r>
+          </a:p>
+          <a:p>
+            <a:pPr>
+              <a:spcAft>
+                <a:spcPts val="400"/>
+              </a:spcAft>
+              <a:defRPr sz="1200">
+                <a:solidFill>
+                  <a:srgbClr val="1E293B"/>
+                </a:solidFill>
+                <a:latin typeface="Calibri"/>
+              </a:defRPr>
+            </a:pPr>
+            <a:r>
+              <a:t>• batch_students (1:N)</a:t>
+            </a:r>
+          </a:p>
+          <a:p>
+            <a:pPr>
+              <a:spcAft>
+                <a:spcPts val="400"/>
+              </a:spcAft>
+              <a:defRPr sz="1200">
+                <a:solidFill>
+                  <a:srgbClr val="1E293B"/>
+                </a:solidFill>
+                <a:latin typeface="Calibri"/>
+              </a:defRPr>
+            </a:pPr>
+            <a:r>
+              <a:t>• registrations (1:N)</a:t>
+            </a:r>
+          </a:p>
+          <a:p>
+            <a:pPr>
+              <a:spcAft>
+                <a:spcPts val="400"/>
+              </a:spcAft>
+              <a:defRPr sz="1200">
+                <a:solidFill>
+                  <a:srgbClr val="1E293B"/>
+                </a:solidFill>
+                <a:latin typeface="Calibri"/>
+              </a:defRPr>
+            </a:pPr>
+            <a:r>
+              <a:t>• documents (1:N)</a:t>
+            </a:r>
+          </a:p>
+          <a:p>
+            <a:pPr>
+              <a:spcAft>
+                <a:spcPts val="400"/>
+              </a:spcAft>
+              <a:defRPr sz="1200">
+                <a:solidFill>
+                  <a:srgbClr val="1E293B"/>
+                </a:solidFill>
+                <a:latin typeface="Calibri"/>
+              </a:defRPr>
+            </a:pPr>
+            <a:r>
+              <a:t>• attendance (1:N)</a:t>
+            </a:r>
+          </a:p>
+          <a:p>
+            <a:pPr>
+              <a:spcAft>
+                <a:spcPts val="400"/>
+              </a:spcAft>
+              <a:defRPr sz="1200">
+                <a:solidFill>
+                  <a:srgbClr val="1E293B"/>
+                </a:solidFill>
+                <a:latin typeface="Calibri"/>
+              </a:defRPr>
+            </a:pPr>
+            <a:r>
+              <a:t>• leave_requests (1:N)</a:t>
+            </a:r>
+          </a:p>
+          <a:p>
+            <a:pPr>
+              <a:spcAft>
+                <a:spcPts val="400"/>
+              </a:spcAft>
+              <a:defRPr sz="1200">
+                <a:solidFill>
+                  <a:srgbClr val="1E293B"/>
+                </a:solidFill>
+                <a:latin typeface="Calibri"/>
+              </a:defRPr>
+            </a:pPr>
+            <a:r>
+              <a:t>• time_tracking (1:N)</a:t>
+            </a:r>
+          </a:p>
+          <a:p>
+            <a:pPr>
+              <a:spcAft>
+                <a:spcPts val="400"/>
+              </a:spcAft>
+              <a:defRPr sz="1200">
+                <a:solidFill>
+                  <a:srgbClr val="1E293B"/>
+                </a:solidFill>
+                <a:latin typeface="Calibri"/>
+              </a:defRPr>
+            </a:pPr>
+            <a:r>
+              <a:t>• tasks (1:N)</a:t>
+            </a:r>
+          </a:p>
+          <a:p>
+            <a:pPr>
+              <a:spcAft>
+                <a:spcPts val="400"/>
+              </a:spcAft>
+              <a:defRPr sz="1200">
+                <a:solidFill>
+                  <a:srgbClr val="1E293B"/>
+                </a:solidFill>
+                <a:latin typeface="Calibri"/>
+              </a:defRPr>
+            </a:pPr>
+            <a:r>
+              <a:t>• assessment_submissions (1:N)</a:t>
+            </a:r>
+          </a:p>
+          <a:p>
+            <a:pPr>
+              <a:spcAft>
+                <a:spcPts val="400"/>
+              </a:spcAft>
+              <a:defRPr sz="1200">
+                <a:solidFill>
+                  <a:srgbClr val="1E293B"/>
+                </a:solidFill>
+                <a:latin typeface="Calibri"/>
+              </a:defRPr>
+            </a:pPr>
+            <a:r>
+              <a:t>• feedback (1:N)</a:t>
+            </a:r>
+          </a:p>
+          <a:p>
+            <a:pPr>
+              <a:spcAft>
+                <a:spcPts val="400"/>
+              </a:spcAft>
+              <a:defRPr sz="1200">
+                <a:solidFill>
+                  <a:srgbClr val="1E293B"/>
+                </a:solidFill>
+                <a:latin typeface="Calibri"/>
+              </a:defRPr>
+            </a:pPr>
+            <a:r>
+              <a:t>• leads &amp; lead_activities (1:N)</a:t>
+            </a:r>
+          </a:p>
+          <a:p>
+            <a:pPr>
+              <a:spcAft>
+                <a:spcPts val="400"/>
+              </a:spcAft>
+              <a:defRPr sz="1200">
+                <a:solidFill>
+                  <a:srgbClr val="1E293B"/>
+                </a:solidFill>
+                <a:latin typeface="Calibri"/>
+              </a:defRPr>
+            </a:pPr>
+            <a:r>
+              <a:t>• job_applications (1:N)</a:t>
+            </a:r>
+          </a:p>
+          <a:p>
+            <a:pPr>
+              <a:spcAft>
+                <a:spcPts val="400"/>
+              </a:spcAft>
+              <a:defRPr sz="1200">
+                <a:solidFill>
+                  <a:srgbClr val="1E293B"/>
+                </a:solidFill>
+                <a:latin typeface="Calibri"/>
+              </a:defRPr>
+            </a:pPr>
+            <a:r>
+              <a:t>• mock_interviews (1:N)</a:t>
+            </a:r>
+          </a:p>
+          <a:p>
+            <a:pPr>
+              <a:spcAft>
+                <a:spcPts val="400"/>
+              </a:spcAft>
+              <a:defRPr sz="1200">
+                <a:solidFill>
+                  <a:srgbClr val="1E293B"/>
+                </a:solidFill>
+                <a:latin typeface="Calibri"/>
+              </a:defRPr>
+            </a:pPr>
+            <a:r>
+              <a:t>• communication_practice (1:N)</a:t>
+            </a:r>
+          </a:p>
+          <a:p>
+            <a:pPr>
+              <a:spcAft>
+                <a:spcPts val="400"/>
+              </a:spcAft>
+              <a:defRPr sz="1200">
+                <a:solidFill>
+                  <a:srgbClr val="1E293B"/>
+                </a:solidFill>
+                <a:latin typeface="Calibri"/>
+              </a:defRPr>
+            </a:pPr>
+            <a:r>
+              <a:t>• notifications &amp; messages (1:N)</a:t>
             </a:r>
           </a:p>
         </p:txBody>
@@ -5860,8 +6906,8 @@
         </p:nvSpPr>
         <p:spPr>
           <a:xfrm>
-            <a:off x="6217920" y="1463040"/>
-            <a:ext cx="5120640" cy="2286000"/>
+            <a:off x="4443984" y="1463040"/>
+            <a:ext cx="3291840" cy="4754880"/>
           </a:xfrm>
           <a:prstGeom prst="roundRect">
             <a:avLst/>
@@ -5905,8 +6951,8 @@
         </p:nvSpPr>
         <p:spPr>
           <a:xfrm>
-            <a:off x="6400800" y="1600200"/>
-            <a:ext cx="4754879" cy="2011680"/>
+            <a:off x="4626864" y="1600200"/>
+            <a:ext cx="2926080" cy="4480560"/>
           </a:xfrm>
           <a:prstGeom prst="rect">
             <a:avLst/>
@@ -5921,65 +6967,165 @@
           <a:p>
             <a:pPr>
               <a:spcAft>
-                <a:spcPts val="1000"/>
-              </a:spcAft>
-              <a:defRPr sz="1800" b="1">
-                <a:solidFill>
-                  <a:srgbClr val="F59E0B"/>
-                </a:solidFill>
-                <a:latin typeface="Calibri"/>
-              </a:defRPr>
-            </a:pPr>
-            <a:r>
-              <a:t>Module B: Courses &amp; Batches</a:t>
-            </a:r>
-          </a:p>
-          <a:p>
-            <a:pPr>
-              <a:spcAft>
-                <a:spcPts val="600"/>
-              </a:spcAft>
-              <a:defRPr sz="1300">
-                <a:solidFill>
-                  <a:srgbClr val="1E293B"/>
-                </a:solidFill>
-                <a:latin typeface="Calibri"/>
-              </a:defRPr>
-            </a:pPr>
-            <a:r>
-              <a:t>• courses: Master course catalog &amp; base tuition fees</a:t>
-            </a:r>
-          </a:p>
-          <a:p>
-            <a:pPr>
-              <a:spcAft>
-                <a:spcPts val="600"/>
-              </a:spcAft>
-              <a:defRPr sz="1300">
-                <a:solidFill>
-                  <a:srgbClr val="1E293B"/>
-                </a:solidFill>
-                <a:latin typeface="Calibri"/>
-              </a:defRPr>
-            </a:pPr>
-            <a:r>
-              <a:t>• batches: Academic cohorts, schedules &amp; trainer assignment</a:t>
-            </a:r>
-          </a:p>
-          <a:p>
-            <a:pPr>
-              <a:spcAft>
-                <a:spcPts val="600"/>
-              </a:spcAft>
-              <a:defRPr sz="1300">
-                <a:solidFill>
-                  <a:srgbClr val="1E293B"/>
-                </a:solidFill>
-                <a:latin typeface="Calibri"/>
-              </a:defRPr>
-            </a:pPr>
-            <a:r>
-              <a:t>• batch_students: Junction table mapping student enrollments</a:t>
+                <a:spcPts val="800"/>
+              </a:spcAft>
+              <a:defRPr sz="1700" b="1">
+                <a:solidFill>
+                  <a:srgbClr val="10B981"/>
+                </a:solidFill>
+                <a:latin typeface="Calibri"/>
+              </a:defRPr>
+            </a:pPr>
+            <a:r>
+              <a:t>👥 HUB 2: 'batches' Table</a:t>
+            </a:r>
+            <a:br/>
+            <a:r>
+              <a:t>(Academic Cohort Hub)</a:t>
+            </a:r>
+          </a:p>
+          <a:p>
+            <a:pPr>
+              <a:spcAft>
+                <a:spcPts val="400"/>
+              </a:spcAft>
+              <a:defRPr sz="1200">
+                <a:solidFill>
+                  <a:srgbClr val="1E293B"/>
+                </a:solidFill>
+                <a:latin typeface="Calibri"/>
+              </a:defRPr>
+            </a:pPr>
+            <a:r>
+              <a:t>• courses (N:1 -&gt; courseId)</a:t>
+            </a:r>
+          </a:p>
+          <a:p>
+            <a:pPr>
+              <a:spcAft>
+                <a:spcPts val="400"/>
+              </a:spcAft>
+              <a:defRPr sz="1200">
+                <a:solidFill>
+                  <a:srgbClr val="1E293B"/>
+                </a:solidFill>
+                <a:latin typeface="Calibri"/>
+              </a:defRPr>
+            </a:pPr>
+            <a:r>
+              <a:t>• users (N:1 -&gt; trainerId)</a:t>
+            </a:r>
+          </a:p>
+          <a:p>
+            <a:pPr>
+              <a:spcAft>
+                <a:spcPts val="400"/>
+              </a:spcAft>
+              <a:defRPr sz="1200">
+                <a:solidFill>
+                  <a:srgbClr val="1E293B"/>
+                </a:solidFill>
+                <a:latin typeface="Calibri"/>
+              </a:defRPr>
+            </a:pPr>
+            <a:r>
+              <a:t>• batch_students (1:N)</a:t>
+            </a:r>
+          </a:p>
+          <a:p>
+            <a:pPr>
+              <a:spcAft>
+                <a:spcPts val="400"/>
+              </a:spcAft>
+              <a:defRPr sz="1200">
+                <a:solidFill>
+                  <a:srgbClr val="1E293B"/>
+                </a:solidFill>
+                <a:latin typeface="Calibri"/>
+              </a:defRPr>
+            </a:pPr>
+            <a:r>
+              <a:t>• registrations (1:N)</a:t>
+            </a:r>
+          </a:p>
+          <a:p>
+            <a:pPr>
+              <a:spcAft>
+                <a:spcPts val="400"/>
+              </a:spcAft>
+              <a:defRPr sz="1200">
+                <a:solidFill>
+                  <a:srgbClr val="1E293B"/>
+                </a:solidFill>
+                <a:latin typeface="Calibri"/>
+              </a:defRPr>
+            </a:pPr>
+            <a:r>
+              <a:t>• attendance (1:N)</a:t>
+            </a:r>
+          </a:p>
+          <a:p>
+            <a:pPr>
+              <a:spcAft>
+                <a:spcPts val="400"/>
+              </a:spcAft>
+              <a:defRPr sz="1200">
+                <a:solidFill>
+                  <a:srgbClr val="1E293B"/>
+                </a:solidFill>
+                <a:latin typeface="Calibri"/>
+              </a:defRPr>
+            </a:pPr>
+            <a:r>
+              <a:t>• leave_requests (1:N)</a:t>
+            </a:r>
+          </a:p>
+          <a:p>
+            <a:pPr>
+              <a:spcAft>
+                <a:spcPts val="400"/>
+              </a:spcAft>
+              <a:defRPr sz="1200">
+                <a:solidFill>
+                  <a:srgbClr val="1E293B"/>
+                </a:solidFill>
+                <a:latin typeface="Calibri"/>
+              </a:defRPr>
+            </a:pPr>
+            <a:r>
+              <a:t>• projects (1:N)</a:t>
+            </a:r>
+          </a:p>
+          <a:p>
+            <a:pPr>
+              <a:spcAft>
+                <a:spcPts val="400"/>
+              </a:spcAft>
+              <a:defRPr sz="1200">
+                <a:solidFill>
+                  <a:srgbClr val="1E293B"/>
+                </a:solidFill>
+                <a:latin typeface="Calibri"/>
+              </a:defRPr>
+            </a:pPr>
+            <a:r>
+              <a:t>• videos (1:N)</a:t>
+            </a:r>
+          </a:p>
+          <a:p>
+            <a:pPr>
+              <a:spcAft>
+                <a:spcPts val="400"/>
+              </a:spcAft>
+              <a:defRPr sz="1200">
+                <a:solidFill>
+                  <a:srgbClr val="1E293B"/>
+                </a:solidFill>
+                <a:latin typeface="Calibri"/>
+              </a:defRPr>
+            </a:pPr>
+            <a:r>
+              <a:t>• feedback (1:N)</a:t>
             </a:r>
           </a:p>
         </p:txBody>
@@ -5992,8 +7138,8 @@
         </p:nvSpPr>
         <p:spPr>
           <a:xfrm>
-            <a:off x="731520" y="3931920"/>
-            <a:ext cx="5120640" cy="2286000"/>
+            <a:off x="8165592" y="1463040"/>
+            <a:ext cx="3291840" cy="4754880"/>
           </a:xfrm>
           <a:prstGeom prst="roundRect">
             <a:avLst/>
@@ -6037,8 +7183,8 @@
         </p:nvSpPr>
         <p:spPr>
           <a:xfrm>
-            <a:off x="914400" y="4069080"/>
-            <a:ext cx="4754879" cy="2011680"/>
+            <a:off x="8348471" y="1600200"/>
+            <a:ext cx="2926080" cy="4480560"/>
           </a:xfrm>
           <a:prstGeom prst="rect">
             <a:avLst/>
@@ -6053,165 +7199,133 @@
           <a:p>
             <a:pPr>
               <a:spcAft>
-                <a:spcPts val="1000"/>
-              </a:spcAft>
-              <a:defRPr sz="1800" b="1">
-                <a:solidFill>
-                  <a:srgbClr val="10B981"/>
-                </a:solidFill>
-                <a:latin typeface="Calibri"/>
-              </a:defRPr>
-            </a:pPr>
-            <a:r>
-              <a:t>Module C: Marketing Funnel</a:t>
-            </a:r>
-          </a:p>
-          <a:p>
-            <a:pPr>
-              <a:spcAft>
-                <a:spcPts val="600"/>
-              </a:spcAft>
-              <a:defRPr sz="1300">
-                <a:solidFill>
-                  <a:srgbClr val="1E293B"/>
-                </a:solidFill>
-                <a:latin typeface="Calibri"/>
-              </a:defRPr>
-            </a:pPr>
-            <a:r>
-              <a:t>• leads: Prospect pipeline (source, status, assignee)</a:t>
-            </a:r>
-          </a:p>
-          <a:p>
-            <a:pPr>
-              <a:spcAft>
-                <a:spcPts val="600"/>
-              </a:spcAft>
-              <a:defRPr sz="1300">
-                <a:solidFill>
-                  <a:srgbClr val="1E293B"/>
-                </a:solidFill>
-                <a:latin typeface="Calibri"/>
-              </a:defRPr>
-            </a:pPr>
-            <a:r>
-              <a:t>• lead_activities: Sales touchpoint log (calls, emails)</a:t>
-            </a:r>
-          </a:p>
-        </p:txBody>
-      </p:sp>
-      <p:sp>
-        <p:nvSpPr>
-          <p:cNvPr id="10" name="Rounded Rectangle 9"/>
-          <p:cNvSpPr/>
-          <p:nvPr/>
-        </p:nvSpPr>
-        <p:spPr>
-          <a:xfrm>
-            <a:off x="6217920" y="3931920"/>
-            <a:ext cx="5120640" cy="2286000"/>
-          </a:xfrm>
-          <a:prstGeom prst="roundRect">
-            <a:avLst/>
-          </a:prstGeom>
-          <a:solidFill>
-            <a:srgbClr val="FFFFFF"/>
-          </a:solidFill>
-          <a:ln w="19050">
-            <a:solidFill>
-              <a:srgbClr val="E2E8F0"/>
-            </a:solidFill>
-          </a:ln>
-        </p:spPr>
-        <p:style>
-          <a:lnRef idx="1">
-            <a:schemeClr val="accent1"/>
-          </a:lnRef>
-          <a:fillRef idx="3">
-            <a:schemeClr val="accent1"/>
-          </a:fillRef>
-          <a:effectRef idx="2">
-            <a:schemeClr val="accent1"/>
-          </a:effectRef>
-          <a:fontRef idx="minor">
-            <a:schemeClr val="lt1"/>
-          </a:fontRef>
-        </p:style>
-        <p:txBody>
-          <a:bodyPr rtlCol="0" anchor="ctr"/>
-          <a:lstStyle/>
-          <a:p>
-            <a:pPr algn="ctr"/>
-          </a:p>
-        </p:txBody>
-      </p:sp>
-      <p:sp>
-        <p:nvSpPr>
-          <p:cNvPr id="11" name="TextBox 10"/>
-          <p:cNvSpPr txBox="1"/>
-          <p:nvPr/>
-        </p:nvSpPr>
-        <p:spPr>
-          <a:xfrm>
-            <a:off x="6400800" y="4069080"/>
-            <a:ext cx="4754879" cy="2011680"/>
-          </a:xfrm>
-          <a:prstGeom prst="rect">
-            <a:avLst/>
-          </a:prstGeom>
-          <a:noFill/>
-        </p:spPr>
-        <p:txBody>
-          <a:bodyPr wrap="square">
-            <a:spAutoFit/>
-          </a:bodyPr>
-          <a:lstStyle/>
-          <a:p>
-            <a:pPr>
-              <a:spcAft>
-                <a:spcPts val="1000"/>
-              </a:spcAft>
-              <a:defRPr sz="1800" b="1">
-                <a:solidFill>
-                  <a:srgbClr val="0066FF"/>
-                </a:solidFill>
-                <a:latin typeface="Calibri"/>
-              </a:defRPr>
-            </a:pPr>
-            <a:r>
-              <a:t>Module D: Finance &amp; Admissions</a:t>
-            </a:r>
-          </a:p>
-          <a:p>
-            <a:pPr>
-              <a:spcAft>
-                <a:spcPts val="600"/>
-              </a:spcAft>
-              <a:defRPr sz="1300">
-                <a:solidFill>
-                  <a:srgbClr val="1E293B"/>
-                </a:solidFill>
-                <a:latin typeface="Calibri"/>
-              </a:defRPr>
-            </a:pPr>
-            <a:r>
-              <a:t>• registrations: Fee tracking (feeAmount, feePaid, receipt)</a:t>
-            </a:r>
-          </a:p>
-          <a:p>
-            <a:pPr>
-              <a:spcAft>
-                <a:spcPts val="600"/>
-              </a:spcAft>
-              <a:defRPr sz="1300">
-                <a:solidFill>
-                  <a:srgbClr val="1E293B"/>
-                </a:solidFill>
-                <a:latin typeface="Calibri"/>
-              </a:defRPr>
-            </a:pPr>
-            <a:r>
-              <a:t>• documents: Student KYC uploads &amp; admin verification status</a:t>
+                <a:spcPts val="800"/>
+              </a:spcAft>
+              <a:defRPr sz="1700" b="1">
+                <a:solidFill>
+                  <a:srgbClr val="F59E0B"/>
+                </a:solidFill>
+                <a:latin typeface="Calibri"/>
+              </a:defRPr>
+            </a:pPr>
+            <a:r>
+              <a:t>📚 HUB 3: 'courses' &amp; Sub-Hubs</a:t>
+            </a:r>
+            <a:br/>
+            <a:r>
+              <a:t>(Catalog &amp; Core Sub-Entities)</a:t>
+            </a:r>
+          </a:p>
+          <a:p>
+            <a:pPr>
+              <a:spcAft>
+                <a:spcPts val="400"/>
+              </a:spcAft>
+              <a:defRPr sz="1200">
+                <a:solidFill>
+                  <a:srgbClr val="1E293B"/>
+                </a:solidFill>
+                <a:latin typeface="Calibri"/>
+              </a:defRPr>
+            </a:pPr>
+            <a:r>
+              <a:t>• courses -&gt; batches (1:N)</a:t>
+            </a:r>
+          </a:p>
+          <a:p>
+            <a:pPr>
+              <a:spcAft>
+                <a:spcPts val="400"/>
+              </a:spcAft>
+              <a:defRPr sz="1200">
+                <a:solidFill>
+                  <a:srgbClr val="1E293B"/>
+                </a:solidFill>
+                <a:latin typeface="Calibri"/>
+              </a:defRPr>
+            </a:pPr>
+            <a:r>
+              <a:t>• courses -&gt; registrations (1:N)</a:t>
+            </a:r>
+          </a:p>
+          <a:p>
+            <a:pPr>
+              <a:spcAft>
+                <a:spcPts val="400"/>
+              </a:spcAft>
+              <a:defRPr sz="1200">
+                <a:solidFill>
+                  <a:srgbClr val="1E293B"/>
+                </a:solidFill>
+                <a:latin typeface="Calibri"/>
+              </a:defRPr>
+            </a:pPr>
+            <a:r>
+              <a:t>• courses -&gt; assessments (1:N)</a:t>
+            </a:r>
+          </a:p>
+          <a:p>
+            <a:pPr>
+              <a:spcAft>
+                <a:spcPts val="400"/>
+              </a:spcAft>
+              <a:defRPr sz="1200">
+                <a:solidFill>
+                  <a:srgbClr val="1E293B"/>
+                </a:solidFill>
+                <a:latin typeface="Calibri"/>
+              </a:defRPr>
+            </a:pPr>
+            <a:r>
+              <a:t>• projects -&gt; tasks (1:N)</a:t>
+            </a:r>
+          </a:p>
+          <a:p>
+            <a:pPr>
+              <a:spcAft>
+                <a:spcPts val="400"/>
+              </a:spcAft>
+              <a:defRPr sz="1200">
+                <a:solidFill>
+                  <a:srgbClr val="1E293B"/>
+                </a:solidFill>
+                <a:latin typeface="Calibri"/>
+              </a:defRPr>
+            </a:pPr>
+            <a:r>
+              <a:t>• leads -&gt; lead_activities (1:N)</a:t>
+            </a:r>
+          </a:p>
+          <a:p>
+            <a:pPr>
+              <a:spcAft>
+                <a:spcPts val="400"/>
+              </a:spcAft>
+              <a:defRPr sz="1200">
+                <a:solidFill>
+                  <a:srgbClr val="1E293B"/>
+                </a:solidFill>
+                <a:latin typeface="Calibri"/>
+              </a:defRPr>
+            </a:pPr>
+            <a:r>
+              <a:t>• assessments -&gt; submissions (1:N)</a:t>
+            </a:r>
+          </a:p>
+          <a:p>
+            <a:pPr>
+              <a:spcAft>
+                <a:spcPts val="400"/>
+              </a:spcAft>
+              <a:defRPr sz="1200">
+                <a:solidFill>
+                  <a:srgbClr val="1E293B"/>
+                </a:solidFill>
+                <a:latin typeface="Calibri"/>
+              </a:defRPr>
+            </a:pPr>
+            <a:r>
+              <a:t>• jobs -&gt; job_applications (1:N)</a:t>
             </a:r>
           </a:p>
         </p:txBody>
@@ -6310,7 +7424,7 @@
               </a:defRPr>
             </a:pPr>
             <a:r>
-              <a:t>5. Relational Database Schema (Part 2: Ops, Academics, Career)</a:t>
+              <a:t>5. Complete Foreign Key (FK) Connection Map</a:t>
             </a:r>
           </a:p>
           <a:p>
@@ -6323,539 +7437,819 @@
               </a:defRPr>
             </a:pPr>
             <a:r>
-              <a:t>Attendance, Evaluation &amp; Placement Modules</a:t>
-            </a:r>
-          </a:p>
-        </p:txBody>
-      </p:sp>
-      <p:sp>
-        <p:nvSpPr>
-          <p:cNvPr id="4" name="Rounded Rectangle 3"/>
-          <p:cNvSpPr/>
+              <a:t>Explicit Mapping of All Foreign Keys Across All 22 Database Tables</a:t>
+            </a:r>
+          </a:p>
+        </p:txBody>
+      </p:sp>
+      <p:graphicFrame>
+        <p:nvGraphicFramePr>
+          <p:cNvPr id="4" name="Table 3"/>
+          <p:cNvGraphicFramePr>
+            <a:graphicFrameLocks noGrp="1"/>
+          </p:cNvGraphicFramePr>
           <p:nvPr/>
-        </p:nvSpPr>
-        <p:spPr>
-          <a:xfrm>
-            <a:off x="731520" y="1463040"/>
-            <a:ext cx="5120640" cy="2286000"/>
-          </a:xfrm>
-          <a:prstGeom prst="roundRect">
-            <a:avLst/>
-          </a:prstGeom>
-          <a:solidFill>
-            <a:srgbClr val="FFFFFF"/>
-          </a:solidFill>
-          <a:ln w="19050">
-            <a:solidFill>
-              <a:srgbClr val="E2E8F0"/>
-            </a:solidFill>
-          </a:ln>
-        </p:spPr>
-        <p:style>
-          <a:lnRef idx="1">
-            <a:schemeClr val="accent1"/>
-          </a:lnRef>
-          <a:fillRef idx="3">
-            <a:schemeClr val="accent1"/>
-          </a:fillRef>
-          <a:effectRef idx="2">
-            <a:schemeClr val="accent1"/>
-          </a:effectRef>
-          <a:fontRef idx="minor">
-            <a:schemeClr val="lt1"/>
-          </a:fontRef>
-        </p:style>
-        <p:txBody>
-          <a:bodyPr rtlCol="0" anchor="ctr"/>
-          <a:lstStyle/>
-          <a:p>
-            <a:pPr algn="ctr"/>
-          </a:p>
-        </p:txBody>
-      </p:sp>
-      <p:sp>
-        <p:nvSpPr>
-          <p:cNvPr id="5" name="TextBox 4"/>
-          <p:cNvSpPr txBox="1"/>
-          <p:nvPr/>
-        </p:nvSpPr>
-        <p:spPr>
-          <a:xfrm>
-            <a:off x="914400" y="1600200"/>
-            <a:ext cx="4754879" cy="2011680"/>
-          </a:xfrm>
-          <a:prstGeom prst="rect">
-            <a:avLst/>
-          </a:prstGeom>
-          <a:noFill/>
-        </p:spPr>
-        <p:txBody>
-          <a:bodyPr wrap="square">
-            <a:spAutoFit/>
-          </a:bodyPr>
-          <a:lstStyle/>
-          <a:p>
-            <a:pPr>
-              <a:spcAft>
-                <a:spcPts val="1000"/>
-              </a:spcAft>
-              <a:defRPr sz="1800" b="1">
-                <a:solidFill>
-                  <a:srgbClr val="0066FF"/>
-                </a:solidFill>
-                <a:latin typeface="Calibri"/>
-              </a:defRPr>
-            </a:pPr>
-            <a:r>
-              <a:t>Module E: Attendance &amp; Time Logs</a:t>
-            </a:r>
-          </a:p>
-          <a:p>
-            <a:pPr>
-              <a:spcAft>
-                <a:spcPts val="600"/>
-              </a:spcAft>
-              <a:defRPr sz="1300">
-                <a:solidFill>
-                  <a:srgbClr val="1E293B"/>
-                </a:solidFill>
-                <a:latin typeface="Calibri"/>
-              </a:defRPr>
-            </a:pPr>
-            <a:r>
-              <a:t>• attendance: Daily class QR/Geo attendance records</a:t>
-            </a:r>
-          </a:p>
-          <a:p>
-            <a:pPr>
-              <a:spcAft>
-                <a:spcPts val="600"/>
-              </a:spcAft>
-              <a:defRPr sz="1300">
-                <a:solidFill>
-                  <a:srgbClr val="1E293B"/>
-                </a:solidFill>
-                <a:latin typeface="Calibri"/>
-              </a:defRPr>
-            </a:pPr>
-            <a:r>
-              <a:t>• leave_requests: Leave applications, proof URLs &amp; status</a:t>
-            </a:r>
-          </a:p>
-          <a:p>
-            <a:pPr>
-              <a:spcAft>
-                <a:spcPts val="600"/>
-              </a:spcAft>
-              <a:defRPr sz="1300">
-                <a:solidFill>
-                  <a:srgbClr val="1E293B"/>
-                </a:solidFill>
-                <a:latin typeface="Calibri"/>
-              </a:defRPr>
-            </a:pPr>
-            <a:r>
-              <a:t>• time_tracking: Lab portal active duration tracking</a:t>
-            </a:r>
-          </a:p>
-        </p:txBody>
-      </p:sp>
-      <p:sp>
-        <p:nvSpPr>
-          <p:cNvPr id="6" name="Rounded Rectangle 5"/>
-          <p:cNvSpPr/>
-          <p:nvPr/>
-        </p:nvSpPr>
-        <p:spPr>
-          <a:xfrm>
-            <a:off x="6217920" y="1463040"/>
-            <a:ext cx="5120640" cy="2286000"/>
-          </a:xfrm>
-          <a:prstGeom prst="roundRect">
-            <a:avLst/>
-          </a:prstGeom>
-          <a:solidFill>
-            <a:srgbClr val="FFFFFF"/>
-          </a:solidFill>
-          <a:ln w="19050">
-            <a:solidFill>
-              <a:srgbClr val="E2E8F0"/>
-            </a:solidFill>
-          </a:ln>
-        </p:spPr>
-        <p:style>
-          <a:lnRef idx="1">
-            <a:schemeClr val="accent1"/>
-          </a:lnRef>
-          <a:fillRef idx="3">
-            <a:schemeClr val="accent1"/>
-          </a:fillRef>
-          <a:effectRef idx="2">
-            <a:schemeClr val="accent1"/>
-          </a:effectRef>
-          <a:fontRef idx="minor">
-            <a:schemeClr val="lt1"/>
-          </a:fontRef>
-        </p:style>
-        <p:txBody>
-          <a:bodyPr rtlCol="0" anchor="ctr"/>
-          <a:lstStyle/>
-          <a:p>
-            <a:pPr algn="ctr"/>
-          </a:p>
-        </p:txBody>
-      </p:sp>
-      <p:sp>
-        <p:nvSpPr>
-          <p:cNvPr id="7" name="TextBox 6"/>
-          <p:cNvSpPr txBox="1"/>
-          <p:nvPr/>
-        </p:nvSpPr>
-        <p:spPr>
-          <a:xfrm>
-            <a:off x="6400800" y="1600200"/>
-            <a:ext cx="4754879" cy="2011680"/>
-          </a:xfrm>
-          <a:prstGeom prst="rect">
-            <a:avLst/>
-          </a:prstGeom>
-          <a:noFill/>
-        </p:spPr>
-        <p:txBody>
-          <a:bodyPr wrap="square">
-            <a:spAutoFit/>
-          </a:bodyPr>
-          <a:lstStyle/>
-          <a:p>
-            <a:pPr>
-              <a:spcAft>
-                <a:spcPts val="1000"/>
-              </a:spcAft>
-              <a:defRPr sz="1800" b="1">
-                <a:solidFill>
-                  <a:srgbClr val="F59E0B"/>
-                </a:solidFill>
-                <a:latin typeface="Calibri"/>
-              </a:defRPr>
-            </a:pPr>
-            <a:r>
-              <a:t>Module F: Projects &amp; Content</a:t>
-            </a:r>
-          </a:p>
-          <a:p>
-            <a:pPr>
-              <a:spcAft>
-                <a:spcPts val="600"/>
-              </a:spcAft>
-              <a:defRPr sz="1300">
-                <a:solidFill>
-                  <a:srgbClr val="1E293B"/>
-                </a:solidFill>
-                <a:latin typeface="Calibri"/>
-              </a:defRPr>
-            </a:pPr>
-            <a:r>
-              <a:t>• projects: Capstone &amp; module projects per batch</a:t>
-            </a:r>
-          </a:p>
-          <a:p>
-            <a:pPr>
-              <a:spcAft>
-                <a:spcPts val="600"/>
-              </a:spcAft>
-              <a:defRPr sz="1300">
-                <a:solidFill>
-                  <a:srgbClr val="1E293B"/>
-                </a:solidFill>
-                <a:latin typeface="Calibri"/>
-              </a:defRPr>
-            </a:pPr>
-            <a:r>
-              <a:t>• tasks: Task tickets per student &amp; plagiarism flags</a:t>
-            </a:r>
-          </a:p>
-          <a:p>
-            <a:pPr>
-              <a:spcAft>
-                <a:spcPts val="600"/>
-              </a:spcAft>
-              <a:defRPr sz="1300">
-                <a:solidFill>
-                  <a:srgbClr val="1E293B"/>
-                </a:solidFill>
-                <a:latin typeface="Calibri"/>
-              </a:defRPr>
-            </a:pPr>
-            <a:r>
-              <a:t>• videos: Lecture recordings &amp; timeline chapters</a:t>
-            </a:r>
-          </a:p>
-        </p:txBody>
-      </p:sp>
-      <p:sp>
-        <p:nvSpPr>
-          <p:cNvPr id="8" name="Rounded Rectangle 7"/>
-          <p:cNvSpPr/>
-          <p:nvPr/>
-        </p:nvSpPr>
-        <p:spPr>
-          <a:xfrm>
-            <a:off x="731520" y="3931920"/>
-            <a:ext cx="5120640" cy="2286000"/>
-          </a:xfrm>
-          <a:prstGeom prst="roundRect">
-            <a:avLst/>
-          </a:prstGeom>
-          <a:solidFill>
-            <a:srgbClr val="FFFFFF"/>
-          </a:solidFill>
-          <a:ln w="19050">
-            <a:solidFill>
-              <a:srgbClr val="E2E8F0"/>
-            </a:solidFill>
-          </a:ln>
-        </p:spPr>
-        <p:style>
-          <a:lnRef idx="1">
-            <a:schemeClr val="accent1"/>
-          </a:lnRef>
-          <a:fillRef idx="3">
-            <a:schemeClr val="accent1"/>
-          </a:fillRef>
-          <a:effectRef idx="2">
-            <a:schemeClr val="accent1"/>
-          </a:effectRef>
-          <a:fontRef idx="minor">
-            <a:schemeClr val="lt1"/>
-          </a:fontRef>
-        </p:style>
-        <p:txBody>
-          <a:bodyPr rtlCol="0" anchor="ctr"/>
-          <a:lstStyle/>
-          <a:p>
-            <a:pPr algn="ctr"/>
-          </a:p>
-        </p:txBody>
-      </p:sp>
-      <p:sp>
-        <p:nvSpPr>
-          <p:cNvPr id="9" name="TextBox 8"/>
-          <p:cNvSpPr txBox="1"/>
-          <p:nvPr/>
-        </p:nvSpPr>
-        <p:spPr>
-          <a:xfrm>
-            <a:off x="914400" y="4069080"/>
-            <a:ext cx="4754879" cy="2011680"/>
-          </a:xfrm>
-          <a:prstGeom prst="rect">
-            <a:avLst/>
-          </a:prstGeom>
-          <a:noFill/>
-        </p:spPr>
-        <p:txBody>
-          <a:bodyPr wrap="square">
-            <a:spAutoFit/>
-          </a:bodyPr>
-          <a:lstStyle/>
-          <a:p>
-            <a:pPr>
-              <a:spcAft>
-                <a:spcPts val="1000"/>
-              </a:spcAft>
-              <a:defRPr sz="1800" b="1">
-                <a:solidFill>
-                  <a:srgbClr val="10B981"/>
-                </a:solidFill>
-                <a:latin typeface="Calibri"/>
-              </a:defRPr>
-            </a:pPr>
-            <a:r>
-              <a:t>Module G: Evaluation Engine</a:t>
-            </a:r>
-          </a:p>
-          <a:p>
-            <a:pPr>
-              <a:spcAft>
-                <a:spcPts val="600"/>
-              </a:spcAft>
-              <a:defRPr sz="1300">
-                <a:solidFill>
-                  <a:srgbClr val="1E293B"/>
-                </a:solidFill>
-                <a:latin typeface="Calibri"/>
-              </a:defRPr>
-            </a:pPr>
-            <a:r>
-              <a:t>• assessments: Exam master (Coding &amp; Aptitude tests)</a:t>
-            </a:r>
-          </a:p>
-          <a:p>
-            <a:pPr>
-              <a:spcAft>
-                <a:spcPts val="600"/>
-              </a:spcAft>
-              <a:defRPr sz="1300">
-                <a:solidFill>
-                  <a:srgbClr val="1E293B"/>
-                </a:solidFill>
-                <a:latin typeface="Calibri"/>
-              </a:defRPr>
-            </a:pPr>
-            <a:r>
-              <a:t>• assessment_submissions: Student test scores &amp; answers</a:t>
-            </a:r>
-          </a:p>
-          <a:p>
-            <a:pPr>
-              <a:spcAft>
-                <a:spcPts val="600"/>
-              </a:spcAft>
-              <a:defRPr sz="1300">
-                <a:solidFill>
-                  <a:srgbClr val="1E293B"/>
-                </a:solidFill>
-                <a:latin typeface="Calibri"/>
-              </a:defRPr>
-            </a:pPr>
-            <a:r>
-              <a:t>• feedback: Weekly ratings for batch &amp; trainer performance</a:t>
-            </a:r>
-          </a:p>
-        </p:txBody>
-      </p:sp>
-      <p:sp>
-        <p:nvSpPr>
-          <p:cNvPr id="10" name="Rounded Rectangle 9"/>
-          <p:cNvSpPr/>
-          <p:nvPr/>
-        </p:nvSpPr>
-        <p:spPr>
-          <a:xfrm>
-            <a:off x="6217920" y="3931920"/>
-            <a:ext cx="5120640" cy="2286000"/>
-          </a:xfrm>
-          <a:prstGeom prst="roundRect">
-            <a:avLst/>
-          </a:prstGeom>
-          <a:solidFill>
-            <a:srgbClr val="FFFFFF"/>
-          </a:solidFill>
-          <a:ln w="19050">
-            <a:solidFill>
-              <a:srgbClr val="E2E8F0"/>
-            </a:solidFill>
-          </a:ln>
-        </p:spPr>
-        <p:style>
-          <a:lnRef idx="1">
-            <a:schemeClr val="accent1"/>
-          </a:lnRef>
-          <a:fillRef idx="3">
-            <a:schemeClr val="accent1"/>
-          </a:fillRef>
-          <a:effectRef idx="2">
-            <a:schemeClr val="accent1"/>
-          </a:effectRef>
-          <a:fontRef idx="minor">
-            <a:schemeClr val="lt1"/>
-          </a:fontRef>
-        </p:style>
-        <p:txBody>
-          <a:bodyPr rtlCol="0" anchor="ctr"/>
-          <a:lstStyle/>
-          <a:p>
-            <a:pPr algn="ctr"/>
-          </a:p>
-        </p:txBody>
-      </p:sp>
-      <p:sp>
-        <p:nvSpPr>
-          <p:cNvPr id="11" name="TextBox 10"/>
-          <p:cNvSpPr txBox="1"/>
-          <p:nvPr/>
-        </p:nvSpPr>
-        <p:spPr>
-          <a:xfrm>
-            <a:off x="6400800" y="4069080"/>
-            <a:ext cx="4754879" cy="2011680"/>
-          </a:xfrm>
-          <a:prstGeom prst="rect">
-            <a:avLst/>
-          </a:prstGeom>
-          <a:noFill/>
-        </p:spPr>
-        <p:txBody>
-          <a:bodyPr wrap="square">
-            <a:spAutoFit/>
-          </a:bodyPr>
-          <a:lstStyle/>
-          <a:p>
-            <a:pPr>
-              <a:spcAft>
-                <a:spcPts val="1000"/>
-              </a:spcAft>
-              <a:defRPr sz="1800" b="1">
-                <a:solidFill>
-                  <a:srgbClr val="0066FF"/>
-                </a:solidFill>
-                <a:latin typeface="Calibri"/>
-              </a:defRPr>
-            </a:pPr>
-            <a:r>
-              <a:t>Module H: Placement &amp; Career</a:t>
-            </a:r>
-          </a:p>
-          <a:p>
-            <a:pPr>
-              <a:spcAft>
-                <a:spcPts val="600"/>
-              </a:spcAft>
-              <a:defRPr sz="1300">
-                <a:solidFill>
-                  <a:srgbClr val="1E293B"/>
-                </a:solidFill>
-                <a:latin typeface="Calibri"/>
-              </a:defRPr>
-            </a:pPr>
-            <a:r>
-              <a:t>• jobs: Corporate hiring drives &amp; salary packages</a:t>
-            </a:r>
-          </a:p>
-          <a:p>
-            <a:pPr>
-              <a:spcAft>
-                <a:spcPts val="600"/>
-              </a:spcAft>
-              <a:defRPr sz="1300">
-                <a:solidFill>
-                  <a:srgbClr val="1E293B"/>
-                </a:solidFill>
-                <a:latin typeface="Calibri"/>
-              </a:defRPr>
-            </a:pPr>
-            <a:r>
-              <a:t>• job_applications: Recruitment funnel stage tracking</a:t>
-            </a:r>
-          </a:p>
-          <a:p>
-            <a:pPr>
-              <a:spcAft>
-                <a:spcPts val="600"/>
-              </a:spcAft>
-              <a:defRPr sz="1300">
-                <a:solidFill>
-                  <a:srgbClr val="1E293B"/>
-                </a:solidFill>
-                <a:latin typeface="Calibri"/>
-              </a:defRPr>
-            </a:pPr>
-            <a:r>
-              <a:t>• mock_interviews &amp; communication_practice: Drill scores</a:t>
-            </a:r>
-          </a:p>
-        </p:txBody>
-      </p:sp>
+        </p:nvGraphicFramePr>
+        <p:xfrm>
+          <a:off x="731520" y="1371600"/>
+          <a:ext cx="10728655" cy="4937760"/>
+        </p:xfrm>
+        <a:graphic>
+          <a:graphicData uri="http://schemas.openxmlformats.org/drawingml/2006/table">
+            <a:tbl>
+              <a:tblPr firstRow="1" bandRow="1">
+                <a:tableStyleId>{5C22544A-7EE6-4342-B048-85BDC9FD1C3A}</a:tableStyleId>
+              </a:tblPr>
+              <a:tblGrid>
+                <a:gridCol w="2560320"/>
+                <a:gridCol w="3200400"/>
+                <a:gridCol w="4967935"/>
+              </a:tblGrid>
+              <a:tr h="448887">
+                <a:tc>
+                  <a:txBody>
+                    <a:bodyPr/>
+                    <a:lstStyle/>
+                    <a:p>
+                      <a:pPr>
+                        <a:defRPr b="1" sz="1300">
+                          <a:solidFill>
+                            <a:srgbClr val="FFFFFF"/>
+                          </a:solidFill>
+                        </a:defRPr>
+                      </a:pPr>
+                      <a:r>
+                        <a:t>Child Table (FK Owner)</a:t>
+                      </a:r>
+                    </a:p>
+                  </a:txBody>
+                  <a:tcPr>
+                    <a:solidFill>
+                      <a:srgbClr val="0F172A"/>
+                    </a:solidFill>
+                  </a:tcPr>
+                </a:tc>
+                <a:tc>
+                  <a:txBody>
+                    <a:bodyPr/>
+                    <a:lstStyle/>
+                    <a:p>
+                      <a:pPr>
+                        <a:defRPr b="1" sz="1300">
+                          <a:solidFill>
+                            <a:srgbClr val="FFFFFF"/>
+                          </a:solidFill>
+                        </a:defRPr>
+                      </a:pPr>
+                      <a:r>
+                        <a:t>Foreign Key (FK Column)</a:t>
+                      </a:r>
+                    </a:p>
+                  </a:txBody>
+                  <a:tcPr>
+                    <a:solidFill>
+                      <a:srgbClr val="0F172A"/>
+                    </a:solidFill>
+                  </a:tcPr>
+                </a:tc>
+                <a:tc>
+                  <a:txBody>
+                    <a:bodyPr/>
+                    <a:lstStyle/>
+                    <a:p>
+                      <a:pPr>
+                        <a:defRPr b="1" sz="1300">
+                          <a:solidFill>
+                            <a:srgbClr val="FFFFFF"/>
+                          </a:solidFill>
+                        </a:defRPr>
+                      </a:pPr>
+                      <a:r>
+                        <a:t>Referenced Parent Table &amp; Key</a:t>
+                      </a:r>
+                    </a:p>
+                  </a:txBody>
+                  <a:tcPr>
+                    <a:solidFill>
+                      <a:srgbClr val="0F172A"/>
+                    </a:solidFill>
+                  </a:tcPr>
+                </a:tc>
+              </a:tr>
+              <a:tr h="448887">
+                <a:tc>
+                  <a:txBody>
+                    <a:bodyPr/>
+                    <a:lstStyle/>
+                    <a:p>
+                      <a:pPr>
+                        <a:defRPr sz="1100">
+                          <a:solidFill>
+                            <a:srgbClr val="1E293B"/>
+                          </a:solidFill>
+                        </a:defRPr>
+                      </a:pPr>
+                      <a:r>
+                        <a:t>admin_permissions</a:t>
+                      </a:r>
+                    </a:p>
+                  </a:txBody>
+                  <a:tcPr>
+                    <a:solidFill>
+                      <a:srgbClr val="FFFFFF"/>
+                    </a:solidFill>
+                  </a:tcPr>
+                </a:tc>
+                <a:tc>
+                  <a:txBody>
+                    <a:bodyPr/>
+                    <a:lstStyle/>
+                    <a:p>
+                      <a:pPr>
+                        <a:defRPr sz="1100">
+                          <a:solidFill>
+                            <a:srgbClr val="1E293B"/>
+                          </a:solidFill>
+                        </a:defRPr>
+                      </a:pPr>
+                      <a:r>
+                        <a:t>userId</a:t>
+                      </a:r>
+                    </a:p>
+                  </a:txBody>
+                  <a:tcPr>
+                    <a:solidFill>
+                      <a:srgbClr val="FFFFFF"/>
+                    </a:solidFill>
+                  </a:tcPr>
+                </a:tc>
+                <a:tc>
+                  <a:txBody>
+                    <a:bodyPr/>
+                    <a:lstStyle/>
+                    <a:p>
+                      <a:pPr>
+                        <a:defRPr sz="1100">
+                          <a:solidFill>
+                            <a:srgbClr val="1E293B"/>
+                          </a:solidFill>
+                        </a:defRPr>
+                      </a:pPr>
+                      <a:r>
+                        <a:t>users.id (1:1 cascade delete)</a:t>
+                      </a:r>
+                    </a:p>
+                  </a:txBody>
+                  <a:tcPr>
+                    <a:solidFill>
+                      <a:srgbClr val="FFFFFF"/>
+                    </a:solidFill>
+                  </a:tcPr>
+                </a:tc>
+              </a:tr>
+              <a:tr h="448887">
+                <a:tc>
+                  <a:txBody>
+                    <a:bodyPr/>
+                    <a:lstStyle/>
+                    <a:p>
+                      <a:pPr>
+                        <a:defRPr sz="1100">
+                          <a:solidFill>
+                            <a:srgbClr val="1E293B"/>
+                          </a:solidFill>
+                        </a:defRPr>
+                      </a:pPr>
+                      <a:r>
+                        <a:t>batches</a:t>
+                      </a:r>
+                    </a:p>
+                  </a:txBody>
+                  <a:tcPr>
+                    <a:solidFill>
+                      <a:srgbClr val="F8FAFC"/>
+                    </a:solidFill>
+                  </a:tcPr>
+                </a:tc>
+                <a:tc>
+                  <a:txBody>
+                    <a:bodyPr/>
+                    <a:lstStyle/>
+                    <a:p>
+                      <a:pPr>
+                        <a:defRPr sz="1100">
+                          <a:solidFill>
+                            <a:srgbClr val="1E293B"/>
+                          </a:solidFill>
+                        </a:defRPr>
+                      </a:pPr>
+                      <a:r>
+                        <a:t>courseId, trainerId</a:t>
+                      </a:r>
+                    </a:p>
+                  </a:txBody>
+                  <a:tcPr>
+                    <a:solidFill>
+                      <a:srgbClr val="F8FAFC"/>
+                    </a:solidFill>
+                  </a:tcPr>
+                </a:tc>
+                <a:tc>
+                  <a:txBody>
+                    <a:bodyPr/>
+                    <a:lstStyle/>
+                    <a:p>
+                      <a:pPr>
+                        <a:defRPr sz="1100">
+                          <a:solidFill>
+                            <a:srgbClr val="1E293B"/>
+                          </a:solidFill>
+                        </a:defRPr>
+                      </a:pPr>
+                      <a:r>
+                        <a:t>courses.id, users.id (Trainer)</a:t>
+                      </a:r>
+                    </a:p>
+                  </a:txBody>
+                  <a:tcPr>
+                    <a:solidFill>
+                      <a:srgbClr val="F8FAFC"/>
+                    </a:solidFill>
+                  </a:tcPr>
+                </a:tc>
+              </a:tr>
+              <a:tr h="448887">
+                <a:tc>
+                  <a:txBody>
+                    <a:bodyPr/>
+                    <a:lstStyle/>
+                    <a:p>
+                      <a:pPr>
+                        <a:defRPr sz="1100">
+                          <a:solidFill>
+                            <a:srgbClr val="1E293B"/>
+                          </a:solidFill>
+                        </a:defRPr>
+                      </a:pPr>
+                      <a:r>
+                        <a:t>batch_students</a:t>
+                      </a:r>
+                    </a:p>
+                  </a:txBody>
+                  <a:tcPr>
+                    <a:solidFill>
+                      <a:srgbClr val="FFFFFF"/>
+                    </a:solidFill>
+                  </a:tcPr>
+                </a:tc>
+                <a:tc>
+                  <a:txBody>
+                    <a:bodyPr/>
+                    <a:lstStyle/>
+                    <a:p>
+                      <a:pPr>
+                        <a:defRPr sz="1100">
+                          <a:solidFill>
+                            <a:srgbClr val="1E293B"/>
+                          </a:solidFill>
+                        </a:defRPr>
+                      </a:pPr>
+                      <a:r>
+                        <a:t>batchId, studentId</a:t>
+                      </a:r>
+                    </a:p>
+                  </a:txBody>
+                  <a:tcPr>
+                    <a:solidFill>
+                      <a:srgbClr val="FFFFFF"/>
+                    </a:solidFill>
+                  </a:tcPr>
+                </a:tc>
+                <a:tc>
+                  <a:txBody>
+                    <a:bodyPr/>
+                    <a:lstStyle/>
+                    <a:p>
+                      <a:pPr>
+                        <a:defRPr sz="1100">
+                          <a:solidFill>
+                            <a:srgbClr val="1E293B"/>
+                          </a:solidFill>
+                        </a:defRPr>
+                      </a:pPr>
+                      <a:r>
+                        <a:t>batches.id, users.id (Enrollment junction)</a:t>
+                      </a:r>
+                    </a:p>
+                  </a:txBody>
+                  <a:tcPr>
+                    <a:solidFill>
+                      <a:srgbClr val="FFFFFF"/>
+                    </a:solidFill>
+                  </a:tcPr>
+                </a:tc>
+              </a:tr>
+              <a:tr h="448887">
+                <a:tc>
+                  <a:txBody>
+                    <a:bodyPr/>
+                    <a:lstStyle/>
+                    <a:p>
+                      <a:pPr>
+                        <a:defRPr sz="1100">
+                          <a:solidFill>
+                            <a:srgbClr val="1E293B"/>
+                          </a:solidFill>
+                        </a:defRPr>
+                      </a:pPr>
+                      <a:r>
+                        <a:t>leads</a:t>
+                      </a:r>
+                    </a:p>
+                  </a:txBody>
+                  <a:tcPr>
+                    <a:solidFill>
+                      <a:srgbClr val="F8FAFC"/>
+                    </a:solidFill>
+                  </a:tcPr>
+                </a:tc>
+                <a:tc>
+                  <a:txBody>
+                    <a:bodyPr/>
+                    <a:lstStyle/>
+                    <a:p>
+                      <a:pPr>
+                        <a:defRPr sz="1100">
+                          <a:solidFill>
+                            <a:srgbClr val="1E293B"/>
+                          </a:solidFill>
+                        </a:defRPr>
+                      </a:pPr>
+                      <a:r>
+                        <a:t>assignedToId, createdById</a:t>
+                      </a:r>
+                    </a:p>
+                  </a:txBody>
+                  <a:tcPr>
+                    <a:solidFill>
+                      <a:srgbClr val="F8FAFC"/>
+                    </a:solidFill>
+                  </a:tcPr>
+                </a:tc>
+                <a:tc>
+                  <a:txBody>
+                    <a:bodyPr/>
+                    <a:lstStyle/>
+                    <a:p>
+                      <a:pPr>
+                        <a:defRPr sz="1100">
+                          <a:solidFill>
+                            <a:srgbClr val="1E293B"/>
+                          </a:solidFill>
+                        </a:defRPr>
+                      </a:pPr>
+                      <a:r>
+                        <a:t>users.id (Marketer / Creator)</a:t>
+                      </a:r>
+                    </a:p>
+                  </a:txBody>
+                  <a:tcPr>
+                    <a:solidFill>
+                      <a:srgbClr val="F8FAFC"/>
+                    </a:solidFill>
+                  </a:tcPr>
+                </a:tc>
+              </a:tr>
+              <a:tr h="448887">
+                <a:tc>
+                  <a:txBody>
+                    <a:bodyPr/>
+                    <a:lstStyle/>
+                    <a:p>
+                      <a:pPr>
+                        <a:defRPr sz="1100">
+                          <a:solidFill>
+                            <a:srgbClr val="1E293B"/>
+                          </a:solidFill>
+                        </a:defRPr>
+                      </a:pPr>
+                      <a:r>
+                        <a:t>lead_activities</a:t>
+                      </a:r>
+                    </a:p>
+                  </a:txBody>
+                  <a:tcPr>
+                    <a:solidFill>
+                      <a:srgbClr val="FFFFFF"/>
+                    </a:solidFill>
+                  </a:tcPr>
+                </a:tc>
+                <a:tc>
+                  <a:txBody>
+                    <a:bodyPr/>
+                    <a:lstStyle/>
+                    <a:p>
+                      <a:pPr>
+                        <a:defRPr sz="1100">
+                          <a:solidFill>
+                            <a:srgbClr val="1E293B"/>
+                          </a:solidFill>
+                        </a:defRPr>
+                      </a:pPr>
+                      <a:r>
+                        <a:t>leadId, userId</a:t>
+                      </a:r>
+                    </a:p>
+                  </a:txBody>
+                  <a:tcPr>
+                    <a:solidFill>
+                      <a:srgbClr val="FFFFFF"/>
+                    </a:solidFill>
+                  </a:tcPr>
+                </a:tc>
+                <a:tc>
+                  <a:txBody>
+                    <a:bodyPr/>
+                    <a:lstStyle/>
+                    <a:p>
+                      <a:pPr>
+                        <a:defRPr sz="1100">
+                          <a:solidFill>
+                            <a:srgbClr val="1E293B"/>
+                          </a:solidFill>
+                        </a:defRPr>
+                      </a:pPr>
+                      <a:r>
+                        <a:t>leads.id, users.id (Touchpoint logs)</a:t>
+                      </a:r>
+                    </a:p>
+                  </a:txBody>
+                  <a:tcPr>
+                    <a:solidFill>
+                      <a:srgbClr val="FFFFFF"/>
+                    </a:solidFill>
+                  </a:tcPr>
+                </a:tc>
+              </a:tr>
+              <a:tr h="448887">
+                <a:tc>
+                  <a:txBody>
+                    <a:bodyPr/>
+                    <a:lstStyle/>
+                    <a:p>
+                      <a:pPr>
+                        <a:defRPr sz="1100">
+                          <a:solidFill>
+                            <a:srgbClr val="1E293B"/>
+                          </a:solidFill>
+                        </a:defRPr>
+                      </a:pPr>
+                      <a:r>
+                        <a:t>registrations</a:t>
+                      </a:r>
+                    </a:p>
+                  </a:txBody>
+                  <a:tcPr>
+                    <a:solidFill>
+                      <a:srgbClr val="F8FAFC"/>
+                    </a:solidFill>
+                  </a:tcPr>
+                </a:tc>
+                <a:tc>
+                  <a:txBody>
+                    <a:bodyPr/>
+                    <a:lstStyle/>
+                    <a:p>
+                      <a:pPr>
+                        <a:defRPr sz="1100">
+                          <a:solidFill>
+                            <a:srgbClr val="1E293B"/>
+                          </a:solidFill>
+                        </a:defRPr>
+                      </a:pPr>
+                      <a:r>
+                        <a:t>studentId, courseId, batchId</a:t>
+                      </a:r>
+                    </a:p>
+                  </a:txBody>
+                  <a:tcPr>
+                    <a:solidFill>
+                      <a:srgbClr val="F8FAFC"/>
+                    </a:solidFill>
+                  </a:tcPr>
+                </a:tc>
+                <a:tc>
+                  <a:txBody>
+                    <a:bodyPr/>
+                    <a:lstStyle/>
+                    <a:p>
+                      <a:pPr>
+                        <a:defRPr sz="1100">
+                          <a:solidFill>
+                            <a:srgbClr val="1E293B"/>
+                          </a:solidFill>
+                        </a:defRPr>
+                      </a:pPr>
+                      <a:r>
+                        <a:t>users.id, courses.id, batches.id</a:t>
+                      </a:r>
+                    </a:p>
+                  </a:txBody>
+                  <a:tcPr>
+                    <a:solidFill>
+                      <a:srgbClr val="F8FAFC"/>
+                    </a:solidFill>
+                  </a:tcPr>
+                </a:tc>
+              </a:tr>
+              <a:tr h="448887">
+                <a:tc>
+                  <a:txBody>
+                    <a:bodyPr/>
+                    <a:lstStyle/>
+                    <a:p>
+                      <a:pPr>
+                        <a:defRPr sz="1100">
+                          <a:solidFill>
+                            <a:srgbClr val="1E293B"/>
+                          </a:solidFill>
+                        </a:defRPr>
+                      </a:pPr>
+                      <a:r>
+                        <a:t>attendance &amp; leaves</a:t>
+                      </a:r>
+                    </a:p>
+                  </a:txBody>
+                  <a:tcPr>
+                    <a:solidFill>
+                      <a:srgbClr val="FFFFFF"/>
+                    </a:solidFill>
+                  </a:tcPr>
+                </a:tc>
+                <a:tc>
+                  <a:txBody>
+                    <a:bodyPr/>
+                    <a:lstStyle/>
+                    <a:p>
+                      <a:pPr>
+                        <a:defRPr sz="1100">
+                          <a:solidFill>
+                            <a:srgbClr val="1E293B"/>
+                          </a:solidFill>
+                        </a:defRPr>
+                      </a:pPr>
+                      <a:r>
+                        <a:t>studentId/userId, batchId</a:t>
+                      </a:r>
+                    </a:p>
+                  </a:txBody>
+                  <a:tcPr>
+                    <a:solidFill>
+                      <a:srgbClr val="FFFFFF"/>
+                    </a:solidFill>
+                  </a:tcPr>
+                </a:tc>
+                <a:tc>
+                  <a:txBody>
+                    <a:bodyPr/>
+                    <a:lstStyle/>
+                    <a:p>
+                      <a:pPr>
+                        <a:defRPr sz="1100">
+                          <a:solidFill>
+                            <a:srgbClr val="1E293B"/>
+                          </a:solidFill>
+                        </a:defRPr>
+                      </a:pPr>
+                      <a:r>
+                        <a:t>users.id, batches.id (Daily ops &amp; approvals)</a:t>
+                      </a:r>
+                    </a:p>
+                  </a:txBody>
+                  <a:tcPr>
+                    <a:solidFill>
+                      <a:srgbClr val="FFFFFF"/>
+                    </a:solidFill>
+                  </a:tcPr>
+                </a:tc>
+              </a:tr>
+              <a:tr h="448887">
+                <a:tc>
+                  <a:txBody>
+                    <a:bodyPr/>
+                    <a:lstStyle/>
+                    <a:p>
+                      <a:pPr>
+                        <a:defRPr sz="1100">
+                          <a:solidFill>
+                            <a:srgbClr val="1E293B"/>
+                          </a:solidFill>
+                        </a:defRPr>
+                      </a:pPr>
+                      <a:r>
+                        <a:t>tasks</a:t>
+                      </a:r>
+                    </a:p>
+                  </a:txBody>
+                  <a:tcPr>
+                    <a:solidFill>
+                      <a:srgbClr val="F8FAFC"/>
+                    </a:solidFill>
+                  </a:tcPr>
+                </a:tc>
+                <a:tc>
+                  <a:txBody>
+                    <a:bodyPr/>
+                    <a:lstStyle/>
+                    <a:p>
+                      <a:pPr>
+                        <a:defRPr sz="1100">
+                          <a:solidFill>
+                            <a:srgbClr val="1E293B"/>
+                          </a:solidFill>
+                        </a:defRPr>
+                      </a:pPr>
+                      <a:r>
+                        <a:t>projectId, studentId</a:t>
+                      </a:r>
+                    </a:p>
+                  </a:txBody>
+                  <a:tcPr>
+                    <a:solidFill>
+                      <a:srgbClr val="F8FAFC"/>
+                    </a:solidFill>
+                  </a:tcPr>
+                </a:tc>
+                <a:tc>
+                  <a:txBody>
+                    <a:bodyPr/>
+                    <a:lstStyle/>
+                    <a:p>
+                      <a:pPr>
+                        <a:defRPr sz="1100">
+                          <a:solidFill>
+                            <a:srgbClr val="1E293B"/>
+                          </a:solidFill>
+                        </a:defRPr>
+                      </a:pPr>
+                      <a:r>
+                        <a:t>projects.id, users.id (Task ticketing)</a:t>
+                      </a:r>
+                    </a:p>
+                  </a:txBody>
+                  <a:tcPr>
+                    <a:solidFill>
+                      <a:srgbClr val="F8FAFC"/>
+                    </a:solidFill>
+                  </a:tcPr>
+                </a:tc>
+              </a:tr>
+              <a:tr h="448887">
+                <a:tc>
+                  <a:txBody>
+                    <a:bodyPr/>
+                    <a:lstStyle/>
+                    <a:p>
+                      <a:pPr>
+                        <a:defRPr sz="1100">
+                          <a:solidFill>
+                            <a:srgbClr val="1E293B"/>
+                          </a:solidFill>
+                        </a:defRPr>
+                      </a:pPr>
+                      <a:r>
+                        <a:t>assessment_submissions</a:t>
+                      </a:r>
+                    </a:p>
+                  </a:txBody>
+                  <a:tcPr>
+                    <a:solidFill>
+                      <a:srgbClr val="FFFFFF"/>
+                    </a:solidFill>
+                  </a:tcPr>
+                </a:tc>
+                <a:tc>
+                  <a:txBody>
+                    <a:bodyPr/>
+                    <a:lstStyle/>
+                    <a:p>
+                      <a:pPr>
+                        <a:defRPr sz="1100">
+                          <a:solidFill>
+                            <a:srgbClr val="1E293B"/>
+                          </a:solidFill>
+                        </a:defRPr>
+                      </a:pPr>
+                      <a:r>
+                        <a:t>assessmentId, studentId</a:t>
+                      </a:r>
+                    </a:p>
+                  </a:txBody>
+                  <a:tcPr>
+                    <a:solidFill>
+                      <a:srgbClr val="FFFFFF"/>
+                    </a:solidFill>
+                  </a:tcPr>
+                </a:tc>
+                <a:tc>
+                  <a:txBody>
+                    <a:bodyPr/>
+                    <a:lstStyle/>
+                    <a:p>
+                      <a:pPr>
+                        <a:defRPr sz="1100">
+                          <a:solidFill>
+                            <a:srgbClr val="1E293B"/>
+                          </a:solidFill>
+                        </a:defRPr>
+                      </a:pPr>
+                      <a:r>
+                        <a:t>assessments.id, users.id (Exam scores)</a:t>
+                      </a:r>
+                    </a:p>
+                  </a:txBody>
+                  <a:tcPr>
+                    <a:solidFill>
+                      <a:srgbClr val="FFFFFF"/>
+                    </a:solidFill>
+                  </a:tcPr>
+                </a:tc>
+              </a:tr>
+              <a:tr h="448890">
+                <a:tc>
+                  <a:txBody>
+                    <a:bodyPr/>
+                    <a:lstStyle/>
+                    <a:p>
+                      <a:pPr>
+                        <a:defRPr sz="1100">
+                          <a:solidFill>
+                            <a:srgbClr val="1E293B"/>
+                          </a:solidFill>
+                        </a:defRPr>
+                      </a:pPr>
+                      <a:r>
+                        <a:t>job_applications</a:t>
+                      </a:r>
+                    </a:p>
+                  </a:txBody>
+                  <a:tcPr>
+                    <a:solidFill>
+                      <a:srgbClr val="F8FAFC"/>
+                    </a:solidFill>
+                  </a:tcPr>
+                </a:tc>
+                <a:tc>
+                  <a:txBody>
+                    <a:bodyPr/>
+                    <a:lstStyle/>
+                    <a:p>
+                      <a:pPr>
+                        <a:defRPr sz="1100">
+                          <a:solidFill>
+                            <a:srgbClr val="1E293B"/>
+                          </a:solidFill>
+                        </a:defRPr>
+                      </a:pPr>
+                      <a:r>
+                        <a:t>jobId, studentId</a:t>
+                      </a:r>
+                    </a:p>
+                  </a:txBody>
+                  <a:tcPr>
+                    <a:solidFill>
+                      <a:srgbClr val="F8FAFC"/>
+                    </a:solidFill>
+                  </a:tcPr>
+                </a:tc>
+                <a:tc>
+                  <a:txBody>
+                    <a:bodyPr/>
+                    <a:lstStyle/>
+                    <a:p>
+                      <a:pPr>
+                        <a:defRPr sz="1100">
+                          <a:solidFill>
+                            <a:srgbClr val="1E293B"/>
+                          </a:solidFill>
+                        </a:defRPr>
+                      </a:pPr>
+                      <a:r>
+                        <a:t>jobs.id, users.id (Recruitment funnel)</a:t>
+                      </a:r>
+                    </a:p>
+                  </a:txBody>
+                  <a:tcPr>
+                    <a:solidFill>
+                      <a:srgbClr val="F8FAFC"/>
+                    </a:solidFill>
+                  </a:tcPr>
+                </a:tc>
+              </a:tr>
+            </a:tbl>
+          </a:graphicData>
+        </a:graphic>
+      </p:graphicFrame>
     </p:spTree>
   </p:cSld>
   <p:clrMapOvr>
@@ -6950,7 +8344,7 @@
               </a:defRPr>
             </a:pPr>
             <a:r>
-              <a:t>6. Data Analytics Project 1: Lead Conversion Funnel</a:t>
+              <a:t>6. Relational Database Schema (Part 1: Core, Marketing, Finance)</a:t>
             </a:r>
           </a:p>
           <a:p>
@@ -6963,7 +8357,7 @@
               </a:defRPr>
             </a:pPr>
             <a:r>
-              <a:t>Evaluating Marketing Channels &amp; Sales Productivity</a:t>
+              <a:t>22 Tables Grouped into Functional Modules</a:t>
             </a:r>
           </a:p>
         </p:txBody>
@@ -6977,7 +8371,7 @@
         <p:spPr>
           <a:xfrm>
             <a:off x="731520" y="1463040"/>
-            <a:ext cx="5120640" cy="4754880"/>
+            <a:ext cx="5120640" cy="2286000"/>
           </a:xfrm>
           <a:prstGeom prst="roundRect">
             <a:avLst/>
@@ -7022,7 +8416,7 @@
         <p:spPr>
           <a:xfrm>
             <a:off x="914400" y="1600200"/>
-            <a:ext cx="4754879" cy="4480560"/>
+            <a:ext cx="4754879" cy="2011680"/>
           </a:xfrm>
           <a:prstGeom prst="rect">
             <a:avLst/>
@@ -7037,9 +8431,9 @@
           <a:p>
             <a:pPr>
               <a:spcAft>
-                <a:spcPts val="1000"/>
-              </a:spcAft>
-              <a:defRPr sz="1800" b="1">
+                <a:spcPts val="800"/>
+              </a:spcAft>
+              <a:defRPr sz="1700" b="1">
                 <a:solidFill>
                   <a:srgbClr val="0066FF"/>
                 </a:solidFill>
@@ -7047,71 +8441,39 @@
               </a:defRPr>
             </a:pPr>
             <a:r>
-              <a:t>📋 Project Specifications</a:t>
-            </a:r>
-          </a:p>
-          <a:p>
-            <a:pPr>
-              <a:spcAft>
-                <a:spcPts val="600"/>
-              </a:spcAft>
-              <a:defRPr sz="1300">
-                <a:solidFill>
-                  <a:srgbClr val="1E293B"/>
-                </a:solidFill>
-                <a:latin typeface="Calibri"/>
-              </a:defRPr>
-            </a:pPr>
-            <a:r>
-              <a:t>• Primary Tables: leads, lead_activities, registrations</a:t>
-            </a:r>
-          </a:p>
-          <a:p>
-            <a:pPr>
-              <a:spcAft>
-                <a:spcPts val="600"/>
-              </a:spcAft>
-              <a:defRPr sz="1300">
-                <a:solidFill>
-                  <a:srgbClr val="1E293B"/>
-                </a:solidFill>
-                <a:latin typeface="Calibri"/>
-              </a:defRPr>
-            </a:pPr>
-            <a:r>
-              <a:t>• Goal: Measure marketing ROI and sales conversion efficiency.</a:t>
-            </a:r>
-          </a:p>
-          <a:p>
-            <a:pPr>
-              <a:spcAft>
-                <a:spcPts val="600"/>
-              </a:spcAft>
-              <a:defRPr sz="1300">
-                <a:solidFill>
-                  <a:srgbClr val="1E293B"/>
-                </a:solidFill>
-                <a:latin typeface="Calibri"/>
-              </a:defRPr>
-            </a:pPr>
-            <a:r>
-              <a:t>• Analytical Focus: Tracking lead journeys from NEW to CONVERTED.</a:t>
-            </a:r>
-          </a:p>
-          <a:p>
-            <a:pPr>
-              <a:spcAft>
-                <a:spcPts val="600"/>
-              </a:spcAft>
-              <a:defRPr sz="1300">
-                <a:solidFill>
-                  <a:srgbClr val="1E293B"/>
-                </a:solidFill>
-                <a:latin typeface="Calibri"/>
-              </a:defRPr>
-            </a:pPr>
-            <a:r>
-              <a:t>• Business Impact: Optimizing marketing spend on high-performing channels.</a:t>
+              <a:t>Module A: Users &amp; RBAC</a:t>
+            </a:r>
+          </a:p>
+          <a:p>
+            <a:pPr>
+              <a:spcAft>
+                <a:spcPts val="400"/>
+              </a:spcAft>
+              <a:defRPr sz="1200">
+                <a:solidFill>
+                  <a:srgbClr val="1E293B"/>
+                </a:solidFill>
+                <a:latin typeface="Calibri"/>
+              </a:defRPr>
+            </a:pPr>
+            <a:r>
+              <a:t>• users: Account master (email, role, phone, studentId)</a:t>
+            </a:r>
+          </a:p>
+          <a:p>
+            <a:pPr>
+              <a:spcAft>
+                <a:spcPts val="400"/>
+              </a:spcAft>
+              <a:defRPr sz="1200">
+                <a:solidFill>
+                  <a:srgbClr val="1E293B"/>
+                </a:solidFill>
+                <a:latin typeface="Calibri"/>
+              </a:defRPr>
+            </a:pPr>
+            <a:r>
+              <a:t>• admin_permissions: Granular administrative flags</a:t>
             </a:r>
           </a:p>
         </p:txBody>
@@ -7125,7 +8487,7 @@
         <p:spPr>
           <a:xfrm>
             <a:off x="6217920" y="1463040"/>
-            <a:ext cx="5120640" cy="4754880"/>
+            <a:ext cx="5120640" cy="2286000"/>
           </a:xfrm>
           <a:prstGeom prst="roundRect">
             <a:avLst/>
@@ -7170,7 +8532,7 @@
         <p:spPr>
           <a:xfrm>
             <a:off x="6400800" y="1600200"/>
-            <a:ext cx="4754879" cy="4480560"/>
+            <a:ext cx="4754879" cy="2011680"/>
           </a:xfrm>
           <a:prstGeom prst="rect">
             <a:avLst/>
@@ -7185,9 +8547,9 @@
           <a:p>
             <a:pPr>
               <a:spcAft>
-                <a:spcPts val="1000"/>
-              </a:spcAft>
-              <a:defRPr sz="1800" b="1">
+                <a:spcPts val="800"/>
+              </a:spcAft>
+              <a:defRPr sz="1700" b="1">
                 <a:solidFill>
                   <a:srgbClr val="F59E0B"/>
                 </a:solidFill>
@@ -7195,71 +8557,287 @@
               </a:defRPr>
             </a:pPr>
             <a:r>
-              <a:t>💡 Key KPIs &amp; Analytics Questions</a:t>
-            </a:r>
-          </a:p>
-          <a:p>
-            <a:pPr>
-              <a:spcAft>
-                <a:spcPts val="600"/>
-              </a:spcAft>
-              <a:defRPr sz="1300">
-                <a:solidFill>
-                  <a:srgbClr val="1E293B"/>
-                </a:solidFill>
-                <a:latin typeface="Calibri"/>
-              </a:defRPr>
-            </a:pPr>
-            <a:r>
-              <a:t>• 1. Lead Conversion Rate (LCR) by Source (Google Ads vs LinkedIn vs Referral).</a:t>
-            </a:r>
-          </a:p>
-          <a:p>
-            <a:pPr>
-              <a:spcAft>
-                <a:spcPts val="600"/>
-              </a:spcAft>
-              <a:defRPr sz="1300">
-                <a:solidFill>
-                  <a:srgbClr val="1E293B"/>
-                </a:solidFill>
-                <a:latin typeface="Calibri"/>
-              </a:defRPr>
-            </a:pPr>
-            <a:r>
-              <a:t>• 2. Marketer Sales Productivity: Conversion % per assigned sales rep.</a:t>
-            </a:r>
-          </a:p>
-          <a:p>
-            <a:pPr>
-              <a:spcAft>
-                <a:spcPts val="600"/>
-              </a:spcAft>
-              <a:defRPr sz="1300">
-                <a:solidFill>
-                  <a:srgbClr val="1E293B"/>
-                </a:solidFill>
-                <a:latin typeface="Calibri"/>
-              </a:defRPr>
-            </a:pPr>
-            <a:r>
-              <a:t>• 3. Average Touchpoints: Number of calls/emails needed before student registration.</a:t>
-            </a:r>
-          </a:p>
-          <a:p>
-            <a:pPr>
-              <a:spcAft>
-                <a:spcPts val="600"/>
-              </a:spcAft>
-              <a:defRPr sz="1300">
-                <a:solidFill>
-                  <a:srgbClr val="1E293B"/>
-                </a:solidFill>
-                <a:latin typeface="Calibri"/>
-              </a:defRPr>
-            </a:pPr>
-            <a:r>
-              <a:t>• 4. Drop-off Analysis: High-loss stages in the marketing funnel.</a:t>
+              <a:t>Module B: Courses &amp; Batches</a:t>
+            </a:r>
+          </a:p>
+          <a:p>
+            <a:pPr>
+              <a:spcAft>
+                <a:spcPts val="400"/>
+              </a:spcAft>
+              <a:defRPr sz="1200">
+                <a:solidFill>
+                  <a:srgbClr val="1E293B"/>
+                </a:solidFill>
+                <a:latin typeface="Calibri"/>
+              </a:defRPr>
+            </a:pPr>
+            <a:r>
+              <a:t>• courses: Master course catalog &amp; base tuition fees</a:t>
+            </a:r>
+          </a:p>
+          <a:p>
+            <a:pPr>
+              <a:spcAft>
+                <a:spcPts val="400"/>
+              </a:spcAft>
+              <a:defRPr sz="1200">
+                <a:solidFill>
+                  <a:srgbClr val="1E293B"/>
+                </a:solidFill>
+                <a:latin typeface="Calibri"/>
+              </a:defRPr>
+            </a:pPr>
+            <a:r>
+              <a:t>• batches: Academic cohorts, schedules &amp; trainer assignment</a:t>
+            </a:r>
+          </a:p>
+          <a:p>
+            <a:pPr>
+              <a:spcAft>
+                <a:spcPts val="400"/>
+              </a:spcAft>
+              <a:defRPr sz="1200">
+                <a:solidFill>
+                  <a:srgbClr val="1E293B"/>
+                </a:solidFill>
+                <a:latin typeface="Calibri"/>
+              </a:defRPr>
+            </a:pPr>
+            <a:r>
+              <a:t>• batch_students: Junction table mapping student enrollments</a:t>
+            </a:r>
+          </a:p>
+        </p:txBody>
+      </p:sp>
+      <p:sp>
+        <p:nvSpPr>
+          <p:cNvPr id="8" name="Rounded Rectangle 7"/>
+          <p:cNvSpPr/>
+          <p:nvPr/>
+        </p:nvSpPr>
+        <p:spPr>
+          <a:xfrm>
+            <a:off x="731520" y="3931920"/>
+            <a:ext cx="5120640" cy="2286000"/>
+          </a:xfrm>
+          <a:prstGeom prst="roundRect">
+            <a:avLst/>
+          </a:prstGeom>
+          <a:solidFill>
+            <a:srgbClr val="FFFFFF"/>
+          </a:solidFill>
+          <a:ln w="19050">
+            <a:solidFill>
+              <a:srgbClr val="E2E8F0"/>
+            </a:solidFill>
+          </a:ln>
+        </p:spPr>
+        <p:style>
+          <a:lnRef idx="1">
+            <a:schemeClr val="accent1"/>
+          </a:lnRef>
+          <a:fillRef idx="3">
+            <a:schemeClr val="accent1"/>
+          </a:fillRef>
+          <a:effectRef idx="2">
+            <a:schemeClr val="accent1"/>
+          </a:effectRef>
+          <a:fontRef idx="minor">
+            <a:schemeClr val="lt1"/>
+          </a:fontRef>
+        </p:style>
+        <p:txBody>
+          <a:bodyPr rtlCol="0" anchor="ctr"/>
+          <a:lstStyle/>
+          <a:p>
+            <a:pPr algn="ctr"/>
+          </a:p>
+        </p:txBody>
+      </p:sp>
+      <p:sp>
+        <p:nvSpPr>
+          <p:cNvPr id="9" name="TextBox 8"/>
+          <p:cNvSpPr txBox="1"/>
+          <p:nvPr/>
+        </p:nvSpPr>
+        <p:spPr>
+          <a:xfrm>
+            <a:off x="914400" y="4069080"/>
+            <a:ext cx="4754879" cy="2011680"/>
+          </a:xfrm>
+          <a:prstGeom prst="rect">
+            <a:avLst/>
+          </a:prstGeom>
+          <a:noFill/>
+        </p:spPr>
+        <p:txBody>
+          <a:bodyPr wrap="square">
+            <a:spAutoFit/>
+          </a:bodyPr>
+          <a:lstStyle/>
+          <a:p>
+            <a:pPr>
+              <a:spcAft>
+                <a:spcPts val="800"/>
+              </a:spcAft>
+              <a:defRPr sz="1700" b="1">
+                <a:solidFill>
+                  <a:srgbClr val="10B981"/>
+                </a:solidFill>
+                <a:latin typeface="Calibri"/>
+              </a:defRPr>
+            </a:pPr>
+            <a:r>
+              <a:t>Module C: Marketing Funnel</a:t>
+            </a:r>
+          </a:p>
+          <a:p>
+            <a:pPr>
+              <a:spcAft>
+                <a:spcPts val="400"/>
+              </a:spcAft>
+              <a:defRPr sz="1200">
+                <a:solidFill>
+                  <a:srgbClr val="1E293B"/>
+                </a:solidFill>
+                <a:latin typeface="Calibri"/>
+              </a:defRPr>
+            </a:pPr>
+            <a:r>
+              <a:t>• leads: Prospect pipeline (source, status, assignee)</a:t>
+            </a:r>
+          </a:p>
+          <a:p>
+            <a:pPr>
+              <a:spcAft>
+                <a:spcPts val="400"/>
+              </a:spcAft>
+              <a:defRPr sz="1200">
+                <a:solidFill>
+                  <a:srgbClr val="1E293B"/>
+                </a:solidFill>
+                <a:latin typeface="Calibri"/>
+              </a:defRPr>
+            </a:pPr>
+            <a:r>
+              <a:t>• lead_activities: Sales touchpoint log (calls, emails)</a:t>
+            </a:r>
+          </a:p>
+        </p:txBody>
+      </p:sp>
+      <p:sp>
+        <p:nvSpPr>
+          <p:cNvPr id="10" name="Rounded Rectangle 9"/>
+          <p:cNvSpPr/>
+          <p:nvPr/>
+        </p:nvSpPr>
+        <p:spPr>
+          <a:xfrm>
+            <a:off x="6217920" y="3931920"/>
+            <a:ext cx="5120640" cy="2286000"/>
+          </a:xfrm>
+          <a:prstGeom prst="roundRect">
+            <a:avLst/>
+          </a:prstGeom>
+          <a:solidFill>
+            <a:srgbClr val="FFFFFF"/>
+          </a:solidFill>
+          <a:ln w="19050">
+            <a:solidFill>
+              <a:srgbClr val="E2E8F0"/>
+            </a:solidFill>
+          </a:ln>
+        </p:spPr>
+        <p:style>
+          <a:lnRef idx="1">
+            <a:schemeClr val="accent1"/>
+          </a:lnRef>
+          <a:fillRef idx="3">
+            <a:schemeClr val="accent1"/>
+          </a:fillRef>
+          <a:effectRef idx="2">
+            <a:schemeClr val="accent1"/>
+          </a:effectRef>
+          <a:fontRef idx="minor">
+            <a:schemeClr val="lt1"/>
+          </a:fontRef>
+        </p:style>
+        <p:txBody>
+          <a:bodyPr rtlCol="0" anchor="ctr"/>
+          <a:lstStyle/>
+          <a:p>
+            <a:pPr algn="ctr"/>
+          </a:p>
+        </p:txBody>
+      </p:sp>
+      <p:sp>
+        <p:nvSpPr>
+          <p:cNvPr id="11" name="TextBox 10"/>
+          <p:cNvSpPr txBox="1"/>
+          <p:nvPr/>
+        </p:nvSpPr>
+        <p:spPr>
+          <a:xfrm>
+            <a:off x="6400800" y="4069080"/>
+            <a:ext cx="4754879" cy="2011680"/>
+          </a:xfrm>
+          <a:prstGeom prst="rect">
+            <a:avLst/>
+          </a:prstGeom>
+          <a:noFill/>
+        </p:spPr>
+        <p:txBody>
+          <a:bodyPr wrap="square">
+            <a:spAutoFit/>
+          </a:bodyPr>
+          <a:lstStyle/>
+          <a:p>
+            <a:pPr>
+              <a:spcAft>
+                <a:spcPts val="800"/>
+              </a:spcAft>
+              <a:defRPr sz="1700" b="1">
+                <a:solidFill>
+                  <a:srgbClr val="0066FF"/>
+                </a:solidFill>
+                <a:latin typeface="Calibri"/>
+              </a:defRPr>
+            </a:pPr>
+            <a:r>
+              <a:t>Module D: Finance &amp; Admissions</a:t>
+            </a:r>
+          </a:p>
+          <a:p>
+            <a:pPr>
+              <a:spcAft>
+                <a:spcPts val="400"/>
+              </a:spcAft>
+              <a:defRPr sz="1200">
+                <a:solidFill>
+                  <a:srgbClr val="1E293B"/>
+                </a:solidFill>
+                <a:latin typeface="Calibri"/>
+              </a:defRPr>
+            </a:pPr>
+            <a:r>
+              <a:t>• registrations: Fee tracking (feeAmount, feePaid, receipt)</a:t>
+            </a:r>
+          </a:p>
+          <a:p>
+            <a:pPr>
+              <a:spcAft>
+                <a:spcPts val="400"/>
+              </a:spcAft>
+              <a:defRPr sz="1200">
+                <a:solidFill>
+                  <a:srgbClr val="1E293B"/>
+                </a:solidFill>
+                <a:latin typeface="Calibri"/>
+              </a:defRPr>
+            </a:pPr>
+            <a:r>
+              <a:t>• documents: Student KYC uploads &amp; admin verification status</a:t>
             </a:r>
           </a:p>
         </p:txBody>
@@ -7358,7 +8936,7 @@
               </a:defRPr>
             </a:pPr>
             <a:r>
-              <a:t>7. Data Analytics Project 2: Student Churn Prediction</a:t>
+              <a:t>7. Relational Database Schema (Part 2: Ops, Academics, Career)</a:t>
             </a:r>
           </a:p>
           <a:p>
@@ -7371,7 +8949,7 @@
               </a:defRPr>
             </a:pPr>
             <a:r>
-              <a:t>Predictive Analytics for Academic Retention &amp; Early Intervention</a:t>
+              <a:t>Attendance, Evaluation &amp; Placement Modules</a:t>
             </a:r>
           </a:p>
         </p:txBody>
@@ -7385,7 +8963,7 @@
         <p:spPr>
           <a:xfrm>
             <a:off x="731520" y="1463040"/>
-            <a:ext cx="5120640" cy="4754880"/>
+            <a:ext cx="5120640" cy="2286000"/>
           </a:xfrm>
           <a:prstGeom prst="roundRect">
             <a:avLst/>
@@ -7430,7 +9008,7 @@
         <p:spPr>
           <a:xfrm>
             <a:off x="914400" y="1600200"/>
-            <a:ext cx="4754879" cy="4480560"/>
+            <a:ext cx="4754879" cy="2011680"/>
           </a:xfrm>
           <a:prstGeom prst="rect">
             <a:avLst/>
@@ -7445,9 +9023,9 @@
           <a:p>
             <a:pPr>
               <a:spcAft>
-                <a:spcPts val="1000"/>
-              </a:spcAft>
-              <a:defRPr sz="1800" b="1">
+                <a:spcPts val="800"/>
+              </a:spcAft>
+              <a:defRPr sz="1700" b="1">
                 <a:solidFill>
                   <a:srgbClr val="0066FF"/>
                 </a:solidFill>
@@ -7455,71 +9033,55 @@
               </a:defRPr>
             </a:pPr>
             <a:r>
-              <a:t>📊 Metric Formulas</a:t>
-            </a:r>
-          </a:p>
-          <a:p>
-            <a:pPr>
-              <a:spcAft>
-                <a:spcPts val="600"/>
-              </a:spcAft>
-              <a:defRPr sz="1300">
-                <a:solidFill>
-                  <a:srgbClr val="1E293B"/>
-                </a:solidFill>
-                <a:latin typeface="Calibri"/>
-              </a:defRPr>
-            </a:pPr>
-            <a:r>
-              <a:t>• Attendance Percentage = (Count of PRESENT / Total Batch Days) * 100</a:t>
-            </a:r>
-          </a:p>
-          <a:p>
-            <a:pPr>
-              <a:spcAft>
-                <a:spcPts val="600"/>
-              </a:spcAft>
-              <a:defRPr sz="1300">
-                <a:solidFill>
-                  <a:srgbClr val="1E293B"/>
-                </a:solidFill>
-                <a:latin typeface="Calibri"/>
-              </a:defRPr>
-            </a:pPr>
-            <a:r>
-              <a:t>• Task Overdue Rate = (Count of OVERDUE Tasks / Total Assigned Tasks) * 100</a:t>
-            </a:r>
-          </a:p>
-          <a:p>
-            <a:pPr>
-              <a:spcAft>
-                <a:spcPts val="600"/>
-              </a:spcAft>
-              <a:defRPr sz="1300">
-                <a:solidFill>
-                  <a:srgbClr val="1E293B"/>
-                </a:solidFill>
-                <a:latin typeface="Calibri"/>
-              </a:defRPr>
-            </a:pPr>
-            <a:r>
-              <a:t>• Primary Tables: attendance, tasks, leave_requests, feedback</a:t>
-            </a:r>
-          </a:p>
-          <a:p>
-            <a:pPr>
-              <a:spcAft>
-                <a:spcPts val="600"/>
-              </a:spcAft>
-              <a:defRPr sz="1300">
-                <a:solidFill>
-                  <a:srgbClr val="1E293B"/>
-                </a:solidFill>
-                <a:latin typeface="Calibri"/>
-              </a:defRPr>
-            </a:pPr>
-            <a:r>
-              <a:t>• Goal: Identify at-risk students before course abandonment.</a:t>
+              <a:t>Module E: Attendance &amp; Time Logs</a:t>
+            </a:r>
+          </a:p>
+          <a:p>
+            <a:pPr>
+              <a:spcAft>
+                <a:spcPts val="400"/>
+              </a:spcAft>
+              <a:defRPr sz="1200">
+                <a:solidFill>
+                  <a:srgbClr val="1E293B"/>
+                </a:solidFill>
+                <a:latin typeface="Calibri"/>
+              </a:defRPr>
+            </a:pPr>
+            <a:r>
+              <a:t>• attendance: Daily class QR/Geo attendance records</a:t>
+            </a:r>
+          </a:p>
+          <a:p>
+            <a:pPr>
+              <a:spcAft>
+                <a:spcPts val="400"/>
+              </a:spcAft>
+              <a:defRPr sz="1200">
+                <a:solidFill>
+                  <a:srgbClr val="1E293B"/>
+                </a:solidFill>
+                <a:latin typeface="Calibri"/>
+              </a:defRPr>
+            </a:pPr>
+            <a:r>
+              <a:t>• leave_requests: Leave applications, proof URLs &amp; status</a:t>
+            </a:r>
+          </a:p>
+          <a:p>
+            <a:pPr>
+              <a:spcAft>
+                <a:spcPts val="400"/>
+              </a:spcAft>
+              <a:defRPr sz="1200">
+                <a:solidFill>
+                  <a:srgbClr val="1E293B"/>
+                </a:solidFill>
+                <a:latin typeface="Calibri"/>
+              </a:defRPr>
+            </a:pPr>
+            <a:r>
+              <a:t>• time_tracking: Lab portal active duration tracking</a:t>
             </a:r>
           </a:p>
         </p:txBody>
@@ -7533,7 +9095,7 @@
         <p:spPr>
           <a:xfrm>
             <a:off x="6217920" y="1463040"/>
-            <a:ext cx="5120640" cy="4754880"/>
+            <a:ext cx="5120640" cy="2286000"/>
           </a:xfrm>
           <a:prstGeom prst="roundRect">
             <a:avLst/>
@@ -7578,7 +9140,7 @@
         <p:spPr>
           <a:xfrm>
             <a:off x="6400800" y="1600200"/>
-            <a:ext cx="4754879" cy="4480560"/>
+            <a:ext cx="4754879" cy="2011680"/>
           </a:xfrm>
           <a:prstGeom prst="rect">
             <a:avLst/>
@@ -7593,9 +9155,141 @@
           <a:p>
             <a:pPr>
               <a:spcAft>
-                <a:spcPts val="1000"/>
-              </a:spcAft>
-              <a:defRPr sz="1800" b="1">
+                <a:spcPts val="800"/>
+              </a:spcAft>
+              <a:defRPr sz="1700" b="1">
+                <a:solidFill>
+                  <a:srgbClr val="F59E0B"/>
+                </a:solidFill>
+                <a:latin typeface="Calibri"/>
+              </a:defRPr>
+            </a:pPr>
+            <a:r>
+              <a:t>Module F: Projects &amp; Content</a:t>
+            </a:r>
+          </a:p>
+          <a:p>
+            <a:pPr>
+              <a:spcAft>
+                <a:spcPts val="400"/>
+              </a:spcAft>
+              <a:defRPr sz="1200">
+                <a:solidFill>
+                  <a:srgbClr val="1E293B"/>
+                </a:solidFill>
+                <a:latin typeface="Calibri"/>
+              </a:defRPr>
+            </a:pPr>
+            <a:r>
+              <a:t>• projects: Capstone &amp; module projects per batch</a:t>
+            </a:r>
+          </a:p>
+          <a:p>
+            <a:pPr>
+              <a:spcAft>
+                <a:spcPts val="400"/>
+              </a:spcAft>
+              <a:defRPr sz="1200">
+                <a:solidFill>
+                  <a:srgbClr val="1E293B"/>
+                </a:solidFill>
+                <a:latin typeface="Calibri"/>
+              </a:defRPr>
+            </a:pPr>
+            <a:r>
+              <a:t>• tasks: Task tickets per student &amp; plagiarism flags</a:t>
+            </a:r>
+          </a:p>
+          <a:p>
+            <a:pPr>
+              <a:spcAft>
+                <a:spcPts val="400"/>
+              </a:spcAft>
+              <a:defRPr sz="1200">
+                <a:solidFill>
+                  <a:srgbClr val="1E293B"/>
+                </a:solidFill>
+                <a:latin typeface="Calibri"/>
+              </a:defRPr>
+            </a:pPr>
+            <a:r>
+              <a:t>• videos: Lecture recordings &amp; timeline chapters</a:t>
+            </a:r>
+          </a:p>
+        </p:txBody>
+      </p:sp>
+      <p:sp>
+        <p:nvSpPr>
+          <p:cNvPr id="8" name="Rounded Rectangle 7"/>
+          <p:cNvSpPr/>
+          <p:nvPr/>
+        </p:nvSpPr>
+        <p:spPr>
+          <a:xfrm>
+            <a:off x="731520" y="3931920"/>
+            <a:ext cx="5120640" cy="2286000"/>
+          </a:xfrm>
+          <a:prstGeom prst="roundRect">
+            <a:avLst/>
+          </a:prstGeom>
+          <a:solidFill>
+            <a:srgbClr val="FFFFFF"/>
+          </a:solidFill>
+          <a:ln w="19050">
+            <a:solidFill>
+              <a:srgbClr val="E2E8F0"/>
+            </a:solidFill>
+          </a:ln>
+        </p:spPr>
+        <p:style>
+          <a:lnRef idx="1">
+            <a:schemeClr val="accent1"/>
+          </a:lnRef>
+          <a:fillRef idx="3">
+            <a:schemeClr val="accent1"/>
+          </a:fillRef>
+          <a:effectRef idx="2">
+            <a:schemeClr val="accent1"/>
+          </a:effectRef>
+          <a:fontRef idx="minor">
+            <a:schemeClr val="lt1"/>
+          </a:fontRef>
+        </p:style>
+        <p:txBody>
+          <a:bodyPr rtlCol="0" anchor="ctr"/>
+          <a:lstStyle/>
+          <a:p>
+            <a:pPr algn="ctr"/>
+          </a:p>
+        </p:txBody>
+      </p:sp>
+      <p:sp>
+        <p:nvSpPr>
+          <p:cNvPr id="9" name="TextBox 8"/>
+          <p:cNvSpPr txBox="1"/>
+          <p:nvPr/>
+        </p:nvSpPr>
+        <p:spPr>
+          <a:xfrm>
+            <a:off x="914400" y="4069080"/>
+            <a:ext cx="4754879" cy="2011680"/>
+          </a:xfrm>
+          <a:prstGeom prst="rect">
+            <a:avLst/>
+          </a:prstGeom>
+          <a:noFill/>
+        </p:spPr>
+        <p:txBody>
+          <a:bodyPr wrap="square">
+            <a:spAutoFit/>
+          </a:bodyPr>
+          <a:lstStyle/>
+          <a:p>
+            <a:pPr>
+              <a:spcAft>
+                <a:spcPts val="800"/>
+              </a:spcAft>
+              <a:defRPr sz="1700" b="1">
                 <a:solidFill>
                   <a:srgbClr val="10B981"/>
                 </a:solidFill>
@@ -7603,71 +9297,187 @@
               </a:defRPr>
             </a:pPr>
             <a:r>
-              <a:t>🎯 Churn Risk Rules &amp; Actions</a:t>
-            </a:r>
-          </a:p>
-          <a:p>
-            <a:pPr>
-              <a:spcAft>
-                <a:spcPts val="600"/>
-              </a:spcAft>
-              <a:defRPr sz="1300">
-                <a:solidFill>
-                  <a:srgbClr val="1E293B"/>
-                </a:solidFill>
-                <a:latin typeface="Calibri"/>
-              </a:defRPr>
-            </a:pPr>
-            <a:r>
-              <a:t>• High Risk Threshold: Attendance &lt; 75% AND Overdue Tasks &gt; 30%.</a:t>
-            </a:r>
-          </a:p>
-          <a:p>
-            <a:pPr>
-              <a:spcAft>
-                <a:spcPts val="600"/>
-              </a:spcAft>
-              <a:defRPr sz="1300">
-                <a:solidFill>
-                  <a:srgbClr val="1E293B"/>
-                </a:solidFill>
-                <a:latin typeface="Calibri"/>
-              </a:defRPr>
-            </a:pPr>
-            <a:r>
-              <a:t>• Early Warning Indicator: Consistently low weekly feedback rating (&lt; 3 stars).</a:t>
-            </a:r>
-          </a:p>
-          <a:p>
-            <a:pPr>
-              <a:spcAft>
-                <a:spcPts val="600"/>
-              </a:spcAft>
-              <a:defRPr sz="1300">
-                <a:solidFill>
-                  <a:srgbClr val="1E293B"/>
-                </a:solidFill>
-                <a:latin typeface="Calibri"/>
-              </a:defRPr>
-            </a:pPr>
-            <a:r>
-              <a:t>• Intervention Trigger: Automated alert to batch trainers and academic advisors.</a:t>
-            </a:r>
-          </a:p>
-          <a:p>
-            <a:pPr>
-              <a:spcAft>
-                <a:spcPts val="600"/>
-              </a:spcAft>
-              <a:defRPr sz="1300">
-                <a:solidFill>
-                  <a:srgbClr val="1E293B"/>
-                </a:solidFill>
-                <a:latin typeface="Calibri"/>
-              </a:defRPr>
-            </a:pPr>
-            <a:r>
-              <a:t>• Outcome: Increased course completion rate and student success.</a:t>
+              <a:t>Module G: Evaluation Engine</a:t>
+            </a:r>
+          </a:p>
+          <a:p>
+            <a:pPr>
+              <a:spcAft>
+                <a:spcPts val="400"/>
+              </a:spcAft>
+              <a:defRPr sz="1200">
+                <a:solidFill>
+                  <a:srgbClr val="1E293B"/>
+                </a:solidFill>
+                <a:latin typeface="Calibri"/>
+              </a:defRPr>
+            </a:pPr>
+            <a:r>
+              <a:t>• assessments: Exam master (Coding &amp; Aptitude tests)</a:t>
+            </a:r>
+          </a:p>
+          <a:p>
+            <a:pPr>
+              <a:spcAft>
+                <a:spcPts val="400"/>
+              </a:spcAft>
+              <a:defRPr sz="1200">
+                <a:solidFill>
+                  <a:srgbClr val="1E293B"/>
+                </a:solidFill>
+                <a:latin typeface="Calibri"/>
+              </a:defRPr>
+            </a:pPr>
+            <a:r>
+              <a:t>• assessment_submissions: Student test scores &amp; answers</a:t>
+            </a:r>
+          </a:p>
+          <a:p>
+            <a:pPr>
+              <a:spcAft>
+                <a:spcPts val="400"/>
+              </a:spcAft>
+              <a:defRPr sz="1200">
+                <a:solidFill>
+                  <a:srgbClr val="1E293B"/>
+                </a:solidFill>
+                <a:latin typeface="Calibri"/>
+              </a:defRPr>
+            </a:pPr>
+            <a:r>
+              <a:t>• feedback: Weekly ratings for batch &amp; trainer performance</a:t>
+            </a:r>
+          </a:p>
+        </p:txBody>
+      </p:sp>
+      <p:sp>
+        <p:nvSpPr>
+          <p:cNvPr id="10" name="Rounded Rectangle 9"/>
+          <p:cNvSpPr/>
+          <p:nvPr/>
+        </p:nvSpPr>
+        <p:spPr>
+          <a:xfrm>
+            <a:off x="6217920" y="3931920"/>
+            <a:ext cx="5120640" cy="2286000"/>
+          </a:xfrm>
+          <a:prstGeom prst="roundRect">
+            <a:avLst/>
+          </a:prstGeom>
+          <a:solidFill>
+            <a:srgbClr val="FFFFFF"/>
+          </a:solidFill>
+          <a:ln w="19050">
+            <a:solidFill>
+              <a:srgbClr val="E2E8F0"/>
+            </a:solidFill>
+          </a:ln>
+        </p:spPr>
+        <p:style>
+          <a:lnRef idx="1">
+            <a:schemeClr val="accent1"/>
+          </a:lnRef>
+          <a:fillRef idx="3">
+            <a:schemeClr val="accent1"/>
+          </a:fillRef>
+          <a:effectRef idx="2">
+            <a:schemeClr val="accent1"/>
+          </a:effectRef>
+          <a:fontRef idx="minor">
+            <a:schemeClr val="lt1"/>
+          </a:fontRef>
+        </p:style>
+        <p:txBody>
+          <a:bodyPr rtlCol="0" anchor="ctr"/>
+          <a:lstStyle/>
+          <a:p>
+            <a:pPr algn="ctr"/>
+          </a:p>
+        </p:txBody>
+      </p:sp>
+      <p:sp>
+        <p:nvSpPr>
+          <p:cNvPr id="11" name="TextBox 10"/>
+          <p:cNvSpPr txBox="1"/>
+          <p:nvPr/>
+        </p:nvSpPr>
+        <p:spPr>
+          <a:xfrm>
+            <a:off x="6400800" y="4069080"/>
+            <a:ext cx="4754879" cy="2011680"/>
+          </a:xfrm>
+          <a:prstGeom prst="rect">
+            <a:avLst/>
+          </a:prstGeom>
+          <a:noFill/>
+        </p:spPr>
+        <p:txBody>
+          <a:bodyPr wrap="square">
+            <a:spAutoFit/>
+          </a:bodyPr>
+          <a:lstStyle/>
+          <a:p>
+            <a:pPr>
+              <a:spcAft>
+                <a:spcPts val="800"/>
+              </a:spcAft>
+              <a:defRPr sz="1700" b="1">
+                <a:solidFill>
+                  <a:srgbClr val="0066FF"/>
+                </a:solidFill>
+                <a:latin typeface="Calibri"/>
+              </a:defRPr>
+            </a:pPr>
+            <a:r>
+              <a:t>Module H: Placement &amp; Career</a:t>
+            </a:r>
+          </a:p>
+          <a:p>
+            <a:pPr>
+              <a:spcAft>
+                <a:spcPts val="400"/>
+              </a:spcAft>
+              <a:defRPr sz="1200">
+                <a:solidFill>
+                  <a:srgbClr val="1E293B"/>
+                </a:solidFill>
+                <a:latin typeface="Calibri"/>
+              </a:defRPr>
+            </a:pPr>
+            <a:r>
+              <a:t>• jobs: Corporate hiring drives &amp; salary packages</a:t>
+            </a:r>
+          </a:p>
+          <a:p>
+            <a:pPr>
+              <a:spcAft>
+                <a:spcPts val="400"/>
+              </a:spcAft>
+              <a:defRPr sz="1200">
+                <a:solidFill>
+                  <a:srgbClr val="1E293B"/>
+                </a:solidFill>
+                <a:latin typeface="Calibri"/>
+              </a:defRPr>
+            </a:pPr>
+            <a:r>
+              <a:t>• job_applications: Recruitment funnel stage tracking</a:t>
+            </a:r>
+          </a:p>
+          <a:p>
+            <a:pPr>
+              <a:spcAft>
+                <a:spcPts val="400"/>
+              </a:spcAft>
+              <a:defRPr sz="1200">
+                <a:solidFill>
+                  <a:srgbClr val="1E293B"/>
+                </a:solidFill>
+                <a:latin typeface="Calibri"/>
+              </a:defRPr>
+            </a:pPr>
+            <a:r>
+              <a:t>• mock_interviews &amp; communication_practice: Drill scores</a:t>
             </a:r>
           </a:p>
         </p:txBody>
@@ -7766,7 +9576,7 @@
               </a:defRPr>
             </a:pPr>
             <a:r>
-              <a:t>8. Data Analytics Project 3: Revenue &amp; Fee Realization</a:t>
+              <a:t>8. Data Analytics Project 1: Lead Conversion Funnel</a:t>
             </a:r>
           </a:p>
           <a:p>
@@ -7779,7 +9589,7 @@
               </a:defRPr>
             </a:pPr>
             <a:r>
-              <a:t>Financial Analytics &amp; Tuition Collection Efficiency</a:t>
+              <a:t>Evaluating Marketing Channels &amp; Sales Productivity</a:t>
             </a:r>
           </a:p>
         </p:txBody>
@@ -7853,97 +9663,81 @@
           <a:p>
             <a:pPr>
               <a:spcAft>
-                <a:spcPts val="1000"/>
-              </a:spcAft>
-              <a:defRPr sz="1800" b="1">
-                <a:solidFill>
-                  <a:srgbClr val="F59E0B"/>
-                </a:solidFill>
-                <a:latin typeface="Calibri"/>
-              </a:defRPr>
-            </a:pPr>
-            <a:r>
-              <a:t>💰 Revenue Metrics</a:t>
-            </a:r>
-          </a:p>
-          <a:p>
-            <a:pPr>
-              <a:spcAft>
-                <a:spcPts val="600"/>
-              </a:spcAft>
-              <a:defRPr sz="1300">
-                <a:solidFill>
-                  <a:srgbClr val="1E293B"/>
-                </a:solidFill>
-                <a:latin typeface="Calibri"/>
-              </a:defRPr>
-            </a:pPr>
-            <a:r>
-              <a:t>• Total Agreed Tuition Revenue = SUM(feeAmount)</a:t>
-            </a:r>
-          </a:p>
-          <a:p>
-            <a:pPr>
-              <a:spcAft>
-                <a:spcPts val="600"/>
-              </a:spcAft>
-              <a:defRPr sz="1300">
-                <a:solidFill>
-                  <a:srgbClr val="1E293B"/>
-                </a:solidFill>
-                <a:latin typeface="Calibri"/>
-              </a:defRPr>
-            </a:pPr>
-            <a:r>
-              <a:t>• Collected Cash Realization = SUM(feePaid)</a:t>
-            </a:r>
-          </a:p>
-          <a:p>
-            <a:pPr>
-              <a:spcAft>
-                <a:spcPts val="600"/>
-              </a:spcAft>
-              <a:defRPr sz="1300">
-                <a:solidFill>
-                  <a:srgbClr val="1E293B"/>
-                </a:solidFill>
-                <a:latin typeface="Calibri"/>
-              </a:defRPr>
-            </a:pPr>
-            <a:r>
-              <a:t>• Outstanding Fee Balance = SUM(feeAmount - feePaid)</a:t>
-            </a:r>
-          </a:p>
-          <a:p>
-            <a:pPr>
-              <a:spcAft>
-                <a:spcPts val="600"/>
-              </a:spcAft>
-              <a:defRPr sz="1300">
-                <a:solidFill>
-                  <a:srgbClr val="1E293B"/>
-                </a:solidFill>
-                <a:latin typeface="Calibri"/>
-              </a:defRPr>
-            </a:pPr>
-            <a:r>
-              <a:t>• Collection Efficiency % = (Total Fee Paid / Total Fee Amount) * 100</a:t>
-            </a:r>
-          </a:p>
-          <a:p>
-            <a:pPr>
-              <a:spcAft>
-                <a:spcPts val="600"/>
-              </a:spcAft>
-              <a:defRPr sz="1300">
-                <a:solidFill>
-                  <a:srgbClr val="1E293B"/>
-                </a:solidFill>
-                <a:latin typeface="Calibri"/>
-              </a:defRPr>
-            </a:pPr>
-            <a:r>
-              <a:t>• Primary Tables: registrations, courses, batches</a:t>
+                <a:spcPts val="800"/>
+              </a:spcAft>
+              <a:defRPr sz="1700" b="1">
+                <a:solidFill>
+                  <a:srgbClr val="0066FF"/>
+                </a:solidFill>
+                <a:latin typeface="Calibri"/>
+              </a:defRPr>
+            </a:pPr>
+            <a:r>
+              <a:t>📋 Project Specifications</a:t>
+            </a:r>
+          </a:p>
+          <a:p>
+            <a:pPr>
+              <a:spcAft>
+                <a:spcPts val="400"/>
+              </a:spcAft>
+              <a:defRPr sz="1200">
+                <a:solidFill>
+                  <a:srgbClr val="1E293B"/>
+                </a:solidFill>
+                <a:latin typeface="Calibri"/>
+              </a:defRPr>
+            </a:pPr>
+            <a:r>
+              <a:t>• Primary Tables: leads, lead_activities, registrations</a:t>
+            </a:r>
+          </a:p>
+          <a:p>
+            <a:pPr>
+              <a:spcAft>
+                <a:spcPts val="400"/>
+              </a:spcAft>
+              <a:defRPr sz="1200">
+                <a:solidFill>
+                  <a:srgbClr val="1E293B"/>
+                </a:solidFill>
+                <a:latin typeface="Calibri"/>
+              </a:defRPr>
+            </a:pPr>
+            <a:r>
+              <a:t>• Goal: Measure marketing ROI and sales conversion efficiency.</a:t>
+            </a:r>
+          </a:p>
+          <a:p>
+            <a:pPr>
+              <a:spcAft>
+                <a:spcPts val="400"/>
+              </a:spcAft>
+              <a:defRPr sz="1200">
+                <a:solidFill>
+                  <a:srgbClr val="1E293B"/>
+                </a:solidFill>
+                <a:latin typeface="Calibri"/>
+              </a:defRPr>
+            </a:pPr>
+            <a:r>
+              <a:t>• Analytical Focus: Tracking lead journeys from NEW to CONVERTED.</a:t>
+            </a:r>
+          </a:p>
+          <a:p>
+            <a:pPr>
+              <a:spcAft>
+                <a:spcPts val="400"/>
+              </a:spcAft>
+              <a:defRPr sz="1200">
+                <a:solidFill>
+                  <a:srgbClr val="1E293B"/>
+                </a:solidFill>
+                <a:latin typeface="Calibri"/>
+              </a:defRPr>
+            </a:pPr>
+            <a:r>
+              <a:t>• Business Impact: Optimizing marketing spend on high-performing channels.</a:t>
             </a:r>
           </a:p>
         </p:txBody>
@@ -8017,81 +9811,81 @@
           <a:p>
             <a:pPr>
               <a:spcAft>
-                <a:spcPts val="1000"/>
-              </a:spcAft>
-              <a:defRPr sz="1800" b="1">
-                <a:solidFill>
-                  <a:srgbClr val="0066FF"/>
-                </a:solidFill>
-                <a:latin typeface="Calibri"/>
-              </a:defRPr>
-            </a:pPr>
-            <a:r>
-              <a:t>📈 BI Dashboard Questions</a:t>
-            </a:r>
-          </a:p>
-          <a:p>
-            <a:pPr>
-              <a:spcAft>
-                <a:spcPts val="600"/>
-              </a:spcAft>
-              <a:defRPr sz="1300">
-                <a:solidFill>
-                  <a:srgbClr val="1E293B"/>
-                </a:solidFill>
-                <a:latin typeface="Calibri"/>
-              </a:defRPr>
-            </a:pPr>
-            <a:r>
-              <a:t>• 1. Which course generates the highest gross revenue per batch?</a:t>
-            </a:r>
-          </a:p>
-          <a:p>
-            <a:pPr>
-              <a:spcAft>
-                <a:spcPts val="600"/>
-              </a:spcAft>
-              <a:defRPr sz="1300">
-                <a:solidFill>
-                  <a:srgbClr val="1E293B"/>
-                </a:solidFill>
-                <a:latin typeface="Calibri"/>
-              </a:defRPr>
-            </a:pPr>
-            <a:r>
-              <a:t>• 2. What is the total uncollected fee balance across active batches?</a:t>
-            </a:r>
-          </a:p>
-          <a:p>
-            <a:pPr>
-              <a:spcAft>
-                <a:spcPts val="600"/>
-              </a:spcAft>
-              <a:defRPr sz="1300">
-                <a:solidFill>
-                  <a:srgbClr val="1E293B"/>
-                </a:solidFill>
-                <a:latin typeface="Calibri"/>
-              </a:defRPr>
-            </a:pPr>
-            <a:r>
-              <a:t>• 3. Fee payment delinquency trends by student enrollment month.</a:t>
-            </a:r>
-          </a:p>
-          <a:p>
-            <a:pPr>
-              <a:spcAft>
-                <a:spcPts val="600"/>
-              </a:spcAft>
-              <a:defRPr sz="1300">
-                <a:solidFill>
-                  <a:srgbClr val="1E293B"/>
-                </a:solidFill>
-                <a:latin typeface="Calibri"/>
-              </a:defRPr>
-            </a:pPr>
-            <a:r>
-              <a:t>• 4. Revenue realization forecasting for upcoming batch end-dates.</a:t>
+                <a:spcPts val="800"/>
+              </a:spcAft>
+              <a:defRPr sz="1700" b="1">
+                <a:solidFill>
+                  <a:srgbClr val="F59E0B"/>
+                </a:solidFill>
+                <a:latin typeface="Calibri"/>
+              </a:defRPr>
+            </a:pPr>
+            <a:r>
+              <a:t>💡 Key KPIs &amp; Analytics Questions</a:t>
+            </a:r>
+          </a:p>
+          <a:p>
+            <a:pPr>
+              <a:spcAft>
+                <a:spcPts val="400"/>
+              </a:spcAft>
+              <a:defRPr sz="1200">
+                <a:solidFill>
+                  <a:srgbClr val="1E293B"/>
+                </a:solidFill>
+                <a:latin typeface="Calibri"/>
+              </a:defRPr>
+            </a:pPr>
+            <a:r>
+              <a:t>• 1. Lead Conversion Rate (LCR) by Source (Google Ads vs LinkedIn vs Referral).</a:t>
+            </a:r>
+          </a:p>
+          <a:p>
+            <a:pPr>
+              <a:spcAft>
+                <a:spcPts val="400"/>
+              </a:spcAft>
+              <a:defRPr sz="1200">
+                <a:solidFill>
+                  <a:srgbClr val="1E293B"/>
+                </a:solidFill>
+                <a:latin typeface="Calibri"/>
+              </a:defRPr>
+            </a:pPr>
+            <a:r>
+              <a:t>• 2. Marketer Sales Productivity: Conversion % per assigned sales rep.</a:t>
+            </a:r>
+          </a:p>
+          <a:p>
+            <a:pPr>
+              <a:spcAft>
+                <a:spcPts val="400"/>
+              </a:spcAft>
+              <a:defRPr sz="1200">
+                <a:solidFill>
+                  <a:srgbClr val="1E293B"/>
+                </a:solidFill>
+                <a:latin typeface="Calibri"/>
+              </a:defRPr>
+            </a:pPr>
+            <a:r>
+              <a:t>• 3. Average Touchpoints: Number of calls/emails needed before student registration.</a:t>
+            </a:r>
+          </a:p>
+          <a:p>
+            <a:pPr>
+              <a:spcAft>
+                <a:spcPts val="400"/>
+              </a:spcAft>
+              <a:defRPr sz="1200">
+                <a:solidFill>
+                  <a:srgbClr val="1E293B"/>
+                </a:solidFill>
+                <a:latin typeface="Calibri"/>
+              </a:defRPr>
+            </a:pPr>
+            <a:r>
+              <a:t>• 4. Drop-off Analysis: High-loss stages in the marketing funnel.</a:t>
             </a:r>
           </a:p>
         </p:txBody>

--- a/LMS_Data_Architecture_and_Flow.pptx
+++ b/LMS_Data_Architecture_and_Flow.pptx
@@ -3221,7 +3221,7 @@
               </a:defRPr>
             </a:pPr>
             <a:r>
-              <a:t>LMS DATA ARCHITECTURE &amp; SYSTEM FLOW</a:t>
+              <a:t>LMS SYSTEM DATA FLOW &amp; ARCHITECTURE</a:t>
             </a:r>
           </a:p>
           <a:p>
@@ -3237,7 +3237,7 @@
               </a:defRPr>
             </a:pPr>
             <a:r>
-              <a:t>End-to-End Business Pipeline, ER Table Connections &amp; 22-Table Schema for Data Analytics</a:t>
+              <a:t>End-to-End Table Data Flow, ER Connections &amp; 22-Table Relational Model for Students</a:t>
             </a:r>
           </a:p>
           <a:p>
@@ -3441,7 +3441,7 @@
               <a:spcAft>
                 <a:spcPts val="800"/>
               </a:spcAft>
-              <a:defRPr sz="1700" b="1">
+              <a:defRPr sz="1600" b="1">
                 <a:solidFill>
                   <a:srgbClr val="0066FF"/>
                 </a:solidFill>
@@ -3457,7 +3457,7 @@
               <a:spcAft>
                 <a:spcPts val="400"/>
               </a:spcAft>
-              <a:defRPr sz="1200">
+              <a:defRPr sz="1150">
                 <a:solidFill>
                   <a:srgbClr val="1E293B"/>
                 </a:solidFill>
@@ -3473,7 +3473,7 @@
               <a:spcAft>
                 <a:spcPts val="400"/>
               </a:spcAft>
-              <a:defRPr sz="1200">
+              <a:defRPr sz="1150">
                 <a:solidFill>
                   <a:srgbClr val="1E293B"/>
                 </a:solidFill>
@@ -3489,7 +3489,7 @@
               <a:spcAft>
                 <a:spcPts val="400"/>
               </a:spcAft>
-              <a:defRPr sz="1200">
+              <a:defRPr sz="1150">
                 <a:solidFill>
                   <a:srgbClr val="1E293B"/>
                 </a:solidFill>
@@ -3505,7 +3505,7 @@
               <a:spcAft>
                 <a:spcPts val="400"/>
               </a:spcAft>
-              <a:defRPr sz="1200">
+              <a:defRPr sz="1150">
                 <a:solidFill>
                   <a:srgbClr val="1E293B"/>
                 </a:solidFill>
@@ -3589,7 +3589,7 @@
               <a:spcAft>
                 <a:spcPts val="800"/>
               </a:spcAft>
-              <a:defRPr sz="1700" b="1">
+              <a:defRPr sz="1600" b="1">
                 <a:solidFill>
                   <a:srgbClr val="10B981"/>
                 </a:solidFill>
@@ -3605,7 +3605,7 @@
               <a:spcAft>
                 <a:spcPts val="400"/>
               </a:spcAft>
-              <a:defRPr sz="1200">
+              <a:defRPr sz="1150">
                 <a:solidFill>
                   <a:srgbClr val="1E293B"/>
                 </a:solidFill>
@@ -3621,7 +3621,7 @@
               <a:spcAft>
                 <a:spcPts val="400"/>
               </a:spcAft>
-              <a:defRPr sz="1200">
+              <a:defRPr sz="1150">
                 <a:solidFill>
                   <a:srgbClr val="1E293B"/>
                 </a:solidFill>
@@ -3637,7 +3637,7 @@
               <a:spcAft>
                 <a:spcPts val="400"/>
               </a:spcAft>
-              <a:defRPr sz="1200">
+              <a:defRPr sz="1150">
                 <a:solidFill>
                   <a:srgbClr val="1E293B"/>
                 </a:solidFill>
@@ -3653,7 +3653,7 @@
               <a:spcAft>
                 <a:spcPts val="400"/>
               </a:spcAft>
-              <a:defRPr sz="1200">
+              <a:defRPr sz="1150">
                 <a:solidFill>
                   <a:srgbClr val="1E293B"/>
                 </a:solidFill>
@@ -3849,7 +3849,7 @@
               <a:spcAft>
                 <a:spcPts val="800"/>
               </a:spcAft>
-              <a:defRPr sz="1700" b="1">
+              <a:defRPr sz="1600" b="1">
                 <a:solidFill>
                   <a:srgbClr val="F59E0B"/>
                 </a:solidFill>
@@ -3865,7 +3865,7 @@
               <a:spcAft>
                 <a:spcPts val="400"/>
               </a:spcAft>
-              <a:defRPr sz="1200">
+              <a:defRPr sz="1150">
                 <a:solidFill>
                   <a:srgbClr val="1E293B"/>
                 </a:solidFill>
@@ -3881,7 +3881,7 @@
               <a:spcAft>
                 <a:spcPts val="400"/>
               </a:spcAft>
-              <a:defRPr sz="1200">
+              <a:defRPr sz="1150">
                 <a:solidFill>
                   <a:srgbClr val="1E293B"/>
                 </a:solidFill>
@@ -3897,7 +3897,7 @@
               <a:spcAft>
                 <a:spcPts val="400"/>
               </a:spcAft>
-              <a:defRPr sz="1200">
+              <a:defRPr sz="1150">
                 <a:solidFill>
                   <a:srgbClr val="1E293B"/>
                 </a:solidFill>
@@ -3913,7 +3913,7 @@
               <a:spcAft>
                 <a:spcPts val="400"/>
               </a:spcAft>
-              <a:defRPr sz="1200">
+              <a:defRPr sz="1150">
                 <a:solidFill>
                   <a:srgbClr val="1E293B"/>
                 </a:solidFill>
@@ -3929,7 +3929,7 @@
               <a:spcAft>
                 <a:spcPts val="400"/>
               </a:spcAft>
-              <a:defRPr sz="1200">
+              <a:defRPr sz="1150">
                 <a:solidFill>
                   <a:srgbClr val="1E293B"/>
                 </a:solidFill>
@@ -4013,7 +4013,7 @@
               <a:spcAft>
                 <a:spcPts val="800"/>
               </a:spcAft>
-              <a:defRPr sz="1700" b="1">
+              <a:defRPr sz="1600" b="1">
                 <a:solidFill>
                   <a:srgbClr val="0066FF"/>
                 </a:solidFill>
@@ -4029,7 +4029,7 @@
               <a:spcAft>
                 <a:spcPts val="400"/>
               </a:spcAft>
-              <a:defRPr sz="1200">
+              <a:defRPr sz="1150">
                 <a:solidFill>
                   <a:srgbClr val="1E293B"/>
                 </a:solidFill>
@@ -4045,7 +4045,7 @@
               <a:spcAft>
                 <a:spcPts val="400"/>
               </a:spcAft>
-              <a:defRPr sz="1200">
+              <a:defRPr sz="1150">
                 <a:solidFill>
                   <a:srgbClr val="1E293B"/>
                 </a:solidFill>
@@ -4061,7 +4061,7 @@
               <a:spcAft>
                 <a:spcPts val="400"/>
               </a:spcAft>
-              <a:defRPr sz="1200">
+              <a:defRPr sz="1150">
                 <a:solidFill>
                   <a:srgbClr val="1E293B"/>
                 </a:solidFill>
@@ -4077,7 +4077,7 @@
               <a:spcAft>
                 <a:spcPts val="400"/>
               </a:spcAft>
-              <a:defRPr sz="1200">
+              <a:defRPr sz="1150">
                 <a:solidFill>
                   <a:srgbClr val="1E293B"/>
                 </a:solidFill>
@@ -4273,7 +4273,7 @@
               <a:spcAft>
                 <a:spcPts val="800"/>
               </a:spcAft>
-              <a:defRPr sz="1700" b="1">
+              <a:defRPr sz="1600" b="1">
                 <a:solidFill>
                   <a:srgbClr val="10B981"/>
                 </a:solidFill>
@@ -4289,7 +4289,7 @@
               <a:spcAft>
                 <a:spcPts val="400"/>
               </a:spcAft>
-              <a:defRPr sz="1200">
+              <a:defRPr sz="1150">
                 <a:solidFill>
                   <a:srgbClr val="1E293B"/>
                 </a:solidFill>
@@ -4305,7 +4305,7 @@
               <a:spcAft>
                 <a:spcPts val="400"/>
               </a:spcAft>
-              <a:defRPr sz="1200">
+              <a:defRPr sz="1150">
                 <a:solidFill>
                   <a:srgbClr val="1E293B"/>
                 </a:solidFill>
@@ -4321,7 +4321,7 @@
               <a:spcAft>
                 <a:spcPts val="400"/>
               </a:spcAft>
-              <a:defRPr sz="1200">
+              <a:defRPr sz="1150">
                 <a:solidFill>
                   <a:srgbClr val="1E293B"/>
                 </a:solidFill>
@@ -4337,7 +4337,7 @@
               <a:spcAft>
                 <a:spcPts val="400"/>
               </a:spcAft>
-              <a:defRPr sz="1200">
+              <a:defRPr sz="1150">
                 <a:solidFill>
                   <a:srgbClr val="1E293B"/>
                 </a:solidFill>
@@ -4421,7 +4421,7 @@
               <a:spcAft>
                 <a:spcPts val="800"/>
               </a:spcAft>
-              <a:defRPr sz="1700" b="1">
+              <a:defRPr sz="1600" b="1">
                 <a:solidFill>
                   <a:srgbClr val="F59E0B"/>
                 </a:solidFill>
@@ -4437,7 +4437,7 @@
               <a:spcAft>
                 <a:spcPts val="400"/>
               </a:spcAft>
-              <a:defRPr sz="1200">
+              <a:defRPr sz="1150">
                 <a:solidFill>
                   <a:srgbClr val="1E293B"/>
                 </a:solidFill>
@@ -4453,7 +4453,7 @@
               <a:spcAft>
                 <a:spcPts val="400"/>
               </a:spcAft>
-              <a:defRPr sz="1200">
+              <a:defRPr sz="1150">
                 <a:solidFill>
                   <a:srgbClr val="1E293B"/>
                 </a:solidFill>
@@ -4469,7 +4469,7 @@
               <a:spcAft>
                 <a:spcPts val="400"/>
               </a:spcAft>
-              <a:defRPr sz="1200">
+              <a:defRPr sz="1150">
                 <a:solidFill>
                   <a:srgbClr val="1E293B"/>
                 </a:solidFill>
@@ -4485,7 +4485,7 @@
               <a:spcAft>
                 <a:spcPts val="400"/>
               </a:spcAft>
-              <a:defRPr sz="1200">
+              <a:defRPr sz="1150">
                 <a:solidFill>
                   <a:srgbClr val="1E293B"/>
                 </a:solidFill>
@@ -4681,7 +4681,7 @@
               <a:spcAft>
                 <a:spcPts val="800"/>
               </a:spcAft>
-              <a:defRPr sz="1700" b="1">
+              <a:defRPr sz="1600" b="1">
                 <a:solidFill>
                   <a:srgbClr val="0066FF"/>
                 </a:solidFill>
@@ -4697,15 +4697,15 @@
               <a:spcAft>
                 <a:spcPts val="400"/>
               </a:spcAft>
-              <a:defRPr sz="1200">
-                <a:solidFill>
-                  <a:srgbClr val="1E293B"/>
-                </a:solidFill>
-                <a:latin typeface="Calibri"/>
-              </a:defRPr>
-            </a:pPr>
-            <a:r>
-              <a:t>• 1. Relational Integrity: Foreign key constraints ensure data consistency across complex multi-table workflows.</a:t>
+              <a:defRPr sz="1150">
+                <a:solidFill>
+                  <a:srgbClr val="1E293B"/>
+                </a:solidFill>
+                <a:latin typeface="Calibri"/>
+              </a:defRPr>
+            </a:pPr>
+            <a:r>
+              <a:t>• 1. Sequential Data Flow: Data moves in 6 distinct steps from Inquiry to Job Placement.</a:t>
             </a:r>
           </a:p>
           <a:p>
@@ -4713,15 +4713,15 @@
               <a:spcAft>
                 <a:spcPts val="400"/>
               </a:spcAft>
-              <a:defRPr sz="1200">
-                <a:solidFill>
-                  <a:srgbClr val="1E293B"/>
-                </a:solidFill>
-                <a:latin typeface="Calibri"/>
-              </a:defRPr>
-            </a:pPr>
-            <a:r>
-              <a:t>• 2. Central Hub Pattern: 'users', 'batches', and 'courses' form the core backbone of all sub-modules.</a:t>
+              <a:defRPr sz="1150">
+                <a:solidFill>
+                  <a:srgbClr val="1E293B"/>
+                </a:solidFill>
+                <a:latin typeface="Calibri"/>
+              </a:defRPr>
+            </a:pPr>
+            <a:r>
+              <a:t>• 2. Table Transitions: Foreign keys (leadId, userId, batchId) connect tables sequentially.</a:t>
             </a:r>
           </a:p>
           <a:p>
@@ -4729,15 +4729,15 @@
               <a:spcAft>
                 <a:spcPts val="400"/>
               </a:spcAft>
-              <a:defRPr sz="1200">
-                <a:solidFill>
-                  <a:srgbClr val="1E293B"/>
-                </a:solidFill>
-                <a:latin typeface="Calibri"/>
-              </a:defRPr>
-            </a:pPr>
-            <a:r>
-              <a:t>• 3. Domain-Driven Analytics: Organizing database tables into functional domains simplifies dashboard design.</a:t>
+              <a:defRPr sz="1150">
+                <a:solidFill>
+                  <a:srgbClr val="1E293B"/>
+                </a:solidFill>
+                <a:latin typeface="Calibri"/>
+              </a:defRPr>
+            </a:pPr>
+            <a:r>
+              <a:t>• 3. Central Hub Pattern: 'users', 'batches', and 'courses' form the core backbone of all sub-modules.</a:t>
             </a:r>
           </a:p>
           <a:p>
@@ -4745,7 +4745,7 @@
               <a:spcAft>
                 <a:spcPts val="400"/>
               </a:spcAft>
-              <a:defRPr sz="1200">
+              <a:defRPr sz="1150">
                 <a:solidFill>
                   <a:srgbClr val="1E293B"/>
                 </a:solidFill>
@@ -4761,7 +4761,7 @@
               <a:spcAft>
                 <a:spcPts val="400"/>
               </a:spcAft>
-              <a:defRPr sz="1200">
+              <a:defRPr sz="1150">
                 <a:solidFill>
                   <a:srgbClr val="1E293B"/>
                 </a:solidFill>
@@ -4957,7 +4957,7 @@
               <a:spcAft>
                 <a:spcPts val="800"/>
               </a:spcAft>
-              <a:defRPr sz="1700" b="1">
+              <a:defRPr sz="1600" b="1">
                 <a:solidFill>
                   <a:srgbClr val="0066FF"/>
                 </a:solidFill>
@@ -4973,7 +4973,7 @@
               <a:spcAft>
                 <a:spcPts val="400"/>
               </a:spcAft>
-              <a:defRPr sz="1200">
+              <a:defRPr sz="1150">
                 <a:solidFill>
                   <a:srgbClr val="1E293B"/>
                 </a:solidFill>
@@ -4989,7 +4989,7 @@
               <a:spcAft>
                 <a:spcPts val="400"/>
               </a:spcAft>
-              <a:defRPr sz="1200">
+              <a:defRPr sz="1150">
                 <a:solidFill>
                   <a:srgbClr val="1E293B"/>
                 </a:solidFill>
@@ -5005,7 +5005,7 @@
               <a:spcAft>
                 <a:spcPts val="400"/>
               </a:spcAft>
-              <a:defRPr sz="1200">
+              <a:defRPr sz="1150">
                 <a:solidFill>
                   <a:srgbClr val="1E293B"/>
                 </a:solidFill>
@@ -5021,7 +5021,7 @@
               <a:spcAft>
                 <a:spcPts val="400"/>
               </a:spcAft>
-              <a:defRPr sz="1200">
+              <a:defRPr sz="1150">
                 <a:solidFill>
                   <a:srgbClr val="1E293B"/>
                 </a:solidFill>
@@ -5105,7 +5105,7 @@
               <a:spcAft>
                 <a:spcPts val="800"/>
               </a:spcAft>
-              <a:defRPr sz="1700" b="1">
+              <a:defRPr sz="1600" b="1">
                 <a:solidFill>
                   <a:srgbClr val="F59E0B"/>
                 </a:solidFill>
@@ -5121,7 +5121,7 @@
               <a:spcAft>
                 <a:spcPts val="400"/>
               </a:spcAft>
-              <a:defRPr sz="1200">
+              <a:defRPr sz="1150">
                 <a:solidFill>
                   <a:srgbClr val="1E293B"/>
                 </a:solidFill>
@@ -5137,7 +5137,7 @@
               <a:spcAft>
                 <a:spcPts val="400"/>
               </a:spcAft>
-              <a:defRPr sz="1200">
+              <a:defRPr sz="1150">
                 <a:solidFill>
                   <a:srgbClr val="1E293B"/>
                 </a:solidFill>
@@ -5153,7 +5153,7 @@
               <a:spcAft>
                 <a:spcPts val="400"/>
               </a:spcAft>
-              <a:defRPr sz="1200">
+              <a:defRPr sz="1150">
                 <a:solidFill>
                   <a:srgbClr val="1E293B"/>
                 </a:solidFill>
@@ -5169,7 +5169,7 @@
               <a:spcAft>
                 <a:spcPts val="400"/>
               </a:spcAft>
-              <a:defRPr sz="1200">
+              <a:defRPr sz="1150">
                 <a:solidFill>
                   <a:srgbClr val="1E293B"/>
                 </a:solidFill>
@@ -5185,7 +5185,7 @@
               <a:spcAft>
                 <a:spcPts val="400"/>
               </a:spcAft>
-              <a:defRPr sz="1200">
+              <a:defRPr sz="1150">
                 <a:solidFill>
                   <a:srgbClr val="1E293B"/>
                 </a:solidFill>
@@ -5292,7 +5292,7 @@
               </a:defRPr>
             </a:pPr>
             <a:r>
-              <a:t>2. End-to-End Student Lifecycle Data Pipeline</a:t>
+              <a:t>2. Complete Step-by-Step Table Data Flow Diagram</a:t>
             </a:r>
           </a:p>
           <a:p>
@@ -5305,7 +5305,7 @@
               </a:defRPr>
             </a:pPr>
             <a:r>
-              <a:t>5 Key Phases of Data Generation in an Enterprise LMS</a:t>
+              <a:t>How Data Flows sequentially through Database Tables in 6 Business Steps</a:t>
             </a:r>
           </a:p>
         </p:txBody>
@@ -5319,7 +5319,7 @@
         <p:spPr>
           <a:xfrm>
             <a:off x="731520" y="1463040"/>
-            <a:ext cx="2011680" cy="4754880"/>
+            <a:ext cx="1600200" cy="4754880"/>
           </a:xfrm>
           <a:prstGeom prst="roundRect">
             <a:avLst/>
@@ -5327,9 +5327,9 @@
           <a:solidFill>
             <a:srgbClr val="FFFFFF"/>
           </a:solidFill>
-          <a:ln w="19050">
+          <a:ln w="25400">
             <a:solidFill>
-              <a:srgbClr val="E2E8F0"/>
+              <a:srgbClr val="0066FF"/>
             </a:solidFill>
           </a:ln>
         </p:spPr>
@@ -5363,8 +5363,8 @@
         </p:nvSpPr>
         <p:spPr>
           <a:xfrm>
-            <a:off x="914400" y="1600200"/>
-            <a:ext cx="1645920" cy="4480560"/>
+            <a:off x="822960" y="1600200"/>
+            <a:ext cx="1417320" cy="4480560"/>
           </a:xfrm>
           <a:prstGeom prst="rect">
             <a:avLst/>
@@ -5377,11 +5377,8 @@
           </a:bodyPr>
           <a:lstStyle/>
           <a:p>
-            <a:pPr>
-              <a:spcAft>
-                <a:spcPts val="800"/>
-              </a:spcAft>
-              <a:defRPr sz="1700" b="1">
+            <a:pPr algn="ctr">
+              <a:defRPr sz="1300" b="1">
                 <a:solidFill>
                   <a:srgbClr val="0066FF"/>
                 </a:solidFill>
@@ -5389,55 +5386,43 @@
               </a:defRPr>
             </a:pPr>
             <a:r>
-              <a:t>Phase 1: Marketing</a:t>
-            </a:r>
-          </a:p>
-          <a:p>
-            <a:pPr>
-              <a:spcAft>
-                <a:spcPts val="400"/>
-              </a:spcAft>
-              <a:defRPr sz="1200">
-                <a:solidFill>
-                  <a:srgbClr val="1E293B"/>
-                </a:solidFill>
-                <a:latin typeface="Calibri"/>
-              </a:defRPr>
-            </a:pPr>
-            <a:r>
-              <a:t>• Lead capture from Ads</a:t>
-            </a:r>
-          </a:p>
-          <a:p>
-            <a:pPr>
-              <a:spcAft>
-                <a:spcPts val="400"/>
-              </a:spcAft>
-              <a:defRPr sz="1200">
-                <a:solidFill>
-                  <a:srgbClr val="1E293B"/>
-                </a:solidFill>
-                <a:latin typeface="Calibri"/>
-              </a:defRPr>
-            </a:pPr>
-            <a:r>
-              <a:t>• Call/Email logs</a:t>
-            </a:r>
-          </a:p>
-          <a:p>
-            <a:pPr>
-              <a:spcAft>
-                <a:spcPts val="400"/>
-              </a:spcAft>
-              <a:defRPr sz="1200">
-                <a:solidFill>
-                  <a:srgbClr val="1E293B"/>
-                </a:solidFill>
-                <a:latin typeface="Calibri"/>
-              </a:defRPr>
-            </a:pPr>
-            <a:r>
-              <a:t>• Lead to Student</a:t>
+              <a:t>1. INQUIRY</a:t>
+            </a:r>
+          </a:p>
+          <a:p>
+            <a:br/>
+            <a:pPr algn="ctr">
+              <a:defRPr sz="1100" b="1">
+                <a:solidFill>
+                  <a:srgbClr val="0F172A"/>
+                </a:solidFill>
+                <a:latin typeface="Calibri"/>
+              </a:defRPr>
+            </a:pPr>
+            <a:r>
+              <a:t>[ Tables ]</a:t>
+            </a:r>
+            <a:br/>
+            <a:r>
+              <a:t>leads</a:t>
+            </a:r>
+            <a:br/>
+            <a:r>
+              <a:t>lead_activities</a:t>
+            </a:r>
+          </a:p>
+          <a:p>
+            <a:br/>
+            <a:pPr algn="ctr">
+              <a:defRPr sz="1050">
+                <a:solidFill>
+                  <a:srgbClr val="1E293B"/>
+                </a:solidFill>
+                <a:latin typeface="Calibri"/>
+              </a:defRPr>
+            </a:pPr>
+            <a:r>
+              <a:t>Prospect registers interest. Calls &amp; emails logged.</a:t>
             </a:r>
           </a:p>
         </p:txBody>
@@ -5450,8 +5435,8 @@
         </p:nvSpPr>
         <p:spPr>
           <a:xfrm>
-            <a:off x="2926080" y="1463040"/>
-            <a:ext cx="2011680" cy="4754880"/>
+            <a:off x="2514600" y="1463040"/>
+            <a:ext cx="1600200" cy="4754880"/>
           </a:xfrm>
           <a:prstGeom prst="roundRect">
             <a:avLst/>
@@ -5459,9 +5444,9 @@
           <a:solidFill>
             <a:srgbClr val="FFFFFF"/>
           </a:solidFill>
-          <a:ln w="19050">
+          <a:ln w="25400">
             <a:solidFill>
-              <a:srgbClr val="E2E8F0"/>
+              <a:srgbClr val="F59E0B"/>
             </a:solidFill>
           </a:ln>
         </p:spPr>
@@ -5495,8 +5480,8 @@
         </p:nvSpPr>
         <p:spPr>
           <a:xfrm>
-            <a:off x="3108960" y="1600200"/>
-            <a:ext cx="1645920" cy="4480560"/>
+            <a:off x="2606040" y="1600200"/>
+            <a:ext cx="1417320" cy="4480560"/>
           </a:xfrm>
           <a:prstGeom prst="rect">
             <a:avLst/>
@@ -5509,11 +5494,8 @@
           </a:bodyPr>
           <a:lstStyle/>
           <a:p>
-            <a:pPr>
-              <a:spcAft>
-                <a:spcPts val="800"/>
-              </a:spcAft>
-              <a:defRPr sz="1700" b="1">
+            <a:pPr algn="ctr">
+              <a:defRPr sz="1300" b="1">
                 <a:solidFill>
                   <a:srgbClr val="F59E0B"/>
                 </a:solidFill>
@@ -5521,55 +5503,43 @@
               </a:defRPr>
             </a:pPr>
             <a:r>
-              <a:t>Phase 2: Finance</a:t>
-            </a:r>
-          </a:p>
-          <a:p>
-            <a:pPr>
-              <a:spcAft>
-                <a:spcPts val="400"/>
-              </a:spcAft>
-              <a:defRPr sz="1200">
-                <a:solidFill>
-                  <a:srgbClr val="1E293B"/>
-                </a:solidFill>
-                <a:latin typeface="Calibri"/>
-              </a:defRPr>
-            </a:pPr>
-            <a:r>
-              <a:t>• Course/Batch selection</a:t>
-            </a:r>
-          </a:p>
-          <a:p>
-            <a:pPr>
-              <a:spcAft>
-                <a:spcPts val="400"/>
-              </a:spcAft>
-              <a:defRPr sz="1200">
-                <a:solidFill>
-                  <a:srgbClr val="1E293B"/>
-                </a:solidFill>
-                <a:latin typeface="Calibri"/>
-              </a:defRPr>
-            </a:pPr>
-            <a:r>
-              <a:t>• Tuition fee tracking</a:t>
-            </a:r>
-          </a:p>
-          <a:p>
-            <a:pPr>
-              <a:spcAft>
-                <a:spcPts val="400"/>
-              </a:spcAft>
-              <a:defRPr sz="1200">
-                <a:solidFill>
-                  <a:srgbClr val="1E293B"/>
-                </a:solidFill>
-                <a:latin typeface="Calibri"/>
-              </a:defRPr>
-            </a:pPr>
-            <a:r>
-              <a:t>• Receipt &amp; verification</a:t>
+              <a:t>2. ADMISSION</a:t>
+            </a:r>
+          </a:p>
+          <a:p>
+            <a:br/>
+            <a:pPr algn="ctr">
+              <a:defRPr sz="1100" b="1">
+                <a:solidFill>
+                  <a:srgbClr val="0F172A"/>
+                </a:solidFill>
+                <a:latin typeface="Calibri"/>
+              </a:defRPr>
+            </a:pPr>
+            <a:r>
+              <a:t>[ Tables ]</a:t>
+            </a:r>
+            <a:br/>
+            <a:r>
+              <a:t>users</a:t>
+            </a:r>
+            <a:br/>
+            <a:r>
+              <a:t>registrations</a:t>
+            </a:r>
+          </a:p>
+          <a:p>
+            <a:br/>
+            <a:pPr algn="ctr">
+              <a:defRPr sz="1050">
+                <a:solidFill>
+                  <a:srgbClr val="1E293B"/>
+                </a:solidFill>
+                <a:latin typeface="Calibri"/>
+              </a:defRPr>
+            </a:pPr>
+            <a:r>
+              <a:t>Lead converts to User. Fee payment recorded.</a:t>
             </a:r>
           </a:p>
         </p:txBody>
@@ -5582,8 +5552,8 @@
         </p:nvSpPr>
         <p:spPr>
           <a:xfrm>
-            <a:off x="5120640" y="1463040"/>
-            <a:ext cx="2011680" cy="4754880"/>
+            <a:off x="4297680" y="1463040"/>
+            <a:ext cx="1600200" cy="4754880"/>
           </a:xfrm>
           <a:prstGeom prst="roundRect">
             <a:avLst/>
@@ -5591,9 +5561,9 @@
           <a:solidFill>
             <a:srgbClr val="FFFFFF"/>
           </a:solidFill>
-          <a:ln w="19050">
+          <a:ln w="25400">
             <a:solidFill>
-              <a:srgbClr val="E2E8F0"/>
+              <a:srgbClr val="10B981"/>
             </a:solidFill>
           </a:ln>
         </p:spPr>
@@ -5627,8 +5597,8 @@
         </p:nvSpPr>
         <p:spPr>
           <a:xfrm>
-            <a:off x="5303520" y="1600200"/>
-            <a:ext cx="1645920" cy="4480560"/>
+            <a:off x="4389120" y="1600200"/>
+            <a:ext cx="1417320" cy="4480560"/>
           </a:xfrm>
           <a:prstGeom prst="rect">
             <a:avLst/>
@@ -5641,11 +5611,8 @@
           </a:bodyPr>
           <a:lstStyle/>
           <a:p>
-            <a:pPr>
-              <a:spcAft>
-                <a:spcPts val="800"/>
-              </a:spcAft>
-              <a:defRPr sz="1700" b="1">
+            <a:pPr algn="ctr">
+              <a:defRPr sz="1300" b="1">
                 <a:solidFill>
                   <a:srgbClr val="10B981"/>
                 </a:solidFill>
@@ -5653,55 +5620,43 @@
               </a:defRPr>
             </a:pPr>
             <a:r>
-              <a:t>Phase 3: Operations</a:t>
-            </a:r>
-          </a:p>
-          <a:p>
-            <a:pPr>
-              <a:spcAft>
-                <a:spcPts val="400"/>
-              </a:spcAft>
-              <a:defRPr sz="1200">
-                <a:solidFill>
-                  <a:srgbClr val="1E293B"/>
-                </a:solidFill>
-                <a:latin typeface="Calibri"/>
-              </a:defRPr>
-            </a:pPr>
-            <a:r>
-              <a:t>• Daily QR attendance</a:t>
-            </a:r>
-          </a:p>
-          <a:p>
-            <a:pPr>
-              <a:spcAft>
-                <a:spcPts val="400"/>
-              </a:spcAft>
-              <a:defRPr sz="1200">
-                <a:solidFill>
-                  <a:srgbClr val="1E293B"/>
-                </a:solidFill>
-                <a:latin typeface="Calibri"/>
-              </a:defRPr>
-            </a:pPr>
-            <a:r>
-              <a:t>• Portal time logs</a:t>
-            </a:r>
-          </a:p>
-          <a:p>
-            <a:pPr>
-              <a:spcAft>
-                <a:spcPts val="400"/>
-              </a:spcAft>
-              <a:defRPr sz="1200">
-                <a:solidFill>
-                  <a:srgbClr val="1E293B"/>
-                </a:solidFill>
-                <a:latin typeface="Calibri"/>
-              </a:defRPr>
-            </a:pPr>
-            <a:r>
-              <a:t>• Leave quota audit</a:t>
+              <a:t>3. COHORT</a:t>
+            </a:r>
+          </a:p>
+          <a:p>
+            <a:br/>
+            <a:pPr algn="ctr">
+              <a:defRPr sz="1100" b="1">
+                <a:solidFill>
+                  <a:srgbClr val="0F172A"/>
+                </a:solidFill>
+                <a:latin typeface="Calibri"/>
+              </a:defRPr>
+            </a:pPr>
+            <a:r>
+              <a:t>[ Tables ]</a:t>
+            </a:r>
+            <a:br/>
+            <a:r>
+              <a:t>courses, batches</a:t>
+            </a:r>
+            <a:br/>
+            <a:r>
+              <a:t>batch_students</a:t>
+            </a:r>
+          </a:p>
+          <a:p>
+            <a:br/>
+            <a:pPr algn="ctr">
+              <a:defRPr sz="1050">
+                <a:solidFill>
+                  <a:srgbClr val="1E293B"/>
+                </a:solidFill>
+                <a:latin typeface="Calibri"/>
+              </a:defRPr>
+            </a:pPr>
+            <a:r>
+              <a:t>Student assigned to course batch cohort.</a:t>
             </a:r>
           </a:p>
         </p:txBody>
@@ -5714,8 +5669,8 @@
         </p:nvSpPr>
         <p:spPr>
           <a:xfrm>
-            <a:off x="7315200" y="1463040"/>
-            <a:ext cx="2011680" cy="4754880"/>
+            <a:off x="6080759" y="1463040"/>
+            <a:ext cx="1600200" cy="4754880"/>
           </a:xfrm>
           <a:prstGeom prst="roundRect">
             <a:avLst/>
@@ -5723,9 +5678,9 @@
           <a:solidFill>
             <a:srgbClr val="FFFFFF"/>
           </a:solidFill>
-          <a:ln w="19050">
+          <a:ln w="25400">
             <a:solidFill>
-              <a:srgbClr val="E2E8F0"/>
+              <a:srgbClr val="0066FF"/>
             </a:solidFill>
           </a:ln>
         </p:spPr>
@@ -5759,8 +5714,8 @@
         </p:nvSpPr>
         <p:spPr>
           <a:xfrm>
-            <a:off x="7498080" y="1600200"/>
-            <a:ext cx="1645920" cy="4480560"/>
+            <a:off x="6172199" y="1600200"/>
+            <a:ext cx="1417320" cy="4480560"/>
           </a:xfrm>
           <a:prstGeom prst="rect">
             <a:avLst/>
@@ -5773,11 +5728,8 @@
           </a:bodyPr>
           <a:lstStyle/>
           <a:p>
-            <a:pPr>
-              <a:spcAft>
-                <a:spcPts val="800"/>
-              </a:spcAft>
-              <a:defRPr sz="1700" b="1">
+            <a:pPr algn="ctr">
+              <a:defRPr sz="1300" b="1">
                 <a:solidFill>
                   <a:srgbClr val="0066FF"/>
                 </a:solidFill>
@@ -5785,55 +5737,43 @@
               </a:defRPr>
             </a:pPr>
             <a:r>
-              <a:t>Phase 4: Learning</a:t>
-            </a:r>
-          </a:p>
-          <a:p>
-            <a:pPr>
-              <a:spcAft>
-                <a:spcPts val="400"/>
-              </a:spcAft>
-              <a:defRPr sz="1200">
-                <a:solidFill>
-                  <a:srgbClr val="1E293B"/>
-                </a:solidFill>
-                <a:latin typeface="Calibri"/>
-              </a:defRPr>
-            </a:pPr>
-            <a:r>
-              <a:t>• Project/Task ticketing</a:t>
-            </a:r>
-          </a:p>
-          <a:p>
-            <a:pPr>
-              <a:spcAft>
-                <a:spcPts val="400"/>
-              </a:spcAft>
-              <a:defRPr sz="1200">
-                <a:solidFill>
-                  <a:srgbClr val="1E293B"/>
-                </a:solidFill>
-                <a:latin typeface="Calibri"/>
-              </a:defRPr>
-            </a:pPr>
-            <a:r>
-              <a:t>• Video lecture views</a:t>
-            </a:r>
-          </a:p>
-          <a:p>
-            <a:pPr>
-              <a:spcAft>
-                <a:spcPts val="400"/>
-              </a:spcAft>
-              <a:defRPr sz="1200">
-                <a:solidFill>
-                  <a:srgbClr val="1E293B"/>
-                </a:solidFill>
-                <a:latin typeface="Calibri"/>
-              </a:defRPr>
-            </a:pPr>
-            <a:r>
-              <a:t>• Tests &amp; feedback</a:t>
+              <a:t>4. DAILY OPS</a:t>
+            </a:r>
+          </a:p>
+          <a:p>
+            <a:br/>
+            <a:pPr algn="ctr">
+              <a:defRPr sz="1100" b="1">
+                <a:solidFill>
+                  <a:srgbClr val="0F172A"/>
+                </a:solidFill>
+                <a:latin typeface="Calibri"/>
+              </a:defRPr>
+            </a:pPr>
+            <a:r>
+              <a:t>[ Tables ]</a:t>
+            </a:r>
+            <a:br/>
+            <a:r>
+              <a:t>attendance</a:t>
+            </a:r>
+            <a:br/>
+            <a:r>
+              <a:t>time_tracking</a:t>
+            </a:r>
+          </a:p>
+          <a:p>
+            <a:br/>
+            <a:pPr algn="ctr">
+              <a:defRPr sz="1050">
+                <a:solidFill>
+                  <a:srgbClr val="1E293B"/>
+                </a:solidFill>
+                <a:latin typeface="Calibri"/>
+              </a:defRPr>
+            </a:pPr>
+            <a:r>
+              <a:t>Daily QR login hours &amp; portal time logged.</a:t>
             </a:r>
           </a:p>
         </p:txBody>
@@ -5846,8 +5786,8 @@
         </p:nvSpPr>
         <p:spPr>
           <a:xfrm>
-            <a:off x="9509760" y="1463040"/>
-            <a:ext cx="2011680" cy="4754880"/>
+            <a:off x="7863840" y="1463040"/>
+            <a:ext cx="1600200" cy="4754880"/>
           </a:xfrm>
           <a:prstGeom prst="roundRect">
             <a:avLst/>
@@ -5855,9 +5795,9 @@
           <a:solidFill>
             <a:srgbClr val="FFFFFF"/>
           </a:solidFill>
-          <a:ln w="19050">
+          <a:ln w="25400">
             <a:solidFill>
-              <a:srgbClr val="E2E8F0"/>
+              <a:srgbClr val="9333EA"/>
             </a:solidFill>
           </a:ln>
         </p:spPr>
@@ -5891,8 +5831,8 @@
         </p:nvSpPr>
         <p:spPr>
           <a:xfrm>
-            <a:off x="9692640" y="1600200"/>
-            <a:ext cx="1645920" cy="4480560"/>
+            <a:off x="7955279" y="1600200"/>
+            <a:ext cx="1417320" cy="4480560"/>
           </a:xfrm>
           <a:prstGeom prst="rect">
             <a:avLst/>
@@ -5905,11 +5845,125 @@
           </a:bodyPr>
           <a:lstStyle/>
           <a:p>
-            <a:pPr>
-              <a:spcAft>
-                <a:spcPts val="800"/>
-              </a:spcAft>
-              <a:defRPr sz="1700" b="1">
+            <a:pPr algn="ctr">
+              <a:defRPr sz="1300" b="1">
+                <a:solidFill>
+                  <a:srgbClr val="9333EA"/>
+                </a:solidFill>
+                <a:latin typeface="Calibri"/>
+              </a:defRPr>
+            </a:pPr>
+            <a:r>
+              <a:t>5. LEARNING</a:t>
+            </a:r>
+          </a:p>
+          <a:p>
+            <a:br/>
+            <a:pPr algn="ctr">
+              <a:defRPr sz="1100" b="1">
+                <a:solidFill>
+                  <a:srgbClr val="0F172A"/>
+                </a:solidFill>
+                <a:latin typeface="Calibri"/>
+              </a:defRPr>
+            </a:pPr>
+            <a:r>
+              <a:t>[ Tables ]</a:t>
+            </a:r>
+            <a:br/>
+            <a:r>
+              <a:t>projects, tasks</a:t>
+            </a:r>
+            <a:br/>
+            <a:r>
+              <a:t>assessments</a:t>
+            </a:r>
+          </a:p>
+          <a:p>
+            <a:br/>
+            <a:pPr algn="ctr">
+              <a:defRPr sz="1050">
+                <a:solidFill>
+                  <a:srgbClr val="1E293B"/>
+                </a:solidFill>
+                <a:latin typeface="Calibri"/>
+              </a:defRPr>
+            </a:pPr>
+            <a:r>
+              <a:t>Tasks submitted, exams scored, feedback recorded.</a:t>
+            </a:r>
+          </a:p>
+        </p:txBody>
+      </p:sp>
+      <p:sp>
+        <p:nvSpPr>
+          <p:cNvPr id="14" name="Rounded Rectangle 13"/>
+          <p:cNvSpPr/>
+          <p:nvPr/>
+        </p:nvSpPr>
+        <p:spPr>
+          <a:xfrm>
+            <a:off x="9646920" y="1463040"/>
+            <a:ext cx="1600200" cy="4754880"/>
+          </a:xfrm>
+          <a:prstGeom prst="roundRect">
+            <a:avLst/>
+          </a:prstGeom>
+          <a:solidFill>
+            <a:srgbClr val="FFFFFF"/>
+          </a:solidFill>
+          <a:ln w="25400">
+            <a:solidFill>
+              <a:srgbClr val="F59E0B"/>
+            </a:solidFill>
+          </a:ln>
+        </p:spPr>
+        <p:style>
+          <a:lnRef idx="1">
+            <a:schemeClr val="accent1"/>
+          </a:lnRef>
+          <a:fillRef idx="3">
+            <a:schemeClr val="accent1"/>
+          </a:fillRef>
+          <a:effectRef idx="2">
+            <a:schemeClr val="accent1"/>
+          </a:effectRef>
+          <a:fontRef idx="minor">
+            <a:schemeClr val="lt1"/>
+          </a:fontRef>
+        </p:style>
+        <p:txBody>
+          <a:bodyPr rtlCol="0" anchor="ctr"/>
+          <a:lstStyle/>
+          <a:p>
+            <a:pPr algn="ctr"/>
+          </a:p>
+        </p:txBody>
+      </p:sp>
+      <p:sp>
+        <p:nvSpPr>
+          <p:cNvPr id="15" name="TextBox 14"/>
+          <p:cNvSpPr txBox="1"/>
+          <p:nvPr/>
+        </p:nvSpPr>
+        <p:spPr>
+          <a:xfrm>
+            <a:off x="9738360" y="1600200"/>
+            <a:ext cx="1417320" cy="4480560"/>
+          </a:xfrm>
+          <a:prstGeom prst="rect">
+            <a:avLst/>
+          </a:prstGeom>
+          <a:noFill/>
+        </p:spPr>
+        <p:txBody>
+          <a:bodyPr wrap="square">
+            <a:spAutoFit/>
+          </a:bodyPr>
+          <a:lstStyle/>
+          <a:p>
+            <a:pPr algn="ctr">
+              <a:defRPr sz="1300" b="1">
                 <a:solidFill>
                   <a:srgbClr val="F59E0B"/>
                 </a:solidFill>
@@ -5917,55 +5971,43 @@
               </a:defRPr>
             </a:pPr>
             <a:r>
-              <a:t>Phase 5: Placement</a:t>
-            </a:r>
-          </a:p>
-          <a:p>
-            <a:pPr>
-              <a:spcAft>
-                <a:spcPts val="400"/>
-              </a:spcAft>
-              <a:defRPr sz="1200">
-                <a:solidFill>
-                  <a:srgbClr val="1E293B"/>
-                </a:solidFill>
-                <a:latin typeface="Calibri"/>
-              </a:defRPr>
-            </a:pPr>
-            <a:r>
-              <a:t>• Mock interview scores</a:t>
-            </a:r>
-          </a:p>
-          <a:p>
-            <a:pPr>
-              <a:spcAft>
-                <a:spcPts val="400"/>
-              </a:spcAft>
-              <a:defRPr sz="1200">
-                <a:solidFill>
-                  <a:srgbClr val="1E293B"/>
-                </a:solidFill>
-                <a:latin typeface="Calibri"/>
-              </a:defRPr>
-            </a:pPr>
-            <a:r>
-              <a:t>• Verbal drills</a:t>
-            </a:r>
-          </a:p>
-          <a:p>
-            <a:pPr>
-              <a:spcAft>
-                <a:spcPts val="400"/>
-              </a:spcAft>
-              <a:defRPr sz="1200">
-                <a:solidFill>
-                  <a:srgbClr val="1E293B"/>
-                </a:solidFill>
-                <a:latin typeface="Calibri"/>
-              </a:defRPr>
-            </a:pPr>
-            <a:r>
-              <a:t>• Job application funnel</a:t>
+              <a:t>6. CAREER</a:t>
+            </a:r>
+          </a:p>
+          <a:p>
+            <a:br/>
+            <a:pPr algn="ctr">
+              <a:defRPr sz="1100" b="1">
+                <a:solidFill>
+                  <a:srgbClr val="0F172A"/>
+                </a:solidFill>
+                <a:latin typeface="Calibri"/>
+              </a:defRPr>
+            </a:pPr>
+            <a:r>
+              <a:t>[ Tables ]</a:t>
+            </a:r>
+            <a:br/>
+            <a:r>
+              <a:t>mock_interviews</a:t>
+            </a:r>
+            <a:br/>
+            <a:r>
+              <a:t>job_applications</a:t>
+            </a:r>
+          </a:p>
+          <a:p>
+            <a:br/>
+            <a:pPr algn="ctr">
+              <a:defRPr sz="1050">
+                <a:solidFill>
+                  <a:srgbClr val="1E293B"/>
+                </a:solidFill>
+                <a:latin typeface="Calibri"/>
+              </a:defRPr>
+            </a:pPr>
+            <a:r>
+              <a:t>Mock scores logged &amp; job selection tracked.</a:t>
             </a:r>
           </a:p>
         </p:txBody>
@@ -6064,7 +6106,7 @@
               </a:defRPr>
             </a:pPr>
             <a:r>
-              <a:t>3. System Roles &amp; Access Matrix</a:t>
+              <a:t>3. Table-to-Table Data Transition Pipeline</a:t>
             </a:r>
           </a:p>
           <a:p>
@@ -6077,7 +6119,7 @@
               </a:defRPr>
             </a:pPr>
             <a:r>
-              <a:t>Role-Based Access Control (RBAC) &amp; Data Access Boundaries</a:t>
+              <a:t>Data Inputs &amp; Outputs Passing Between Interconnected Database Tables</a:t>
             </a:r>
           </a:p>
         </p:txBody>
@@ -6090,8 +6132,8 @@
         </p:nvSpPr>
         <p:spPr>
           <a:xfrm>
-            <a:off x="731520" y="1463040"/>
-            <a:ext cx="10728655" cy="1051560"/>
+            <a:off x="731520" y="1371600"/>
+            <a:ext cx="10728655" cy="868680"/>
           </a:xfrm>
           <a:prstGeom prst="roundRect">
             <a:avLst/>
@@ -6135,8 +6177,8 @@
         </p:nvSpPr>
         <p:spPr>
           <a:xfrm>
-            <a:off x="914400" y="1600200"/>
-            <a:ext cx="10332720" cy="777240"/>
+            <a:off x="914400" y="1444752"/>
+            <a:ext cx="10332720" cy="731520"/>
           </a:xfrm>
           <a:prstGeom prst="rect">
             <a:avLst/>
@@ -6150,7 +6192,7 @@
           <a:lstStyle/>
           <a:p>
             <a:pPr>
-              <a:defRPr sz="1700" b="1">
+              <a:defRPr sz="1400" b="1">
                 <a:solidFill>
                   <a:srgbClr val="0066FF"/>
                 </a:solidFill>
@@ -6158,20 +6200,20 @@
               </a:defRPr>
             </a:pPr>
             <a:r>
-              <a:t>SUPER_ADMIN / ADMIN</a:t>
-            </a:r>
-          </a:p>
-          <a:p>
-            <a:pPr>
-              <a:defRPr sz="1300">
-                <a:solidFill>
-                  <a:srgbClr val="1E293B"/>
-                </a:solidFill>
-                <a:latin typeface="Calibri"/>
-              </a:defRPr>
-            </a:pPr>
-            <a:r>
-              <a:t>Full system governance, course/batch creation, fee setup, leave approvals, user permissions</a:t>
+              <a:t>Input Stage 1: Lead Capture   |   leads (leadId) ➔ lead_activities (activityId)</a:t>
+            </a:r>
+          </a:p>
+          <a:p>
+            <a:pPr>
+              <a:defRPr sz="1150">
+                <a:solidFill>
+                  <a:srgbClr val="1E293B"/>
+                </a:solidFill>
+                <a:latin typeface="Calibri"/>
+              </a:defRPr>
+            </a:pPr>
+            <a:r>
+              <a:t>Marketers capture lead details. Every call/email adds a row in lead_activities referencing leadId.</a:t>
             </a:r>
           </a:p>
         </p:txBody>
@@ -6184,8 +6226,8 @@
         </p:nvSpPr>
         <p:spPr>
           <a:xfrm>
-            <a:off x="731520" y="2697480"/>
-            <a:ext cx="10728655" cy="1051560"/>
+            <a:off x="731520" y="2377440"/>
+            <a:ext cx="10728655" cy="868680"/>
           </a:xfrm>
           <a:prstGeom prst="roundRect">
             <a:avLst/>
@@ -6229,8 +6271,8 @@
         </p:nvSpPr>
         <p:spPr>
           <a:xfrm>
-            <a:off x="914400" y="2834640"/>
-            <a:ext cx="10332720" cy="777240"/>
+            <a:off x="914400" y="2450592"/>
+            <a:ext cx="10332720" cy="731520"/>
           </a:xfrm>
           <a:prstGeom prst="rect">
             <a:avLst/>
@@ -6244,28 +6286,28 @@
           <a:lstStyle/>
           <a:p>
             <a:pPr>
-              <a:defRPr sz="1700" b="1">
-                <a:solidFill>
-                  <a:srgbClr val="10B981"/>
-                </a:solidFill>
-                <a:latin typeface="Calibri"/>
-              </a:defRPr>
-            </a:pPr>
-            <a:r>
-              <a:t>TRAINER</a:t>
-            </a:r>
-          </a:p>
-          <a:p>
-            <a:pPr>
-              <a:defRPr sz="1300">
-                <a:solidFill>
-                  <a:srgbClr val="1E293B"/>
-                </a:solidFill>
-                <a:latin typeface="Calibri"/>
-              </a:defRPr>
-            </a:pPr>
-            <a:r>
-              <a:t>Batch management, project/task assignment, attendance tracking, assessment grading</a:t>
+              <a:defRPr sz="1400" b="1">
+                <a:solidFill>
+                  <a:srgbClr val="F59E0B"/>
+                </a:solidFill>
+                <a:latin typeface="Calibri"/>
+              </a:defRPr>
+            </a:pPr>
+            <a:r>
+              <a:t>Transition Stage 2: Enrollment   |   leads ➔ users (userId) ➔ registrations</a:t>
+            </a:r>
+          </a:p>
+          <a:p>
+            <a:pPr>
+              <a:defRPr sz="1150">
+                <a:solidFill>
+                  <a:srgbClr val="1E293B"/>
+                </a:solidFill>
+                <a:latin typeface="Calibri"/>
+              </a:defRPr>
+            </a:pPr>
+            <a:r>
+              <a:t>When lead status changes to CONVERTED, a new record is created in users. Fees logged in registrations.</a:t>
             </a:r>
           </a:p>
         </p:txBody>
@@ -6278,8 +6320,8 @@
         </p:nvSpPr>
         <p:spPr>
           <a:xfrm>
-            <a:off x="731520" y="3931920"/>
-            <a:ext cx="10728655" cy="1051560"/>
+            <a:off x="731520" y="3383280"/>
+            <a:ext cx="10728655" cy="868680"/>
           </a:xfrm>
           <a:prstGeom prst="roundRect">
             <a:avLst/>
@@ -6323,8 +6365,8 @@
         </p:nvSpPr>
         <p:spPr>
           <a:xfrm>
-            <a:off x="914400" y="4069080"/>
-            <a:ext cx="10332720" cy="777240"/>
+            <a:off x="914400" y="3456432"/>
+            <a:ext cx="10332720" cy="731520"/>
           </a:xfrm>
           <a:prstGeom prst="rect">
             <a:avLst/>
@@ -6338,28 +6380,28 @@
           <a:lstStyle/>
           <a:p>
             <a:pPr>
-              <a:defRPr sz="1700" b="1">
-                <a:solidFill>
-                  <a:srgbClr val="F59E0B"/>
-                </a:solidFill>
-                <a:latin typeface="Calibri"/>
-              </a:defRPr>
-            </a:pPr>
-            <a:r>
-              <a:t>MARKETER</a:t>
-            </a:r>
-          </a:p>
-          <a:p>
-            <a:pPr>
-              <a:defRPr sz="1300">
-                <a:solidFill>
-                  <a:srgbClr val="1E293B"/>
-                </a:solidFill>
-                <a:latin typeface="Calibri"/>
-              </a:defRPr>
-            </a:pPr>
-            <a:r>
-              <a:t>Lead generation, prospect follow-ups (Calls/Emails/WhatsApp), registration conversion</a:t>
+              <a:defRPr sz="1400" b="1">
+                <a:solidFill>
+                  <a:srgbClr val="10B981"/>
+                </a:solidFill>
+                <a:latin typeface="Calibri"/>
+              </a:defRPr>
+            </a:pPr>
+            <a:r>
+              <a:t>Execution Stage 3: Training   |   users ➔ batch_students ➔ attendance &amp; tasks</a:t>
+            </a:r>
+          </a:p>
+          <a:p>
+            <a:pPr>
+              <a:defRPr sz="1150">
+                <a:solidFill>
+                  <a:srgbClr val="1E293B"/>
+                </a:solidFill>
+                <a:latin typeface="Calibri"/>
+              </a:defRPr>
+            </a:pPr>
+            <a:r>
+              <a:t>Student userId is mapped to batchId. Daily attendance logs &amp; task progress link to userId &amp; batchId.</a:t>
             </a:r>
           </a:p>
         </p:txBody>
@@ -6372,8 +6414,8 @@
         </p:nvSpPr>
         <p:spPr>
           <a:xfrm>
-            <a:off x="731520" y="5166360"/>
-            <a:ext cx="10728655" cy="1051560"/>
+            <a:off x="731520" y="4389120"/>
+            <a:ext cx="10728655" cy="868680"/>
           </a:xfrm>
           <a:prstGeom prst="roundRect">
             <a:avLst/>
@@ -6417,8 +6459,8 @@
         </p:nvSpPr>
         <p:spPr>
           <a:xfrm>
-            <a:off x="914400" y="5303520"/>
-            <a:ext cx="10332720" cy="777240"/>
+            <a:off x="914400" y="4462272"/>
+            <a:ext cx="10332720" cy="731520"/>
           </a:xfrm>
           <a:prstGeom prst="rect">
             <a:avLst/>
@@ -6432,28 +6474,122 @@
           <a:lstStyle/>
           <a:p>
             <a:pPr>
-              <a:defRPr sz="1700" b="1">
-                <a:solidFill>
-                  <a:srgbClr val="0066FF"/>
-                </a:solidFill>
-                <a:latin typeface="Calibri"/>
-              </a:defRPr>
-            </a:pPr>
-            <a:r>
-              <a:t>STUDENT</a:t>
-            </a:r>
-          </a:p>
-          <a:p>
-            <a:pPr>
-              <a:defRPr sz="1300">
-                <a:solidFill>
-                  <a:srgbClr val="1E293B"/>
-                </a:solidFill>
-                <a:latin typeface="Calibri"/>
-              </a:defRPr>
-            </a:pPr>
-            <a:r>
-              <a:t>Class attendance, portal time logging, assignment submissions, tests, job applications</a:t>
+              <a:defRPr sz="1400" b="1">
+                <a:solidFill>
+                  <a:srgbClr val="9333EA"/>
+                </a:solidFill>
+                <a:latin typeface="Calibri"/>
+              </a:defRPr>
+            </a:pPr>
+            <a:r>
+              <a:t>Evaluation Stage 4: Assessments   |   users ➔ assessment_submissions &amp; feedback</a:t>
+            </a:r>
+          </a:p>
+          <a:p>
+            <a:pPr>
+              <a:defRPr sz="1150">
+                <a:solidFill>
+                  <a:srgbClr val="1E293B"/>
+                </a:solidFill>
+                <a:latin typeface="Calibri"/>
+              </a:defRPr>
+            </a:pPr>
+            <a:r>
+              <a:t>Exams taken create records in assessment_submissions. Weekly ratings recorded in feedback table.</a:t>
+            </a:r>
+          </a:p>
+        </p:txBody>
+      </p:sp>
+      <p:sp>
+        <p:nvSpPr>
+          <p:cNvPr id="12" name="Rounded Rectangle 11"/>
+          <p:cNvSpPr/>
+          <p:nvPr/>
+        </p:nvSpPr>
+        <p:spPr>
+          <a:xfrm>
+            <a:off x="731520" y="5394960"/>
+            <a:ext cx="10728655" cy="868680"/>
+          </a:xfrm>
+          <a:prstGeom prst="roundRect">
+            <a:avLst/>
+          </a:prstGeom>
+          <a:solidFill>
+            <a:srgbClr val="FFFFFF"/>
+          </a:solidFill>
+          <a:ln w="19050">
+            <a:solidFill>
+              <a:srgbClr val="E2E8F0"/>
+            </a:solidFill>
+          </a:ln>
+        </p:spPr>
+        <p:style>
+          <a:lnRef idx="1">
+            <a:schemeClr val="accent1"/>
+          </a:lnRef>
+          <a:fillRef idx="3">
+            <a:schemeClr val="accent1"/>
+          </a:fillRef>
+          <a:effectRef idx="2">
+            <a:schemeClr val="accent1"/>
+          </a:effectRef>
+          <a:fontRef idx="minor">
+            <a:schemeClr val="lt1"/>
+          </a:fontRef>
+        </p:style>
+        <p:txBody>
+          <a:bodyPr rtlCol="0" anchor="ctr"/>
+          <a:lstStyle/>
+          <a:p>
+            <a:pPr algn="ctr"/>
+          </a:p>
+        </p:txBody>
+      </p:sp>
+      <p:sp>
+        <p:nvSpPr>
+          <p:cNvPr id="13" name="TextBox 12"/>
+          <p:cNvSpPr txBox="1"/>
+          <p:nvPr/>
+        </p:nvSpPr>
+        <p:spPr>
+          <a:xfrm>
+            <a:off x="914400" y="5468112"/>
+            <a:ext cx="10332720" cy="731520"/>
+          </a:xfrm>
+          <a:prstGeom prst="rect">
+            <a:avLst/>
+          </a:prstGeom>
+          <a:noFill/>
+        </p:spPr>
+        <p:txBody>
+          <a:bodyPr wrap="none">
+            <a:spAutoFit/>
+          </a:bodyPr>
+          <a:lstStyle/>
+          <a:p>
+            <a:pPr>
+              <a:defRPr sz="1400" b="1">
+                <a:solidFill>
+                  <a:srgbClr val="F59E0B"/>
+                </a:solidFill>
+                <a:latin typeface="Calibri"/>
+              </a:defRPr>
+            </a:pPr>
+            <a:r>
+              <a:t>Outcome Stage 5: Job Hiring   |   users ➔ mock_interviews ➔ job_applications</a:t>
+            </a:r>
+          </a:p>
+          <a:p>
+            <a:pPr>
+              <a:defRPr sz="1150">
+                <a:solidFill>
+                  <a:srgbClr val="1E293B"/>
+                </a:solidFill>
+                <a:latin typeface="Calibri"/>
+              </a:defRPr>
+            </a:pPr>
+            <a:r>
+              <a:t>Mock interviews prepare students. Job applications track status from APPLIED to SELECTED.</a:t>
             </a:r>
           </a:p>
         </p:txBody>
@@ -6641,7 +6777,7 @@
               <a:spcAft>
                 <a:spcPts val="800"/>
               </a:spcAft>
-              <a:defRPr sz="1700" b="1">
+              <a:defRPr sz="1600" b="1">
                 <a:solidFill>
                   <a:srgbClr val="0066FF"/>
                 </a:solidFill>
@@ -6661,7 +6797,7 @@
               <a:spcAft>
                 <a:spcPts val="400"/>
               </a:spcAft>
-              <a:defRPr sz="1200">
+              <a:defRPr sz="1150">
                 <a:solidFill>
                   <a:srgbClr val="1E293B"/>
                 </a:solidFill>
@@ -6677,7 +6813,7 @@
               <a:spcAft>
                 <a:spcPts val="400"/>
               </a:spcAft>
-              <a:defRPr sz="1200">
+              <a:defRPr sz="1150">
                 <a:solidFill>
                   <a:srgbClr val="1E293B"/>
                 </a:solidFill>
@@ -6693,7 +6829,7 @@
               <a:spcAft>
                 <a:spcPts val="400"/>
               </a:spcAft>
-              <a:defRPr sz="1200">
+              <a:defRPr sz="1150">
                 <a:solidFill>
                   <a:srgbClr val="1E293B"/>
                 </a:solidFill>
@@ -6709,7 +6845,7 @@
               <a:spcAft>
                 <a:spcPts val="400"/>
               </a:spcAft>
-              <a:defRPr sz="1200">
+              <a:defRPr sz="1150">
                 <a:solidFill>
                   <a:srgbClr val="1E293B"/>
                 </a:solidFill>
@@ -6725,7 +6861,7 @@
               <a:spcAft>
                 <a:spcPts val="400"/>
               </a:spcAft>
-              <a:defRPr sz="1200">
+              <a:defRPr sz="1150">
                 <a:solidFill>
                   <a:srgbClr val="1E293B"/>
                 </a:solidFill>
@@ -6741,7 +6877,7 @@
               <a:spcAft>
                 <a:spcPts val="400"/>
               </a:spcAft>
-              <a:defRPr sz="1200">
+              <a:defRPr sz="1150">
                 <a:solidFill>
                   <a:srgbClr val="1E293B"/>
                 </a:solidFill>
@@ -6757,7 +6893,7 @@
               <a:spcAft>
                 <a:spcPts val="400"/>
               </a:spcAft>
-              <a:defRPr sz="1200">
+              <a:defRPr sz="1150">
                 <a:solidFill>
                   <a:srgbClr val="1E293B"/>
                 </a:solidFill>
@@ -6773,7 +6909,7 @@
               <a:spcAft>
                 <a:spcPts val="400"/>
               </a:spcAft>
-              <a:defRPr sz="1200">
+              <a:defRPr sz="1150">
                 <a:solidFill>
                   <a:srgbClr val="1E293B"/>
                 </a:solidFill>
@@ -6789,7 +6925,7 @@
               <a:spcAft>
                 <a:spcPts val="400"/>
               </a:spcAft>
-              <a:defRPr sz="1200">
+              <a:defRPr sz="1150">
                 <a:solidFill>
                   <a:srgbClr val="1E293B"/>
                 </a:solidFill>
@@ -6805,7 +6941,7 @@
               <a:spcAft>
                 <a:spcPts val="400"/>
               </a:spcAft>
-              <a:defRPr sz="1200">
+              <a:defRPr sz="1150">
                 <a:solidFill>
                   <a:srgbClr val="1E293B"/>
                 </a:solidFill>
@@ -6821,7 +6957,7 @@
               <a:spcAft>
                 <a:spcPts val="400"/>
               </a:spcAft>
-              <a:defRPr sz="1200">
+              <a:defRPr sz="1150">
                 <a:solidFill>
                   <a:srgbClr val="1E293B"/>
                 </a:solidFill>
@@ -6837,7 +6973,7 @@
               <a:spcAft>
                 <a:spcPts val="400"/>
               </a:spcAft>
-              <a:defRPr sz="1200">
+              <a:defRPr sz="1150">
                 <a:solidFill>
                   <a:srgbClr val="1E293B"/>
                 </a:solidFill>
@@ -6853,7 +6989,7 @@
               <a:spcAft>
                 <a:spcPts val="400"/>
               </a:spcAft>
-              <a:defRPr sz="1200">
+              <a:defRPr sz="1150">
                 <a:solidFill>
                   <a:srgbClr val="1E293B"/>
                 </a:solidFill>
@@ -6869,7 +7005,7 @@
               <a:spcAft>
                 <a:spcPts val="400"/>
               </a:spcAft>
-              <a:defRPr sz="1200">
+              <a:defRPr sz="1150">
                 <a:solidFill>
                   <a:srgbClr val="1E293B"/>
                 </a:solidFill>
@@ -6885,7 +7021,7 @@
               <a:spcAft>
                 <a:spcPts val="400"/>
               </a:spcAft>
-              <a:defRPr sz="1200">
+              <a:defRPr sz="1150">
                 <a:solidFill>
                   <a:srgbClr val="1E293B"/>
                 </a:solidFill>
@@ -6969,7 +7105,7 @@
               <a:spcAft>
                 <a:spcPts val="800"/>
               </a:spcAft>
-              <a:defRPr sz="1700" b="1">
+              <a:defRPr sz="1600" b="1">
                 <a:solidFill>
                   <a:srgbClr val="10B981"/>
                 </a:solidFill>
@@ -6989,7 +7125,7 @@
               <a:spcAft>
                 <a:spcPts val="400"/>
               </a:spcAft>
-              <a:defRPr sz="1200">
+              <a:defRPr sz="1150">
                 <a:solidFill>
                   <a:srgbClr val="1E293B"/>
                 </a:solidFill>
@@ -7005,7 +7141,7 @@
               <a:spcAft>
                 <a:spcPts val="400"/>
               </a:spcAft>
-              <a:defRPr sz="1200">
+              <a:defRPr sz="1150">
                 <a:solidFill>
                   <a:srgbClr val="1E293B"/>
                 </a:solidFill>
@@ -7021,7 +7157,7 @@
               <a:spcAft>
                 <a:spcPts val="400"/>
               </a:spcAft>
-              <a:defRPr sz="1200">
+              <a:defRPr sz="1150">
                 <a:solidFill>
                   <a:srgbClr val="1E293B"/>
                 </a:solidFill>
@@ -7037,7 +7173,7 @@
               <a:spcAft>
                 <a:spcPts val="400"/>
               </a:spcAft>
-              <a:defRPr sz="1200">
+              <a:defRPr sz="1150">
                 <a:solidFill>
                   <a:srgbClr val="1E293B"/>
                 </a:solidFill>
@@ -7053,7 +7189,7 @@
               <a:spcAft>
                 <a:spcPts val="400"/>
               </a:spcAft>
-              <a:defRPr sz="1200">
+              <a:defRPr sz="1150">
                 <a:solidFill>
                   <a:srgbClr val="1E293B"/>
                 </a:solidFill>
@@ -7069,7 +7205,7 @@
               <a:spcAft>
                 <a:spcPts val="400"/>
               </a:spcAft>
-              <a:defRPr sz="1200">
+              <a:defRPr sz="1150">
                 <a:solidFill>
                   <a:srgbClr val="1E293B"/>
                 </a:solidFill>
@@ -7085,7 +7221,7 @@
               <a:spcAft>
                 <a:spcPts val="400"/>
               </a:spcAft>
-              <a:defRPr sz="1200">
+              <a:defRPr sz="1150">
                 <a:solidFill>
                   <a:srgbClr val="1E293B"/>
                 </a:solidFill>
@@ -7101,7 +7237,7 @@
               <a:spcAft>
                 <a:spcPts val="400"/>
               </a:spcAft>
-              <a:defRPr sz="1200">
+              <a:defRPr sz="1150">
                 <a:solidFill>
                   <a:srgbClr val="1E293B"/>
                 </a:solidFill>
@@ -7117,7 +7253,7 @@
               <a:spcAft>
                 <a:spcPts val="400"/>
               </a:spcAft>
-              <a:defRPr sz="1200">
+              <a:defRPr sz="1150">
                 <a:solidFill>
                   <a:srgbClr val="1E293B"/>
                 </a:solidFill>
@@ -7201,7 +7337,7 @@
               <a:spcAft>
                 <a:spcPts val="800"/>
               </a:spcAft>
-              <a:defRPr sz="1700" b="1">
+              <a:defRPr sz="1600" b="1">
                 <a:solidFill>
                   <a:srgbClr val="F59E0B"/>
                 </a:solidFill>
@@ -7221,7 +7357,7 @@
               <a:spcAft>
                 <a:spcPts val="400"/>
               </a:spcAft>
-              <a:defRPr sz="1200">
+              <a:defRPr sz="1150">
                 <a:solidFill>
                   <a:srgbClr val="1E293B"/>
                 </a:solidFill>
@@ -7237,7 +7373,7 @@
               <a:spcAft>
                 <a:spcPts val="400"/>
               </a:spcAft>
-              <a:defRPr sz="1200">
+              <a:defRPr sz="1150">
                 <a:solidFill>
                   <a:srgbClr val="1E293B"/>
                 </a:solidFill>
@@ -7253,7 +7389,7 @@
               <a:spcAft>
                 <a:spcPts val="400"/>
               </a:spcAft>
-              <a:defRPr sz="1200">
+              <a:defRPr sz="1150">
                 <a:solidFill>
                   <a:srgbClr val="1E293B"/>
                 </a:solidFill>
@@ -7269,7 +7405,7 @@
               <a:spcAft>
                 <a:spcPts val="400"/>
               </a:spcAft>
-              <a:defRPr sz="1200">
+              <a:defRPr sz="1150">
                 <a:solidFill>
                   <a:srgbClr val="1E293B"/>
                 </a:solidFill>
@@ -7285,7 +7421,7 @@
               <a:spcAft>
                 <a:spcPts val="400"/>
               </a:spcAft>
-              <a:defRPr sz="1200">
+              <a:defRPr sz="1150">
                 <a:solidFill>
                   <a:srgbClr val="1E293B"/>
                 </a:solidFill>
@@ -7301,7 +7437,7 @@
               <a:spcAft>
                 <a:spcPts val="400"/>
               </a:spcAft>
-              <a:defRPr sz="1200">
+              <a:defRPr sz="1150">
                 <a:solidFill>
                   <a:srgbClr val="1E293B"/>
                 </a:solidFill>
@@ -7317,7 +7453,7 @@
               <a:spcAft>
                 <a:spcPts val="400"/>
               </a:spcAft>
-              <a:defRPr sz="1200">
+              <a:defRPr sz="1150">
                 <a:solidFill>
                   <a:srgbClr val="1E293B"/>
                 </a:solidFill>
@@ -8433,7 +8569,7 @@
               <a:spcAft>
                 <a:spcPts val="800"/>
               </a:spcAft>
-              <a:defRPr sz="1700" b="1">
+              <a:defRPr sz="1600" b="1">
                 <a:solidFill>
                   <a:srgbClr val="0066FF"/>
                 </a:solidFill>
@@ -8449,7 +8585,7 @@
               <a:spcAft>
                 <a:spcPts val="400"/>
               </a:spcAft>
-              <a:defRPr sz="1200">
+              <a:defRPr sz="1150">
                 <a:solidFill>
                   <a:srgbClr val="1E293B"/>
                 </a:solidFill>
@@ -8465,7 +8601,7 @@
               <a:spcAft>
                 <a:spcPts val="400"/>
               </a:spcAft>
-              <a:defRPr sz="1200">
+              <a:defRPr sz="1150">
                 <a:solidFill>
                   <a:srgbClr val="1E293B"/>
                 </a:solidFill>
@@ -8549,7 +8685,7 @@
               <a:spcAft>
                 <a:spcPts val="800"/>
               </a:spcAft>
-              <a:defRPr sz="1700" b="1">
+              <a:defRPr sz="1600" b="1">
                 <a:solidFill>
                   <a:srgbClr val="F59E0B"/>
                 </a:solidFill>
@@ -8565,7 +8701,7 @@
               <a:spcAft>
                 <a:spcPts val="400"/>
               </a:spcAft>
-              <a:defRPr sz="1200">
+              <a:defRPr sz="1150">
                 <a:solidFill>
                   <a:srgbClr val="1E293B"/>
                 </a:solidFill>
@@ -8581,7 +8717,7 @@
               <a:spcAft>
                 <a:spcPts val="400"/>
               </a:spcAft>
-              <a:defRPr sz="1200">
+              <a:defRPr sz="1150">
                 <a:solidFill>
                   <a:srgbClr val="1E293B"/>
                 </a:solidFill>
@@ -8597,7 +8733,7 @@
               <a:spcAft>
                 <a:spcPts val="400"/>
               </a:spcAft>
-              <a:defRPr sz="1200">
+              <a:defRPr sz="1150">
                 <a:solidFill>
                   <a:srgbClr val="1E293B"/>
                 </a:solidFill>
@@ -8681,7 +8817,7 @@
               <a:spcAft>
                 <a:spcPts val="800"/>
               </a:spcAft>
-              <a:defRPr sz="1700" b="1">
+              <a:defRPr sz="1600" b="1">
                 <a:solidFill>
                   <a:srgbClr val="10B981"/>
                 </a:solidFill>
@@ -8697,7 +8833,7 @@
               <a:spcAft>
                 <a:spcPts val="400"/>
               </a:spcAft>
-              <a:defRPr sz="1200">
+              <a:defRPr sz="1150">
                 <a:solidFill>
                   <a:srgbClr val="1E293B"/>
                 </a:solidFill>
@@ -8713,7 +8849,7 @@
               <a:spcAft>
                 <a:spcPts val="400"/>
               </a:spcAft>
-              <a:defRPr sz="1200">
+              <a:defRPr sz="1150">
                 <a:solidFill>
                   <a:srgbClr val="1E293B"/>
                 </a:solidFill>
@@ -8797,7 +8933,7 @@
               <a:spcAft>
                 <a:spcPts val="800"/>
               </a:spcAft>
-              <a:defRPr sz="1700" b="1">
+              <a:defRPr sz="1600" b="1">
                 <a:solidFill>
                   <a:srgbClr val="0066FF"/>
                 </a:solidFill>
@@ -8813,7 +8949,7 @@
               <a:spcAft>
                 <a:spcPts val="400"/>
               </a:spcAft>
-              <a:defRPr sz="1200">
+              <a:defRPr sz="1150">
                 <a:solidFill>
                   <a:srgbClr val="1E293B"/>
                 </a:solidFill>
@@ -8829,7 +8965,7 @@
               <a:spcAft>
                 <a:spcPts val="400"/>
               </a:spcAft>
-              <a:defRPr sz="1200">
+              <a:defRPr sz="1150">
                 <a:solidFill>
                   <a:srgbClr val="1E293B"/>
                 </a:solidFill>
@@ -9025,7 +9161,7 @@
               <a:spcAft>
                 <a:spcPts val="800"/>
               </a:spcAft>
-              <a:defRPr sz="1700" b="1">
+              <a:defRPr sz="1600" b="1">
                 <a:solidFill>
                   <a:srgbClr val="0066FF"/>
                 </a:solidFill>
@@ -9041,7 +9177,7 @@
               <a:spcAft>
                 <a:spcPts val="400"/>
               </a:spcAft>
-              <a:defRPr sz="1200">
+              <a:defRPr sz="1150">
                 <a:solidFill>
                   <a:srgbClr val="1E293B"/>
                 </a:solidFill>
@@ -9057,7 +9193,7 @@
               <a:spcAft>
                 <a:spcPts val="400"/>
               </a:spcAft>
-              <a:defRPr sz="1200">
+              <a:defRPr sz="1150">
                 <a:solidFill>
                   <a:srgbClr val="1E293B"/>
                 </a:solidFill>
@@ -9073,7 +9209,7 @@
               <a:spcAft>
                 <a:spcPts val="400"/>
               </a:spcAft>
-              <a:defRPr sz="1200">
+              <a:defRPr sz="1150">
                 <a:solidFill>
                   <a:srgbClr val="1E293B"/>
                 </a:solidFill>
@@ -9157,7 +9293,7 @@
               <a:spcAft>
                 <a:spcPts val="800"/>
               </a:spcAft>
-              <a:defRPr sz="1700" b="1">
+              <a:defRPr sz="1600" b="1">
                 <a:solidFill>
                   <a:srgbClr val="F59E0B"/>
                 </a:solidFill>
@@ -9173,7 +9309,7 @@
               <a:spcAft>
                 <a:spcPts val="400"/>
               </a:spcAft>
-              <a:defRPr sz="1200">
+              <a:defRPr sz="1150">
                 <a:solidFill>
                   <a:srgbClr val="1E293B"/>
                 </a:solidFill>
@@ -9189,7 +9325,7 @@
               <a:spcAft>
                 <a:spcPts val="400"/>
               </a:spcAft>
-              <a:defRPr sz="1200">
+              <a:defRPr sz="1150">
                 <a:solidFill>
                   <a:srgbClr val="1E293B"/>
                 </a:solidFill>
@@ -9205,7 +9341,7 @@
               <a:spcAft>
                 <a:spcPts val="400"/>
               </a:spcAft>
-              <a:defRPr sz="1200">
+              <a:defRPr sz="1150">
                 <a:solidFill>
                   <a:srgbClr val="1E293B"/>
                 </a:solidFill>
@@ -9289,7 +9425,7 @@
               <a:spcAft>
                 <a:spcPts val="800"/>
               </a:spcAft>
-              <a:defRPr sz="1700" b="1">
+              <a:defRPr sz="1600" b="1">
                 <a:solidFill>
                   <a:srgbClr val="10B981"/>
                 </a:solidFill>
@@ -9305,7 +9441,7 @@
               <a:spcAft>
                 <a:spcPts val="400"/>
               </a:spcAft>
-              <a:defRPr sz="1200">
+              <a:defRPr sz="1150">
                 <a:solidFill>
                   <a:srgbClr val="1E293B"/>
                 </a:solidFill>
@@ -9321,7 +9457,7 @@
               <a:spcAft>
                 <a:spcPts val="400"/>
               </a:spcAft>
-              <a:defRPr sz="1200">
+              <a:defRPr sz="1150">
                 <a:solidFill>
                   <a:srgbClr val="1E293B"/>
                 </a:solidFill>
@@ -9337,7 +9473,7 @@
               <a:spcAft>
                 <a:spcPts val="400"/>
               </a:spcAft>
-              <a:defRPr sz="1200">
+              <a:defRPr sz="1150">
                 <a:solidFill>
                   <a:srgbClr val="1E293B"/>
                 </a:solidFill>
@@ -9421,7 +9557,7 @@
               <a:spcAft>
                 <a:spcPts val="800"/>
               </a:spcAft>
-              <a:defRPr sz="1700" b="1">
+              <a:defRPr sz="1600" b="1">
                 <a:solidFill>
                   <a:srgbClr val="0066FF"/>
                 </a:solidFill>
@@ -9437,7 +9573,7 @@
               <a:spcAft>
                 <a:spcPts val="400"/>
               </a:spcAft>
-              <a:defRPr sz="1200">
+              <a:defRPr sz="1150">
                 <a:solidFill>
                   <a:srgbClr val="1E293B"/>
                 </a:solidFill>
@@ -9453,7 +9589,7 @@
               <a:spcAft>
                 <a:spcPts val="400"/>
               </a:spcAft>
-              <a:defRPr sz="1200">
+              <a:defRPr sz="1150">
                 <a:solidFill>
                   <a:srgbClr val="1E293B"/>
                 </a:solidFill>
@@ -9469,7 +9605,7 @@
               <a:spcAft>
                 <a:spcPts val="400"/>
               </a:spcAft>
-              <a:defRPr sz="1200">
+              <a:defRPr sz="1150">
                 <a:solidFill>
                   <a:srgbClr val="1E293B"/>
                 </a:solidFill>
@@ -9665,7 +9801,7 @@
               <a:spcAft>
                 <a:spcPts val="800"/>
               </a:spcAft>
-              <a:defRPr sz="1700" b="1">
+              <a:defRPr sz="1600" b="1">
                 <a:solidFill>
                   <a:srgbClr val="0066FF"/>
                 </a:solidFill>
@@ -9681,7 +9817,7 @@
               <a:spcAft>
                 <a:spcPts val="400"/>
               </a:spcAft>
-              <a:defRPr sz="1200">
+              <a:defRPr sz="1150">
                 <a:solidFill>
                   <a:srgbClr val="1E293B"/>
                 </a:solidFill>
@@ -9697,7 +9833,7 @@
               <a:spcAft>
                 <a:spcPts val="400"/>
               </a:spcAft>
-              <a:defRPr sz="1200">
+              <a:defRPr sz="1150">
                 <a:solidFill>
                   <a:srgbClr val="1E293B"/>
                 </a:solidFill>
@@ -9713,7 +9849,7 @@
               <a:spcAft>
                 <a:spcPts val="400"/>
               </a:spcAft>
-              <a:defRPr sz="1200">
+              <a:defRPr sz="1150">
                 <a:solidFill>
                   <a:srgbClr val="1E293B"/>
                 </a:solidFill>
@@ -9729,7 +9865,7 @@
               <a:spcAft>
                 <a:spcPts val="400"/>
               </a:spcAft>
-              <a:defRPr sz="1200">
+              <a:defRPr sz="1150">
                 <a:solidFill>
                   <a:srgbClr val="1E293B"/>
                 </a:solidFill>
@@ -9813,7 +9949,7 @@
               <a:spcAft>
                 <a:spcPts val="800"/>
               </a:spcAft>
-              <a:defRPr sz="1700" b="1">
+              <a:defRPr sz="1600" b="1">
                 <a:solidFill>
                   <a:srgbClr val="F59E0B"/>
                 </a:solidFill>
@@ -9829,7 +9965,7 @@
               <a:spcAft>
                 <a:spcPts val="400"/>
               </a:spcAft>
-              <a:defRPr sz="1200">
+              <a:defRPr sz="1150">
                 <a:solidFill>
                   <a:srgbClr val="1E293B"/>
                 </a:solidFill>
@@ -9845,7 +9981,7 @@
               <a:spcAft>
                 <a:spcPts val="400"/>
               </a:spcAft>
-              <a:defRPr sz="1200">
+              <a:defRPr sz="1150">
                 <a:solidFill>
                   <a:srgbClr val="1E293B"/>
                 </a:solidFill>
@@ -9861,7 +9997,7 @@
               <a:spcAft>
                 <a:spcPts val="400"/>
               </a:spcAft>
-              <a:defRPr sz="1200">
+              <a:defRPr sz="1150">
                 <a:solidFill>
                   <a:srgbClr val="1E293B"/>
                 </a:solidFill>
@@ -9877,7 +10013,7 @@
               <a:spcAft>
                 <a:spcPts val="400"/>
               </a:spcAft>
-              <a:defRPr sz="1200">
+              <a:defRPr sz="1150">
                 <a:solidFill>
                   <a:srgbClr val="1E293B"/>
                 </a:solidFill>
